--- a/save-as-skill/save-as-skill.pptx
+++ b/save-as-skill/save-as-skill.pptx
@@ -22,9 +22,10 @@
     <p:sldId id="270" r:id="rId16"/>
     <p:sldId id="271" r:id="rId17"/>
     <p:sldId id="272" r:id="rId18"/>
+    <p:sldId id="273" r:id="rId19"/>
   </p:sldIdLst>
   <p:notesMasterIdLst>
-    <p:notesMasterId r:id="rId19"/>
+    <p:notesMasterId r:id="rId20"/>
   </p:notesMasterIdLst>
   <p:sldSz cx="12192000" cy="6858000"/>
   <p:notesSz cx="6858000" cy="12192000"/>
@@ -1246,6 +1247,94 @@
             <a:fld id="{F7021451-1387-4CA6-816F-3879F97B5CBC}" type="slidenum">
               <a:rPr lang="en-US"/>
               <a:t>17</a:t>
+            </a:fld>
+            <a:endParaRPr lang="en-US"/>
+          </a:p>
+        </p:txBody>
+      </p:sp>
+    </p:spTree>
+    <p:extLst>
+      <p:ext uri="{BB962C8B-B14F-4D97-AF65-F5344CB8AC3E}">
+        <p14:creationId xmlns:p14="http://schemas.microsoft.com/office/powerpoint/2010/main" val="1024086991"/>
+      </p:ext>
+    </p:extLst>
+  </p:cSld>
+  <p:clrMapOvr>
+    <a:masterClrMapping/>
+  </p:clrMapOvr>
+</p:notes>
+</file>
+
+<file path=ppt/notesSlides/notesSlide18.xml><?xml version="1.0" encoding="utf-8"?>
+<p:notes xmlns:a="http://schemas.openxmlformats.org/drawingml/2006/main" xmlns:r="http://schemas.openxmlformats.org/officeDocument/2006/relationships" xmlns:p="http://schemas.openxmlformats.org/presentationml/2006/main">
+  <p:cSld>
+    <p:spTree>
+      <p:nvGrpSpPr>
+        <p:cNvPr id="1" name=""/>
+        <p:cNvGrpSpPr/>
+        <p:nvPr/>
+      </p:nvGrpSpPr>
+      <p:grpSpPr>
+        <a:xfrm>
+          <a:off x="0" y="0"/>
+          <a:ext cx="0" cy="0"/>
+          <a:chOff x="0" y="0"/>
+          <a:chExt cx="0" cy="0"/>
+        </a:xfrm>
+      </p:grpSpPr>
+      <p:sp>
+        <p:nvSpPr>
+          <p:cNvPr id="2" name="Slide Image Placeholder 1"/>
+          <p:cNvSpPr>
+            <a:spLocks noGrp="1" noRot="1" noChangeAspect="1"/>
+          </p:cNvSpPr>
+          <p:nvPr>
+            <p:ph type="sldImg"/>
+          </p:nvPr>
+        </p:nvSpPr>
+        <p:spPr/>
+      </p:sp>
+      <p:sp>
+        <p:nvSpPr>
+          <p:cNvPr id="3" name="Notes Placeholder 2"/>
+          <p:cNvSpPr>
+            <a:spLocks noGrp="1"/>
+          </p:cNvSpPr>
+          <p:nvPr>
+            <p:ph type="body" idx="1"/>
+          </p:nvPr>
+        </p:nvSpPr>
+        <p:spPr/>
+        <p:txBody>
+          <a:bodyPr/>
+          <a:lstStyle/>
+          <a:p>
+            <a:r>
+              <a:rPr lang="en-US" dirty="0"/>
+              <a:t/>
+            </a:r>
+            <a:endParaRPr lang="en-US" dirty="0"/>
+          </a:p>
+        </p:txBody>
+      </p:sp>
+      <p:sp>
+        <p:nvSpPr>
+          <p:cNvPr id="4" name="Slide Number Placeholder 3"/>
+          <p:cNvSpPr>
+            <a:spLocks noGrp="1"/>
+          </p:cNvSpPr>
+          <p:nvPr>
+            <p:ph type="sldNum" sz="quarter" idx="10"/>
+          </p:nvPr>
+        </p:nvSpPr>
+        <p:spPr/>
+        <p:txBody>
+          <a:bodyPr/>
+          <a:lstStyle/>
+          <a:p>
+            <a:fld id="{F7021451-1387-4CA6-816F-3879F97B5CBC}" type="slidenum">
+              <a:rPr lang="en-US"/>
+              <a:t>18</a:t>
             </a:fld>
             <a:endParaRPr lang="en-US"/>
           </a:p>
@@ -2522,36 +2611,14 @@
       </p:grpSpPr>
       <p:sp>
         <p:nvSpPr>
-          <p:cNvPr id="2" name="Shape 0"/>
+          <p:cNvPr id="2" name="Text 0"/>
           <p:cNvSpPr/>
           <p:nvPr/>
         </p:nvSpPr>
         <p:spPr>
           <a:xfrm>
-            <a:off x="5175504" y="1828800"/>
-            <a:ext cx="1828800" cy="1828800"/>
-          </a:xfrm>
-          <a:prstGeom prst="roundRect">
-            <a:avLst>
-              <a:gd name="adj" fmla="val 15000"/>
-            </a:avLst>
-          </a:prstGeom>
-          <a:solidFill>
-            <a:srgbClr val="3F6B5F"/>
-          </a:solidFill>
-          <a:ln/>
-        </p:spPr>
-      </p:sp>
-      <p:sp>
-        <p:nvSpPr>
-          <p:cNvPr id="3" name="Text 1"/>
-          <p:cNvSpPr/>
-          <p:nvPr/>
-        </p:nvSpPr>
-        <p:spPr>
-          <a:xfrm>
-            <a:off x="5175504" y="1828800"/>
-            <a:ext cx="1828800" cy="1828800"/>
+            <a:off x="548640" y="384048"/>
+            <a:ext cx="11091672" cy="731520"/>
           </a:xfrm>
           <a:prstGeom prst="rect">
             <a:avLst/>
@@ -2560,26 +2627,62 @@
           <a:ln/>
         </p:spPr>
         <p:txBody>
-          <a:bodyPr wrap="square" rtlCol="0" anchor="ctr"/>
+          <a:bodyPr wrap="square" rtlCol="0" anchor="ctr">
+            <a:normAutofit/>
+          </a:bodyPr>
           <a:lstStyle/>
           <a:p>
-            <a:pPr algn="ctr" indent="0" marL="0">
-              <a:buNone/>
-            </a:pPr>
-            <a:r>
-              <a:rPr lang="en-US" sz="5200" b="1" dirty="0">
-                <a:solidFill>
-                  <a:srgbClr val="FFFFFF"/>
-                </a:solidFill>
-                <a:latin typeface="Malgun Gothic" pitchFamily="34" charset="0"/>
-                <a:ea typeface="Malgun Gothic" pitchFamily="34" charset="-122"/>
-                <a:cs typeface="Malgun Gothic" pitchFamily="34" charset="-120"/>
-              </a:rPr>
-              <a:t>3</a:t>
-            </a:r>
-            <a:endParaRPr lang="en-US" sz="5200" dirty="0"/>
+            <a:pPr indent="0" marL="0">
+              <a:buNone/>
+            </a:pPr>
+            <a:r>
+              <a:rPr lang="en-US" sz="2400" b="1" dirty="0">
+                <a:solidFill>
+                  <a:srgbClr val="2A2723"/>
+                </a:solidFill>
+                <a:latin typeface="Malgun Gothic" pitchFamily="34" charset="0"/>
+                <a:ea typeface="Malgun Gothic" pitchFamily="34" charset="-122"/>
+                <a:cs typeface="Malgun Gothic" pitchFamily="34" charset="-120"/>
+              </a:rPr>
+              <a:t>앞부분과 </a:t>
+            </a:r>
+            <a:pPr indent="0" marL="0">
+              <a:buNone/>
+            </a:pPr>
+            <a:r>
+              <a:rPr lang="en-US" sz="2400" b="1" dirty="0">
+                <a:solidFill>
+                  <a:srgbClr val="3F6B5F"/>
+                </a:solidFill>
+                <a:latin typeface="Malgun Gothic" pitchFamily="34" charset="0"/>
+                <a:ea typeface="Malgun Gothic" pitchFamily="34" charset="-122"/>
+                <a:cs typeface="Malgun Gothic" pitchFamily="34" charset="-120"/>
+              </a:rPr>
+              <a:t>본문</a:t>
+            </a:r>
+            <a:endParaRPr lang="en-US" sz="2400" dirty="0"/>
           </a:p>
         </p:txBody>
+      </p:sp>
+      <p:sp>
+        <p:nvSpPr>
+          <p:cNvPr id="3" name="Shape 1"/>
+          <p:cNvSpPr/>
+          <p:nvPr/>
+        </p:nvSpPr>
+        <p:spPr>
+          <a:xfrm>
+            <a:off x="566928" y="1133856"/>
+            <a:ext cx="777240" cy="41148"/>
+          </a:xfrm>
+          <a:prstGeom prst="rect">
+            <a:avLst/>
+          </a:prstGeom>
+          <a:solidFill>
+            <a:srgbClr val="3F6B5F"/>
+          </a:solidFill>
+          <a:ln/>
+        </p:spPr>
       </p:sp>
       <p:sp>
         <p:nvSpPr>
@@ -2589,8 +2692,8 @@
         </p:nvSpPr>
         <p:spPr>
           <a:xfrm>
-            <a:off x="914400" y="3931920"/>
-            <a:ext cx="10332720" cy="868680"/>
+            <a:off x="548640" y="1371600"/>
+            <a:ext cx="11091672" cy="1949958"/>
           </a:xfrm>
           <a:prstGeom prst="rect">
             <a:avLst/>
@@ -2599,14 +2702,53 @@
           <a:ln/>
         </p:spPr>
         <p:txBody>
-          <a:bodyPr wrap="square" rtlCol="0" anchor="ctr"/>
+          <a:bodyPr wrap="square" rtlCol="0" anchor="t">
+            <a:normAutofit/>
+          </a:bodyPr>
           <a:lstStyle/>
           <a:p>
-            <a:pPr algn="ctr" indent="0" marL="0">
-              <a:buNone/>
-            </a:pPr>
-            <a:r>
-              <a:rPr lang="en-US" sz="3000" b="1" dirty="0">
+            <a:pPr indent="0" marL="0">
+              <a:lnSpc>
+                <a:spcPct val="105000"/>
+              </a:lnSpc>
+              <a:buNone/>
+            </a:pPr>
+            <a:r>
+              <a:rPr lang="en-US" sz="1450" b="1" dirty="0">
+                <a:solidFill>
+                  <a:srgbClr val="3F6B5F"/>
+                </a:solidFill>
+                <a:latin typeface="Malgun Gothic" pitchFamily="34" charset="0"/>
+                <a:ea typeface="Malgun Gothic" pitchFamily="34" charset="-122"/>
+                <a:cs typeface="Malgun Gothic" pitchFamily="34" charset="-120"/>
+              </a:rPr>
+              <a:t>›  </a:t>
+            </a:r>
+            <a:pPr indent="0" marL="0">
+              <a:lnSpc>
+                <a:spcPct val="105000"/>
+              </a:lnSpc>
+              <a:buNone/>
+            </a:pPr>
+            <a:r>
+              <a:rPr lang="en-US" sz="1450" dirty="0">
+                <a:solidFill>
+                  <a:srgbClr val="6B6357"/>
+                </a:solidFill>
+                <a:latin typeface="Malgun Gothic" pitchFamily="34" charset="0"/>
+                <a:ea typeface="Malgun Gothic" pitchFamily="34" charset="-122"/>
+                <a:cs typeface="Malgun Gothic" pitchFamily="34" charset="-120"/>
+              </a:rPr>
+              <a:t>.md는 </a:t>
+            </a:r>
+            <a:pPr indent="0" marL="0">
+              <a:lnSpc>
+                <a:spcPct val="105000"/>
+              </a:lnSpc>
+              <a:buNone/>
+            </a:pPr>
+            <a:r>
+              <a:rPr lang="en-US" sz="1450" b="1" dirty="0">
                 <a:solidFill>
                   <a:srgbClr val="2A2723"/>
                 </a:solidFill>
@@ -2614,22 +2756,442 @@
                 <a:ea typeface="Malgun Gothic" pitchFamily="34" charset="-122"/>
                 <a:cs typeface="Malgun Gothic" pitchFamily="34" charset="-120"/>
               </a:rPr>
-              <a:t>본문과 참조 자료 연결하기</a:t>
-            </a:r>
-            <a:endParaRPr lang="en-US" sz="3000" dirty="0"/>
+              <a:t>Markdown</a:t>
+            </a:r>
+            <a:pPr indent="0" marL="0">
+              <a:lnSpc>
+                <a:spcPct val="105000"/>
+              </a:lnSpc>
+              <a:spcAft>
+                <a:spcPts val="700"/>
+              </a:spcAft>
+              <a:buNone/>
+            </a:pPr>
+            <a:r>
+              <a:rPr lang="en-US" sz="1450" dirty="0">
+                <a:solidFill>
+                  <a:srgbClr val="6B6357"/>
+                </a:solidFill>
+                <a:latin typeface="Malgun Gothic" pitchFamily="34" charset="0"/>
+                <a:ea typeface="Malgun Gothic" pitchFamily="34" charset="-122"/>
+                <a:cs typeface="Malgun Gothic" pitchFamily="34" charset="-120"/>
+              </a:rPr>
+              <a:t> 문서의 확장자 — 평문에 기호를 붙여 제목·목록·링크를 표현. #은 제목, 대괄호 안은 링크에 보이는 문구, 괄호 안은 대상 파일의 위치</a:t>
+            </a:r>
+            <a:endParaRPr lang="en-US" sz="1450" dirty="0"/>
+          </a:p>
+          <a:p>
+            <a:pPr indent="0" marL="0">
+              <a:lnSpc>
+                <a:spcPct val="105000"/>
+              </a:lnSpc>
+              <a:buNone/>
+            </a:pPr>
+            <a:r>
+              <a:rPr lang="en-US" sz="1450" b="1" dirty="0">
+                <a:solidFill>
+                  <a:srgbClr val="3F6B5F"/>
+                </a:solidFill>
+                <a:latin typeface="Malgun Gothic" pitchFamily="34" charset="0"/>
+                <a:ea typeface="Malgun Gothic" pitchFamily="34" charset="-122"/>
+                <a:cs typeface="Malgun Gothic" pitchFamily="34" charset="-120"/>
+              </a:rPr>
+              <a:t>›  </a:t>
+            </a:r>
+            <a:pPr indent="0" marL="0">
+              <a:lnSpc>
+                <a:spcPct val="105000"/>
+              </a:lnSpc>
+              <a:buNone/>
+            </a:pPr>
+            <a:r>
+              <a:rPr lang="en-US" sz="1450" dirty="0">
+                <a:solidFill>
+                  <a:srgbClr val="6B6357"/>
+                </a:solidFill>
+                <a:latin typeface="Malgun Gothic" pitchFamily="34" charset="0"/>
+                <a:ea typeface="Malgun Gothic" pitchFamily="34" charset="-122"/>
+                <a:cs typeface="Malgun Gothic" pitchFamily="34" charset="-120"/>
+              </a:rPr>
+              <a:t>맨 위 --- 사이의 구역을 </a:t>
+            </a:r>
+            <a:pPr indent="0" marL="0">
+              <a:lnSpc>
+                <a:spcPct val="105000"/>
+              </a:lnSpc>
+              <a:buNone/>
+            </a:pPr>
+            <a:r>
+              <a:rPr lang="en-US" sz="1450" b="1" dirty="0">
+                <a:solidFill>
+                  <a:srgbClr val="2A2723"/>
+                </a:solidFill>
+                <a:latin typeface="Malgun Gothic" pitchFamily="34" charset="0"/>
+                <a:ea typeface="Malgun Gothic" pitchFamily="34" charset="-122"/>
+                <a:cs typeface="Malgun Gothic" pitchFamily="34" charset="-120"/>
+              </a:rPr>
+              <a:t>frontmatter</a:t>
+            </a:r>
+            <a:pPr indent="0" marL="0">
+              <a:lnSpc>
+                <a:spcPct val="105000"/>
+              </a:lnSpc>
+              <a:buNone/>
+            </a:pPr>
+            <a:r>
+              <a:rPr lang="en-US" sz="1450" dirty="0">
+                <a:solidFill>
+                  <a:srgbClr val="6B6357"/>
+                </a:solidFill>
+                <a:latin typeface="Malgun Gothic" pitchFamily="34" charset="0"/>
+                <a:ea typeface="Malgun Gothic" pitchFamily="34" charset="-122"/>
+                <a:cs typeface="Malgun Gothic" pitchFamily="34" charset="-120"/>
+              </a:rPr>
+              <a:t>라 하며 </a:t>
+            </a:r>
+            <a:pPr indent="0" marL="0">
+              <a:lnSpc>
+                <a:spcPct val="105000"/>
+              </a:lnSpc>
+              <a:buNone/>
+            </a:pPr>
+            <a:r>
+              <a:rPr lang="en-US" sz="1450" b="1" dirty="0">
+                <a:solidFill>
+                  <a:srgbClr val="2A2723"/>
+                </a:solidFill>
+                <a:latin typeface="Malgun Gothic" pitchFamily="34" charset="0"/>
+                <a:ea typeface="Malgun Gothic" pitchFamily="34" charset="-122"/>
+                <a:cs typeface="Malgun Gothic" pitchFamily="34" charset="-120"/>
+              </a:rPr>
+              <a:t>YAML</a:t>
+            </a:r>
+            <a:pPr indent="0" marL="0">
+              <a:lnSpc>
+                <a:spcPct val="105000"/>
+              </a:lnSpc>
+              <a:buNone/>
+            </a:pPr>
+            <a:r>
+              <a:rPr lang="en-US" sz="1450" dirty="0">
+                <a:solidFill>
+                  <a:srgbClr val="6B6357"/>
+                </a:solidFill>
+                <a:latin typeface="Malgun Gothic" pitchFamily="34" charset="0"/>
+                <a:ea typeface="Malgun Gothic" pitchFamily="34" charset="-122"/>
+                <a:cs typeface="Malgun Gothic" pitchFamily="34" charset="-120"/>
+              </a:rPr>
+              <a:t>(속성: 값)로 적습니다 — </a:t>
+            </a:r>
+            <a:pPr indent="0" marL="0">
+              <a:lnSpc>
+                <a:spcPct val="105000"/>
+              </a:lnSpc>
+              <a:spcAft>
+                <a:spcPts val="700"/>
+              </a:spcAft>
+              <a:buNone/>
+            </a:pPr>
+            <a:r>
+              <a:rPr lang="en-US" sz="1450" b="1" dirty="0">
+                <a:solidFill>
+                  <a:srgbClr val="3F6B5F"/>
+                </a:solidFill>
+                <a:latin typeface="Malgun Gothic" pitchFamily="34" charset="0"/>
+                <a:ea typeface="Malgun Gothic" pitchFamily="34" charset="-122"/>
+                <a:cs typeface="Malgun Gothic" pitchFamily="34" charset="-120"/>
+              </a:rPr>
+              <a:t>본문이 실제 작업 지침이라면 앞부분은 Skill을 발견하고 선택하는 데 쓰는 안내</a:t>
+            </a:r>
+            <a:endParaRPr lang="en-US" sz="1450" dirty="0"/>
+          </a:p>
+          <a:p>
+            <a:pPr indent="0" marL="0">
+              <a:lnSpc>
+                <a:spcPct val="105000"/>
+              </a:lnSpc>
+              <a:buNone/>
+            </a:pPr>
+            <a:r>
+              <a:rPr lang="en-US" sz="1450" b="1" dirty="0">
+                <a:solidFill>
+                  <a:srgbClr val="3F6B5F"/>
+                </a:solidFill>
+                <a:latin typeface="Malgun Gothic" pitchFamily="34" charset="0"/>
+                <a:ea typeface="Malgun Gothic" pitchFamily="34" charset="-122"/>
+                <a:cs typeface="Malgun Gothic" pitchFamily="34" charset="-120"/>
+              </a:rPr>
+              <a:t>›  </a:t>
+            </a:r>
+            <a:pPr indent="0" marL="0">
+              <a:lnSpc>
+                <a:spcPct val="105000"/>
+              </a:lnSpc>
+              <a:buNone/>
+            </a:pPr>
+            <a:r>
+              <a:rPr lang="en-US" sz="1450" dirty="0">
+                <a:solidFill>
+                  <a:srgbClr val="6B6357"/>
+                </a:solidFill>
+                <a:latin typeface="Malgun Gothic" pitchFamily="34" charset="0"/>
+                <a:ea typeface="Malgun Gothic" pitchFamily="34" charset="-122"/>
+                <a:cs typeface="Malgun Gothic" pitchFamily="34" charset="-120"/>
+              </a:rPr>
+              <a:t>name은 </a:t>
+            </a:r>
+            <a:pPr indent="0" marL="0">
+              <a:lnSpc>
+                <a:spcPct val="105000"/>
+              </a:lnSpc>
+              <a:buNone/>
+            </a:pPr>
+            <a:r>
+              <a:rPr lang="en-US" sz="1450" b="1" dirty="0">
+                <a:solidFill>
+                  <a:srgbClr val="2A2723"/>
+                </a:solidFill>
+                <a:latin typeface="Malgun Gothic" pitchFamily="34" charset="0"/>
+                <a:ea typeface="Malgun Gothic" pitchFamily="34" charset="-122"/>
+                <a:cs typeface="Malgun Gothic" pitchFamily="34" charset="-120"/>
+              </a:rPr>
+              <a:t>폴더와 함께 다룰 식별자</a:t>
+            </a:r>
+            <a:pPr indent="0" marL="0">
+              <a:lnSpc>
+                <a:spcPct val="105000"/>
+              </a:lnSpc>
+              <a:buNone/>
+            </a:pPr>
+            <a:r>
+              <a:rPr lang="en-US" sz="1450" dirty="0">
+                <a:solidFill>
+                  <a:srgbClr val="6B6357"/>
+                </a:solidFill>
+                <a:latin typeface="Malgun Gothic" pitchFamily="34" charset="0"/>
+                <a:ea typeface="Malgun Gothic" pitchFamily="34" charset="-122"/>
+                <a:cs typeface="Malgun Gothic" pitchFamily="34" charset="-120"/>
+              </a:rPr>
+              <a:t>. description에는 </a:t>
+            </a:r>
+            <a:pPr indent="0" marL="0">
+              <a:lnSpc>
+                <a:spcPct val="105000"/>
+              </a:lnSpc>
+              <a:buNone/>
+            </a:pPr>
+            <a:r>
+              <a:rPr lang="en-US" sz="1450" b="1" dirty="0">
+                <a:solidFill>
+                  <a:srgbClr val="3F6B5F"/>
+                </a:solidFill>
+                <a:latin typeface="Malgun Gothic" pitchFamily="34" charset="0"/>
+                <a:ea typeface="Malgun Gothic" pitchFamily="34" charset="-122"/>
+                <a:cs typeface="Malgun Gothic" pitchFamily="34" charset="-120"/>
+              </a:rPr>
+              <a:t>'무엇을 하는지'와 '언제 필요한지'</a:t>
+            </a:r>
+            <a:pPr indent="0" marL="0">
+              <a:lnSpc>
+                <a:spcPct val="105000"/>
+              </a:lnSpc>
+              <a:buNone/>
+            </a:pPr>
+            <a:r>
+              <a:rPr lang="en-US" sz="1450" dirty="0">
+                <a:solidFill>
+                  <a:srgbClr val="6B6357"/>
+                </a:solidFill>
+                <a:latin typeface="Malgun Gothic" pitchFamily="34" charset="0"/>
+                <a:ea typeface="Malgun Gothic" pitchFamily="34" charset="-122"/>
+                <a:cs typeface="Malgun Gothic" pitchFamily="34" charset="-120"/>
+              </a:rPr>
+              <a:t>를 — 예제의 '주간 업무 보고', '이번 주 진행 상황 정리'는 </a:t>
+            </a:r>
+            <a:pPr indent="0" marL="0">
+              <a:lnSpc>
+                <a:spcPct val="105000"/>
+              </a:lnSpc>
+              <a:buNone/>
+            </a:pPr>
+            <a:r>
+              <a:rPr lang="en-US" sz="1450" b="1" dirty="0">
+                <a:solidFill>
+                  <a:srgbClr val="2A2723"/>
+                </a:solidFill>
+                <a:latin typeface="Malgun Gothic" pitchFamily="34" charset="0"/>
+                <a:ea typeface="Malgun Gothic" pitchFamily="34" charset="-122"/>
+                <a:cs typeface="Malgun Gothic" pitchFamily="34" charset="-120"/>
+              </a:rPr>
+              <a:t>사용자가 할 법한 요청</a:t>
+            </a:r>
+            <a:pPr indent="0" marL="0">
+              <a:lnSpc>
+                <a:spcPct val="105000"/>
+              </a:lnSpc>
+              <a:spcAft>
+                <a:spcPts val="700"/>
+              </a:spcAft>
+              <a:buNone/>
+            </a:pPr>
+            <a:r>
+              <a:rPr lang="en-US" sz="1450" dirty="0">
+                <a:solidFill>
+                  <a:srgbClr val="6B6357"/>
+                </a:solidFill>
+                <a:latin typeface="Malgun Gothic" pitchFamily="34" charset="0"/>
+                <a:ea typeface="Malgun Gothic" pitchFamily="34" charset="-122"/>
+                <a:cs typeface="Malgun Gothic" pitchFamily="34" charset="-120"/>
+              </a:rPr>
+              <a:t>과 연결</a:t>
+            </a:r>
+            <a:endParaRPr lang="en-US" sz="1450" dirty="0"/>
+          </a:p>
+          <a:p>
+            <a:pPr indent="0" marL="0">
+              <a:lnSpc>
+                <a:spcPct val="105000"/>
+              </a:lnSpc>
+              <a:buNone/>
+            </a:pPr>
+            <a:r>
+              <a:rPr lang="en-US" sz="1450" b="1" dirty="0">
+                <a:solidFill>
+                  <a:srgbClr val="3F6B5F"/>
+                </a:solidFill>
+                <a:latin typeface="Malgun Gothic" pitchFamily="34" charset="0"/>
+                <a:ea typeface="Malgun Gothic" pitchFamily="34" charset="-122"/>
+                <a:cs typeface="Malgun Gothic" pitchFamily="34" charset="-120"/>
+              </a:rPr>
+              <a:t>›  </a:t>
+            </a:r>
+            <a:pPr indent="0" marL="0">
+              <a:lnSpc>
+                <a:spcPct val="105000"/>
+              </a:lnSpc>
+              <a:buNone/>
+            </a:pPr>
+            <a:r>
+              <a:rPr lang="en-US" sz="1450" b="1" dirty="0">
+                <a:solidFill>
+                  <a:srgbClr val="A65A3F"/>
+                </a:solidFill>
+                <a:latin typeface="Malgun Gothic" pitchFamily="34" charset="0"/>
+                <a:ea typeface="Malgun Gothic" pitchFamily="34" charset="-122"/>
+                <a:cs typeface="Malgun Gothic" pitchFamily="34" charset="-120"/>
+              </a:rPr>
+              <a:t>'모든 일을 완벽히 처리한다'처럼 넓게 쓰면 선택 기준이 흐려집니다</a:t>
+            </a:r>
+            <a:pPr indent="0" marL="0">
+              <a:lnSpc>
+                <a:spcPct val="105000"/>
+              </a:lnSpc>
+              <a:buNone/>
+            </a:pPr>
+            <a:r>
+              <a:rPr lang="en-US" sz="1450" dirty="0">
+                <a:solidFill>
+                  <a:srgbClr val="6B6357"/>
+                </a:solidFill>
+                <a:latin typeface="Malgun Gothic" pitchFamily="34" charset="0"/>
+                <a:ea typeface="Malgun Gothic" pitchFamily="34" charset="-122"/>
+                <a:cs typeface="Malgun Gothic" pitchFamily="34" charset="-120"/>
+              </a:rPr>
+              <a:t> — </a:t>
+            </a:r>
+            <a:pPr indent="0" marL="0">
+              <a:lnSpc>
+                <a:spcPct val="105000"/>
+              </a:lnSpc>
+              <a:buNone/>
+            </a:pPr>
+            <a:r>
+              <a:rPr lang="en-US" sz="1450" b="1" dirty="0">
+                <a:solidFill>
+                  <a:srgbClr val="3F6B5F"/>
+                </a:solidFill>
+                <a:latin typeface="Malgun Gothic" pitchFamily="34" charset="0"/>
+                <a:ea typeface="Malgun Gothic" pitchFamily="34" charset="-122"/>
+                <a:cs typeface="Malgun Gothic" pitchFamily="34" charset="-120"/>
+              </a:rPr>
+              <a:t>제외 문장을 계속 늘리는 것보다 업무 범위를 먼저 정확하게</a:t>
+            </a:r>
+            <a:pPr indent="0" marL="0">
+              <a:lnSpc>
+                <a:spcPct val="105000"/>
+              </a:lnSpc>
+              <a:spcAft>
+                <a:spcPts val="700"/>
+              </a:spcAft>
+              <a:buNone/>
+            </a:pPr>
+            <a:r>
+              <a:rPr lang="en-US" sz="1450" dirty="0">
+                <a:solidFill>
+                  <a:srgbClr val="6B6357"/>
+                </a:solidFill>
+                <a:latin typeface="Malgun Gothic" pitchFamily="34" charset="0"/>
+                <a:ea typeface="Malgun Gothic" pitchFamily="34" charset="-122"/>
+                <a:cs typeface="Malgun Gothic" pitchFamily="34" charset="-120"/>
+              </a:rPr>
+              <a:t> 표현하세요</a:t>
+            </a:r>
+            <a:endParaRPr lang="en-US" sz="1450" dirty="0"/>
           </a:p>
         </p:txBody>
       </p:sp>
       <p:sp>
         <p:nvSpPr>
-          <p:cNvPr id="5" name="Text 3"/>
+          <p:cNvPr id="5" name="Shape 3"/>
           <p:cNvSpPr/>
           <p:nvPr/>
         </p:nvSpPr>
         <p:spPr>
           <a:xfrm>
-            <a:off x="914400" y="4846320"/>
-            <a:ext cx="10332720" cy="548640"/>
+            <a:off x="548640" y="3467862"/>
+            <a:ext cx="11091672" cy="769620"/>
+          </a:xfrm>
+          <a:prstGeom prst="roundRect">
+            <a:avLst>
+              <a:gd name="adj" fmla="val 7129"/>
+            </a:avLst>
+          </a:prstGeom>
+          <a:solidFill>
+            <a:srgbClr val="F2EDE4"/>
+          </a:solidFill>
+          <a:ln/>
+        </p:spPr>
+      </p:sp>
+      <p:sp>
+        <p:nvSpPr>
+          <p:cNvPr id="6" name="Shape 4"/>
+          <p:cNvSpPr/>
+          <p:nvPr/>
+        </p:nvSpPr>
+        <p:spPr>
+          <a:xfrm>
+            <a:off x="548640" y="3467862"/>
+            <a:ext cx="54864" cy="769620"/>
+          </a:xfrm>
+          <a:prstGeom prst="rect">
+            <a:avLst/>
+          </a:prstGeom>
+          <a:solidFill>
+            <a:srgbClr val="C8A15A"/>
+          </a:solidFill>
+          <a:ln/>
+        </p:spPr>
+      </p:sp>
+      <p:sp>
+        <p:nvSpPr>
+          <p:cNvPr id="7" name="Text 5"/>
+          <p:cNvSpPr/>
+          <p:nvPr/>
+        </p:nvSpPr>
+        <p:spPr>
+          <a:xfrm>
+            <a:off x="786384" y="3467862"/>
+            <a:ext cx="10707624" cy="769620"/>
           </a:xfrm>
           <a:prstGeom prst="rect">
             <a:avLst/>
@@ -2638,14 +3200,19 @@
           <a:ln/>
         </p:spPr>
         <p:txBody>
-          <a:bodyPr wrap="square" rtlCol="0" anchor="ctr"/>
+          <a:bodyPr wrap="square" rtlCol="0" anchor="ctr">
+            <a:normAutofit/>
+          </a:bodyPr>
           <a:lstStyle/>
           <a:p>
-            <a:pPr algn="ctr" indent="0" marL="0">
-              <a:buNone/>
-            </a:pPr>
-            <a:r>
-              <a:rPr lang="en-US" sz="1600" dirty="0">
+            <a:pPr indent="0" marL="0">
+              <a:lnSpc>
+                <a:spcPct val="104000"/>
+              </a:lnSpc>
+              <a:buNone/>
+            </a:pPr>
+            <a:r>
+              <a:rPr lang="en-US" sz="1300" dirty="0">
                 <a:solidFill>
                   <a:srgbClr val="6B6357"/>
                 </a:solidFill>
@@ -2653,61 +3220,29 @@
                 <a:ea typeface="Malgun Gothic" pitchFamily="34" charset="-122"/>
                 <a:cs typeface="Malgun Gothic" pitchFamily="34" charset="-120"/>
               </a:rPr>
-              <a:t>폴더 전체를 옮깁니다</a:t>
-            </a:r>
-            <a:endParaRPr lang="en-US" sz="1600" dirty="0"/>
-          </a:p>
-        </p:txBody>
-      </p:sp>
-      <p:sp>
-        <p:nvSpPr>
-          <p:cNvPr id="6" name="Shape 4"/>
-          <p:cNvSpPr/>
-          <p:nvPr/>
-        </p:nvSpPr>
-        <p:spPr>
-          <a:xfrm>
-            <a:off x="4594860" y="5486400"/>
-            <a:ext cx="2999232" cy="457200"/>
-          </a:xfrm>
-          <a:prstGeom prst="roundRect">
-            <a:avLst>
-              <a:gd name="adj" fmla="val 50000"/>
-            </a:avLst>
-          </a:prstGeom>
-          <a:solidFill>
-            <a:srgbClr val="F2EDE4"/>
-          </a:solidFill>
-          <a:ln w="12700">
-            <a:solidFill>
-              <a:srgbClr val="E3DACB"/>
-            </a:solidFill>
-            <a:prstDash val="solid"/>
-          </a:ln>
-        </p:spPr>
-      </p:sp>
-      <p:sp>
-        <p:nvSpPr>
-          <p:cNvPr id="7" name="Text 5"/>
-          <p:cNvSpPr/>
-          <p:nvPr/>
-        </p:nvSpPr>
-        <p:spPr>
-          <a:xfrm>
-            <a:off x="4594860" y="5486400"/>
-            <a:ext cx="2999232" cy="457200"/>
-          </a:xfrm>
-          <a:prstGeom prst="rect">
-            <a:avLst/>
-          </a:prstGeom>
-          <a:noFill/>
-          <a:ln/>
-        </p:spPr>
-        <p:txBody>
-          <a:bodyPr wrap="square" rtlCol="0" anchor="ctr"/>
-          <a:lstStyle/>
-          <a:p>
-            <a:pPr algn="ctr" indent="0" marL="0">
+              <a:t>📐 형식 규칙 — 파일 이름은 </a:t>
+            </a:r>
+            <a:pPr indent="0" marL="0">
+              <a:lnSpc>
+                <a:spcPct val="104000"/>
+              </a:lnSpc>
+              <a:buNone/>
+            </a:pPr>
+            <a:r>
+              <a:rPr lang="en-US" sz="1300" b="1" dirty="0">
+                <a:solidFill>
+                  <a:srgbClr val="2A2723"/>
+                </a:solidFill>
+                <a:latin typeface="Malgun Gothic" pitchFamily="34" charset="0"/>
+                <a:ea typeface="Malgun Gothic" pitchFamily="34" charset="-122"/>
+                <a:cs typeface="Malgun Gothic" pitchFamily="34" charset="-120"/>
+              </a:rPr>
+              <a:t>대문자를 포함해 SKILL.md</a:t>
+            </a:r>
+            <a:pPr indent="0" marL="0">
+              <a:lnSpc>
+                <a:spcPct val="104000"/>
+              </a:lnSpc>
               <a:buNone/>
             </a:pPr>
             <a:r>
@@ -2719,7 +3254,92 @@
                 <a:ea typeface="Malgun Gothic" pitchFamily="34" charset="-122"/>
                 <a:cs typeface="Malgun Gothic" pitchFamily="34" charset="-120"/>
               </a:rPr>
-              <a:t>⑩ Skill로 남기기</a:t>
+              <a:t>. name은 </a:t>
+            </a:r>
+            <a:pPr indent="0" marL="0">
+              <a:lnSpc>
+                <a:spcPct val="104000"/>
+              </a:lnSpc>
+              <a:buNone/>
+            </a:pPr>
+            <a:r>
+              <a:rPr lang="en-US" sz="1300" b="1" dirty="0">
+                <a:solidFill>
+                  <a:srgbClr val="2A2723"/>
+                </a:solidFill>
+                <a:latin typeface="Malgun Gothic" pitchFamily="34" charset="0"/>
+                <a:ea typeface="Malgun Gothic" pitchFamily="34" charset="-122"/>
+                <a:cs typeface="Malgun Gothic" pitchFamily="34" charset="-120"/>
+              </a:rPr>
+              <a:t>1~64자, 소문자 영문·숫자·하이픈</a:t>
+            </a:r>
+            <a:pPr indent="0" marL="0">
+              <a:lnSpc>
+                <a:spcPct val="104000"/>
+              </a:lnSpc>
+              <a:buNone/>
+            </a:pPr>
+            <a:r>
+              <a:rPr lang="en-US" sz="1300" dirty="0">
+                <a:solidFill>
+                  <a:srgbClr val="6B6357"/>
+                </a:solidFill>
+                <a:latin typeface="Malgun Gothic" pitchFamily="34" charset="0"/>
+                <a:ea typeface="Malgun Gothic" pitchFamily="34" charset="-122"/>
+                <a:cs typeface="Malgun Gothic" pitchFamily="34" charset="-120"/>
+              </a:rPr>
+              <a:t>(앞뒤 하이픈과 연속 하이픈 금지, </a:t>
+            </a:r>
+            <a:pPr indent="0" marL="0">
+              <a:lnSpc>
+                <a:spcPct val="104000"/>
+              </a:lnSpc>
+              <a:buNone/>
+            </a:pPr>
+            <a:r>
+              <a:rPr lang="en-US" sz="1300" b="1" dirty="0">
+                <a:solidFill>
+                  <a:srgbClr val="3F6B5F"/>
+                </a:solidFill>
+                <a:latin typeface="Malgun Gothic" pitchFamily="34" charset="0"/>
+                <a:ea typeface="Malgun Gothic" pitchFamily="34" charset="-122"/>
+                <a:cs typeface="Malgun Gothic" pitchFamily="34" charset="-120"/>
+              </a:rPr>
+              <a:t>Skill 폴더명과 일치</a:t>
+            </a:r>
+            <a:pPr indent="0" marL="0">
+              <a:lnSpc>
+                <a:spcPct val="104000"/>
+              </a:lnSpc>
+              <a:buNone/>
+            </a:pPr>
+            <a:r>
+              <a:rPr lang="en-US" sz="1300" dirty="0">
+                <a:solidFill>
+                  <a:srgbClr val="6B6357"/>
+                </a:solidFill>
+                <a:latin typeface="Malgun Gothic" pitchFamily="34" charset="0"/>
+                <a:ea typeface="Malgun Gothic" pitchFamily="34" charset="-122"/>
+                <a:cs typeface="Malgun Gothic" pitchFamily="34" charset="-120"/>
+              </a:rPr>
+              <a:t>), description은 </a:t>
+            </a:r>
+            <a:pPr indent="0" marL="0">
+              <a:lnSpc>
+                <a:spcPct val="104000"/>
+              </a:lnSpc>
+              <a:buNone/>
+            </a:pPr>
+            <a:r>
+              <a:rPr lang="en-US" sz="1300" b="1" dirty="0">
+                <a:solidFill>
+                  <a:srgbClr val="2A2723"/>
+                </a:solidFill>
+                <a:latin typeface="Malgun Gothic" pitchFamily="34" charset="0"/>
+                <a:ea typeface="Malgun Gothic" pitchFamily="34" charset="-122"/>
+                <a:cs typeface="Malgun Gothic" pitchFamily="34" charset="-120"/>
+              </a:rPr>
+              <a:t>1~1024자</a:t>
             </a:r>
             <a:endParaRPr lang="en-US" sz="1300" dirty="0"/>
           </a:p>
@@ -2759,14 +3379,36 @@
       </p:grpSpPr>
       <p:sp>
         <p:nvSpPr>
-          <p:cNvPr id="2" name="Text 0"/>
+          <p:cNvPr id="2" name="Shape 0"/>
           <p:cNvSpPr/>
           <p:nvPr/>
         </p:nvSpPr>
         <p:spPr>
           <a:xfrm>
-            <a:off x="548640" y="384048"/>
-            <a:ext cx="11091672" cy="731520"/>
+            <a:off x="5175504" y="1828800"/>
+            <a:ext cx="1828800" cy="1828800"/>
+          </a:xfrm>
+          <a:prstGeom prst="roundRect">
+            <a:avLst>
+              <a:gd name="adj" fmla="val 15000"/>
+            </a:avLst>
+          </a:prstGeom>
+          <a:solidFill>
+            <a:srgbClr val="3F6B5F"/>
+          </a:solidFill>
+          <a:ln/>
+        </p:spPr>
+      </p:sp>
+      <p:sp>
+        <p:nvSpPr>
+          <p:cNvPr id="3" name="Text 1"/>
+          <p:cNvSpPr/>
+          <p:nvPr/>
+        </p:nvSpPr>
+        <p:spPr>
+          <a:xfrm>
+            <a:off x="5175504" y="1828800"/>
+            <a:ext cx="1828800" cy="1828800"/>
           </a:xfrm>
           <a:prstGeom prst="rect">
             <a:avLst/>
@@ -2775,91 +3417,119 @@
           <a:ln/>
         </p:spPr>
         <p:txBody>
-          <a:bodyPr wrap="square" rtlCol="0" anchor="ctr">
-            <a:normAutofit/>
-          </a:bodyPr>
+          <a:bodyPr wrap="square" rtlCol="0" anchor="ctr"/>
           <a:lstStyle/>
           <a:p>
-            <a:pPr indent="0" marL="0">
-              <a:buNone/>
-            </a:pPr>
-            <a:r>
-              <a:rPr lang="en-US" sz="2400" b="1" dirty="0">
-                <a:solidFill>
-                  <a:srgbClr val="2A2723"/>
-                </a:solidFill>
-                <a:latin typeface="Malgun Gothic" pitchFamily="34" charset="0"/>
-                <a:ea typeface="Malgun Gothic" pitchFamily="34" charset="-122"/>
-                <a:cs typeface="Malgun Gothic" pitchFamily="34" charset="-120"/>
-              </a:rPr>
-              <a:t>두 </a:t>
-            </a:r>
-            <a:pPr indent="0" marL="0">
-              <a:buNone/>
-            </a:pPr>
-            <a:r>
-              <a:rPr lang="en-US" sz="2400" b="1" dirty="0">
-                <a:solidFill>
-                  <a:srgbClr val="3F6B5F"/>
-                </a:solidFill>
-                <a:latin typeface="Malgun Gothic" pitchFamily="34" charset="0"/>
-                <a:ea typeface="Malgun Gothic" pitchFamily="34" charset="-122"/>
-                <a:cs typeface="Malgun Gothic" pitchFamily="34" charset="-120"/>
-              </a:rPr>
-              <a:t>파일</a:t>
-            </a:r>
-            <a:pPr indent="0" marL="0">
-              <a:buNone/>
-            </a:pPr>
-            <a:r>
-              <a:rPr lang="en-US" sz="2400" b="1" dirty="0">
-                <a:solidFill>
-                  <a:srgbClr val="2A2723"/>
-                </a:solidFill>
-                <a:latin typeface="Malgun Gothic" pitchFamily="34" charset="0"/>
-                <a:ea typeface="Malgun Gothic" pitchFamily="34" charset="-122"/>
-                <a:cs typeface="Malgun Gothic" pitchFamily="34" charset="-120"/>
-              </a:rPr>
-              <a:t>의 관계</a:t>
-            </a:r>
-            <a:endParaRPr lang="en-US" sz="2400" dirty="0"/>
+            <a:pPr algn="ctr" indent="0" marL="0">
+              <a:buNone/>
+            </a:pPr>
+            <a:r>
+              <a:rPr lang="en-US" sz="5200" b="1" dirty="0">
+                <a:solidFill>
+                  <a:srgbClr val="FFFFFF"/>
+                </a:solidFill>
+                <a:latin typeface="Malgun Gothic" pitchFamily="34" charset="0"/>
+                <a:ea typeface="Malgun Gothic" pitchFamily="34" charset="-122"/>
+                <a:cs typeface="Malgun Gothic" pitchFamily="34" charset="-120"/>
+              </a:rPr>
+              <a:t>3</a:t>
+            </a:r>
+            <a:endParaRPr lang="en-US" sz="5200" dirty="0"/>
           </a:p>
         </p:txBody>
       </p:sp>
       <p:sp>
         <p:nvSpPr>
-          <p:cNvPr id="3" name="Shape 1"/>
+          <p:cNvPr id="4" name="Text 2"/>
           <p:cNvSpPr/>
           <p:nvPr/>
         </p:nvSpPr>
         <p:spPr>
           <a:xfrm>
-            <a:off x="566928" y="1133856"/>
-            <a:ext cx="777240" cy="41148"/>
+            <a:off x="914400" y="3931920"/>
+            <a:ext cx="10332720" cy="868680"/>
           </a:xfrm>
           <a:prstGeom prst="rect">
             <a:avLst/>
           </a:prstGeom>
-          <a:solidFill>
-            <a:srgbClr val="3F6B5F"/>
-          </a:solidFill>
+          <a:noFill/>
           <a:ln/>
         </p:spPr>
-      </p:sp>
-      <p:sp>
-        <p:nvSpPr>
-          <p:cNvPr id="4" name="Shape 2"/>
+        <p:txBody>
+          <a:bodyPr wrap="square" rtlCol="0" anchor="ctr"/>
+          <a:lstStyle/>
+          <a:p>
+            <a:pPr algn="ctr" indent="0" marL="0">
+              <a:buNone/>
+            </a:pPr>
+            <a:r>
+              <a:rPr lang="en-US" sz="3000" b="1" dirty="0">
+                <a:solidFill>
+                  <a:srgbClr val="2A2723"/>
+                </a:solidFill>
+                <a:latin typeface="Malgun Gothic" pitchFamily="34" charset="0"/>
+                <a:ea typeface="Malgun Gothic" pitchFamily="34" charset="-122"/>
+                <a:cs typeface="Malgun Gothic" pitchFamily="34" charset="-120"/>
+              </a:rPr>
+              <a:t>본문과 참조 자료 연결하기</a:t>
+            </a:r>
+            <a:endParaRPr lang="en-US" sz="3000" dirty="0"/>
+          </a:p>
+        </p:txBody>
+      </p:sp>
+      <p:sp>
+        <p:nvSpPr>
+          <p:cNvPr id="5" name="Text 3"/>
           <p:cNvSpPr/>
           <p:nvPr/>
         </p:nvSpPr>
         <p:spPr>
           <a:xfrm>
-            <a:off x="548640" y="1371600"/>
-            <a:ext cx="11091672" cy="1115568"/>
+            <a:off x="914400" y="4846320"/>
+            <a:ext cx="10332720" cy="548640"/>
+          </a:xfrm>
+          <a:prstGeom prst="rect">
+            <a:avLst/>
+          </a:prstGeom>
+          <a:noFill/>
+          <a:ln/>
+        </p:spPr>
+        <p:txBody>
+          <a:bodyPr wrap="square" rtlCol="0" anchor="ctr"/>
+          <a:lstStyle/>
+          <a:p>
+            <a:pPr algn="ctr" indent="0" marL="0">
+              <a:buNone/>
+            </a:pPr>
+            <a:r>
+              <a:rPr lang="en-US" sz="1600" dirty="0">
+                <a:solidFill>
+                  <a:srgbClr val="6B6357"/>
+                </a:solidFill>
+                <a:latin typeface="Malgun Gothic" pitchFamily="34" charset="0"/>
+                <a:ea typeface="Malgun Gothic" pitchFamily="34" charset="-122"/>
+                <a:cs typeface="Malgun Gothic" pitchFamily="34" charset="-120"/>
+              </a:rPr>
+              <a:t>폴더 전체를 옮깁니다</a:t>
+            </a:r>
+            <a:endParaRPr lang="en-US" sz="1600" dirty="0"/>
+          </a:p>
+        </p:txBody>
+      </p:sp>
+      <p:sp>
+        <p:nvSpPr>
+          <p:cNvPr id="6" name="Shape 4"/>
+          <p:cNvSpPr/>
+          <p:nvPr/>
+        </p:nvSpPr>
+        <p:spPr>
+          <a:xfrm>
+            <a:off x="4594860" y="5486400"/>
+            <a:ext cx="2999232" cy="457200"/>
           </a:xfrm>
           <a:prstGeom prst="roundRect">
             <a:avLst>
-              <a:gd name="adj" fmla="val 4098"/>
+              <a:gd name="adj" fmla="val 50000"/>
             </a:avLst>
           </a:prstGeom>
           <a:solidFill>
@@ -2875,34 +3545,14 @@
       </p:sp>
       <p:sp>
         <p:nvSpPr>
-          <p:cNvPr id="5" name="Shape 3"/>
+          <p:cNvPr id="7" name="Text 5"/>
           <p:cNvSpPr/>
           <p:nvPr/>
         </p:nvSpPr>
         <p:spPr>
           <a:xfrm>
-            <a:off x="548640" y="1371600"/>
-            <a:ext cx="54864" cy="1115568"/>
-          </a:xfrm>
-          <a:prstGeom prst="rect">
-            <a:avLst/>
-          </a:prstGeom>
-          <a:solidFill>
-            <a:srgbClr val="3F6B5F"/>
-          </a:solidFill>
-          <a:ln/>
-        </p:spPr>
-      </p:sp>
-      <p:sp>
-        <p:nvSpPr>
-          <p:cNvPr id="6" name="Text 4"/>
-          <p:cNvSpPr/>
-          <p:nvPr/>
-        </p:nvSpPr>
-        <p:spPr>
-          <a:xfrm>
-            <a:off x="768096" y="1463040"/>
-            <a:ext cx="10707624" cy="932688"/>
+            <a:off x="4594860" y="5486400"/>
+            <a:ext cx="2999232" cy="457200"/>
           </a:xfrm>
           <a:prstGeom prst="rect">
             <a:avLst/>
@@ -2911,140 +3561,14 @@
           <a:ln/>
         </p:spPr>
         <p:txBody>
-          <a:bodyPr wrap="square" rtlCol="0" anchor="t">
-            <a:normAutofit/>
-          </a:bodyPr>
+          <a:bodyPr wrap="square" rtlCol="0" anchor="ctr"/>
           <a:lstStyle/>
           <a:p>
-            <a:pPr algn="l" indent="0" marL="0">
-              <a:lnSpc>
-                <a:spcPct val="102000"/>
-              </a:lnSpc>
-              <a:buNone/>
-            </a:pPr>
-            <a:r>
-              <a:rPr lang="en-US" sz="1100" dirty="0">
-                <a:solidFill>
-                  <a:srgbClr val="2A2723"/>
-                </a:solidFill>
-                <a:latin typeface="Consolas" pitchFamily="34" charset="0"/>
-                <a:ea typeface="Consolas" pitchFamily="34" charset="-122"/>
-                <a:cs typeface="Consolas" pitchFamily="34" charset="-120"/>
-              </a:rPr>
-              <a:t>team-weekly-report/</a:t>
-            </a:r>
-            <a:endParaRPr lang="en-US" sz="1100" dirty="0"/>
-          </a:p>
-          <a:p>
-            <a:pPr algn="l" indent="0" marL="0">
-              <a:lnSpc>
-                <a:spcPct val="102000"/>
-              </a:lnSpc>
-              <a:buNone/>
-            </a:pPr>
-            <a:r>
-              <a:rPr lang="en-US" sz="1100" dirty="0">
-                <a:solidFill>
-                  <a:srgbClr val="2A2723"/>
-                </a:solidFill>
-                <a:latin typeface="Consolas" pitchFamily="34" charset="0"/>
-                <a:ea typeface="Consolas" pitchFamily="34" charset="-122"/>
-                <a:cs typeface="Consolas" pitchFamily="34" charset="-120"/>
-              </a:rPr>
-              <a:t>├── SKILL.md</a:t>
-            </a:r>
-            <a:endParaRPr lang="en-US" sz="1100" dirty="0"/>
-          </a:p>
-          <a:p>
-            <a:pPr algn="l" indent="0" marL="0">
-              <a:lnSpc>
-                <a:spcPct val="102000"/>
-              </a:lnSpc>
-              <a:buNone/>
-            </a:pPr>
-            <a:r>
-              <a:rPr lang="en-US" sz="1100" dirty="0">
-                <a:solidFill>
-                  <a:srgbClr val="2A2723"/>
-                </a:solidFill>
-                <a:latin typeface="Consolas" pitchFamily="34" charset="0"/>
-                <a:ea typeface="Consolas" pitchFamily="34" charset="-122"/>
-                <a:cs typeface="Consolas" pitchFamily="34" charset="-120"/>
-              </a:rPr>
-              <a:t>└── references/</a:t>
-            </a:r>
-            <a:endParaRPr lang="en-US" sz="1100" dirty="0"/>
-          </a:p>
-          <a:p>
-            <a:pPr algn="l" indent="0" marL="0">
-              <a:lnSpc>
-                <a:spcPct val="102000"/>
-              </a:lnSpc>
-              <a:buNone/>
-            </a:pPr>
-            <a:r>
-              <a:rPr lang="en-US" sz="1100" dirty="0">
-                <a:solidFill>
-                  <a:srgbClr val="2A2723"/>
-                </a:solidFill>
-                <a:latin typeface="Consolas" pitchFamily="34" charset="0"/>
-                <a:ea typeface="Consolas" pitchFamily="34" charset="-122"/>
-                <a:cs typeface="Consolas" pitchFamily="34" charset="-120"/>
-              </a:rPr>
-              <a:t>    └── team-rules.md</a:t>
-            </a:r>
-            <a:endParaRPr lang="en-US" sz="1100" dirty="0"/>
-          </a:p>
-        </p:txBody>
-      </p:sp>
-      <p:sp>
-        <p:nvSpPr>
-          <p:cNvPr id="7" name="Text 5"/>
-          <p:cNvSpPr/>
-          <p:nvPr/>
-        </p:nvSpPr>
-        <p:spPr>
-          <a:xfrm>
-            <a:off x="548640" y="2633472"/>
-            <a:ext cx="11091672" cy="993267"/>
-          </a:xfrm>
-          <a:prstGeom prst="rect">
-            <a:avLst/>
-          </a:prstGeom>
-          <a:noFill/>
-          <a:ln/>
-        </p:spPr>
-        <p:txBody>
-          <a:bodyPr wrap="square" rtlCol="0" anchor="t">
-            <a:normAutofit/>
-          </a:bodyPr>
-          <a:lstStyle/>
-          <a:p>
-            <a:pPr indent="0" marL="0">
-              <a:lnSpc>
-                <a:spcPct val="105000"/>
-              </a:lnSpc>
-              <a:buNone/>
-            </a:pPr>
-            <a:r>
-              <a:rPr lang="en-US" sz="1450" b="1" dirty="0">
-                <a:solidFill>
-                  <a:srgbClr val="3F6B5F"/>
-                </a:solidFill>
-                <a:latin typeface="Malgun Gothic" pitchFamily="34" charset="0"/>
-                <a:ea typeface="Malgun Gothic" pitchFamily="34" charset="-122"/>
-                <a:cs typeface="Malgun Gothic" pitchFamily="34" charset="-120"/>
-              </a:rPr>
-              <a:t>›  </a:t>
-            </a:r>
-            <a:pPr indent="0" marL="0">
-              <a:lnSpc>
-                <a:spcPct val="105000"/>
-              </a:lnSpc>
-              <a:buNone/>
-            </a:pPr>
-            <a:r>
-              <a:rPr lang="en-US" sz="1450" dirty="0">
+            <a:pPr algn="ctr" indent="0" marL="0">
+              <a:buNone/>
+            </a:pPr>
+            <a:r>
+              <a:rPr lang="en-US" sz="1300" dirty="0">
                 <a:solidFill>
                   <a:srgbClr val="6B6357"/>
                 </a:solidFill>
@@ -3052,485 +3576,7 @@
                 <a:ea typeface="Malgun Gothic" pitchFamily="34" charset="-122"/>
                 <a:cs typeface="Malgun Gothic" pitchFamily="34" charset="-120"/>
               </a:rPr>
-              <a:t>references/team-rules.md는 Skill 폴더를 기준으로 찾는 </a:t>
-            </a:r>
-            <a:pPr indent="0" marL="0">
-              <a:lnSpc>
-                <a:spcPct val="105000"/>
-              </a:lnSpc>
-              <a:buNone/>
-            </a:pPr>
-            <a:r>
-              <a:rPr lang="en-US" sz="1450" b="1" dirty="0">
-                <a:solidFill>
-                  <a:srgbClr val="2A2723"/>
-                </a:solidFill>
-                <a:latin typeface="Malgun Gothic" pitchFamily="34" charset="0"/>
-                <a:ea typeface="Malgun Gothic" pitchFamily="34" charset="-122"/>
-                <a:cs typeface="Malgun Gothic" pitchFamily="34" charset="-120"/>
-              </a:rPr>
-              <a:t>상대경로</a:t>
-            </a:r>
-            <a:pPr indent="0" marL="0">
-              <a:lnSpc>
-                <a:spcPct val="105000"/>
-              </a:lnSpc>
-              <a:buNone/>
-            </a:pPr>
-            <a:r>
-              <a:rPr lang="en-US" sz="1450" dirty="0">
-                <a:solidFill>
-                  <a:srgbClr val="6B6357"/>
-                </a:solidFill>
-                <a:latin typeface="Malgun Gothic" pitchFamily="34" charset="0"/>
-                <a:ea typeface="Malgun Gothic" pitchFamily="34" charset="-122"/>
-                <a:cs typeface="Malgun Gothic" pitchFamily="34" charset="-120"/>
-              </a:rPr>
-              <a:t> — 작성자 컴퓨터의 전체 위치를 적지 않았으므로 </a:t>
-            </a:r>
-            <a:pPr indent="0" marL="0">
-              <a:lnSpc>
-                <a:spcPct val="105000"/>
-              </a:lnSpc>
-              <a:spcAft>
-                <a:spcPts val="700"/>
-              </a:spcAft>
-              <a:buNone/>
-            </a:pPr>
-            <a:r>
-              <a:rPr lang="en-US" sz="1450" b="1" dirty="0">
-                <a:solidFill>
-                  <a:srgbClr val="3F6B5F"/>
-                </a:solidFill>
-                <a:latin typeface="Malgun Gothic" pitchFamily="34" charset="0"/>
-                <a:ea typeface="Malgun Gothic" pitchFamily="34" charset="-122"/>
-                <a:cs typeface="Malgun Gothic" pitchFamily="34" charset="-120"/>
-              </a:rPr>
-              <a:t>다른 컴퓨터로 옮겨도 두 파일의 관계를 유지</a:t>
-            </a:r>
-            <a:endParaRPr lang="en-US" sz="1450" dirty="0"/>
-          </a:p>
-          <a:p>
-            <a:pPr indent="0" marL="0">
-              <a:lnSpc>
-                <a:spcPct val="105000"/>
-              </a:lnSpc>
-              <a:buNone/>
-            </a:pPr>
-            <a:r>
-              <a:rPr lang="en-US" sz="1450" b="1" dirty="0">
-                <a:solidFill>
-                  <a:srgbClr val="3F6B5F"/>
-                </a:solidFill>
-                <a:latin typeface="Malgun Gothic" pitchFamily="34" charset="0"/>
-                <a:ea typeface="Malgun Gothic" pitchFamily="34" charset="-122"/>
-                <a:cs typeface="Malgun Gothic" pitchFamily="34" charset="-120"/>
-              </a:rPr>
-              <a:t>›  </a:t>
-            </a:r>
-            <a:pPr indent="0" marL="0">
-              <a:lnSpc>
-                <a:spcPct val="105000"/>
-              </a:lnSpc>
-              <a:buNone/>
-            </a:pPr>
-            <a:r>
-              <a:rPr lang="en-US" sz="1450" dirty="0">
-                <a:solidFill>
-                  <a:srgbClr val="6B6357"/>
-                </a:solidFill>
-                <a:latin typeface="Malgun Gothic" pitchFamily="34" charset="0"/>
-                <a:ea typeface="Malgun Gothic" pitchFamily="34" charset="-122"/>
-                <a:cs typeface="Malgun Gothic" pitchFamily="34" charset="-120"/>
-              </a:rPr>
-              <a:t>그래서 공유하거나 설치할 때는 </a:t>
-            </a:r>
-            <a:pPr indent="0" marL="0">
-              <a:lnSpc>
-                <a:spcPct val="105000"/>
-              </a:lnSpc>
-              <a:buNone/>
-            </a:pPr>
-            <a:r>
-              <a:rPr lang="en-US" sz="1450" b="1" dirty="0">
-                <a:solidFill>
-                  <a:srgbClr val="A65A3F"/>
-                </a:solidFill>
-                <a:latin typeface="Malgun Gothic" pitchFamily="34" charset="0"/>
-                <a:ea typeface="Malgun Gothic" pitchFamily="34" charset="-122"/>
-                <a:cs typeface="Malgun Gothic" pitchFamily="34" charset="-120"/>
-              </a:rPr>
-              <a:t>SKILL.md 하나가 아니라</a:t>
-            </a:r>
-            <a:pPr indent="0" marL="0">
-              <a:lnSpc>
-                <a:spcPct val="105000"/>
-              </a:lnSpc>
-              <a:buNone/>
-            </a:pPr>
-            <a:r>
-              <a:rPr lang="en-US" sz="1450" dirty="0">
-                <a:solidFill>
-                  <a:srgbClr val="6B6357"/>
-                </a:solidFill>
-                <a:latin typeface="Malgun Gothic" pitchFamily="34" charset="0"/>
-                <a:ea typeface="Malgun Gothic" pitchFamily="34" charset="-122"/>
-                <a:cs typeface="Malgun Gothic" pitchFamily="34" charset="-120"/>
-              </a:rPr>
-              <a:t> </a:t>
-            </a:r>
-            <a:pPr indent="0" marL="0">
-              <a:lnSpc>
-                <a:spcPct val="105000"/>
-              </a:lnSpc>
-              <a:buNone/>
-            </a:pPr>
-            <a:r>
-              <a:rPr lang="en-US" sz="1450" b="1" dirty="0">
-                <a:solidFill>
-                  <a:srgbClr val="3F6B5F"/>
-                </a:solidFill>
-                <a:latin typeface="Malgun Gothic" pitchFamily="34" charset="0"/>
-                <a:ea typeface="Malgun Gothic" pitchFamily="34" charset="-122"/>
-                <a:cs typeface="Malgun Gothic" pitchFamily="34" charset="-120"/>
-              </a:rPr>
-              <a:t>team-weekly-report 폴더 전체</a:t>
-            </a:r>
-            <a:pPr indent="0" marL="0">
-              <a:lnSpc>
-                <a:spcPct val="105000"/>
-              </a:lnSpc>
-              <a:spcAft>
-                <a:spcPts val="700"/>
-              </a:spcAft>
-              <a:buNone/>
-            </a:pPr>
-            <a:r>
-              <a:rPr lang="en-US" sz="1450" dirty="0">
-                <a:solidFill>
-                  <a:srgbClr val="6B6357"/>
-                </a:solidFill>
-                <a:latin typeface="Malgun Gothic" pitchFamily="34" charset="0"/>
-                <a:ea typeface="Malgun Gothic" pitchFamily="34" charset="-122"/>
-                <a:cs typeface="Malgun Gothic" pitchFamily="34" charset="-120"/>
-              </a:rPr>
-              <a:t>를 옮깁니다</a:t>
-            </a:r>
-            <a:endParaRPr lang="en-US" sz="1450" dirty="0"/>
-          </a:p>
-        </p:txBody>
-      </p:sp>
-      <p:sp>
-        <p:nvSpPr>
-          <p:cNvPr id="8" name="Shape 6"/>
-          <p:cNvSpPr/>
-          <p:nvPr/>
-        </p:nvSpPr>
-        <p:spPr>
-          <a:xfrm>
-            <a:off x="548640" y="3773043"/>
-            <a:ext cx="11091672" cy="667512"/>
-          </a:xfrm>
-          <a:prstGeom prst="roundRect">
-            <a:avLst>
-              <a:gd name="adj" fmla="val 6849"/>
-            </a:avLst>
-          </a:prstGeom>
-          <a:solidFill>
-            <a:srgbClr val="F2EDE4"/>
-          </a:solidFill>
-          <a:ln w="12700">
-            <a:solidFill>
-              <a:srgbClr val="E3DACB"/>
-            </a:solidFill>
-            <a:prstDash val="solid"/>
-          </a:ln>
-        </p:spPr>
-      </p:sp>
-      <p:sp>
-        <p:nvSpPr>
-          <p:cNvPr id="9" name="Shape 7"/>
-          <p:cNvSpPr/>
-          <p:nvPr/>
-        </p:nvSpPr>
-        <p:spPr>
-          <a:xfrm>
-            <a:off x="548640" y="3773043"/>
-            <a:ext cx="54864" cy="667512"/>
-          </a:xfrm>
-          <a:prstGeom prst="rect">
-            <a:avLst/>
-          </a:prstGeom>
-          <a:solidFill>
-            <a:srgbClr val="3F6B5F"/>
-          </a:solidFill>
-          <a:ln/>
-        </p:spPr>
-      </p:sp>
-      <p:sp>
-        <p:nvSpPr>
-          <p:cNvPr id="10" name="Text 8"/>
-          <p:cNvSpPr/>
-          <p:nvPr/>
-        </p:nvSpPr>
-        <p:spPr>
-          <a:xfrm>
-            <a:off x="768096" y="3864483"/>
-            <a:ext cx="10707624" cy="484632"/>
-          </a:xfrm>
-          <a:prstGeom prst="rect">
-            <a:avLst/>
-          </a:prstGeom>
-          <a:noFill/>
-          <a:ln/>
-        </p:spPr>
-        <p:txBody>
-          <a:bodyPr wrap="square" rtlCol="0" anchor="t">
-            <a:normAutofit/>
-          </a:bodyPr>
-          <a:lstStyle/>
-          <a:p>
-            <a:pPr algn="l" indent="0" marL="0">
-              <a:lnSpc>
-                <a:spcPct val="102000"/>
-              </a:lnSpc>
-              <a:buNone/>
-            </a:pPr>
-            <a:r>
-              <a:rPr lang="en-US" sz="1100" dirty="0">
-                <a:solidFill>
-                  <a:srgbClr val="2A2723"/>
-                </a:solidFill>
-                <a:latin typeface="Consolas" pitchFamily="34" charset="0"/>
-                <a:ea typeface="Consolas" pitchFamily="34" charset="-122"/>
-                <a:cs typeface="Consolas" pitchFamily="34" charset="-120"/>
-              </a:rPr>
-              <a:t>각 업무를 위험 → 완료 → 진행 순서로 확인하여 한 범주에만 넣는다.</a:t>
-            </a:r>
-            <a:endParaRPr lang="en-US" sz="1100" dirty="0"/>
-          </a:p>
-          <a:p>
-            <a:pPr algn="l" indent="0" marL="0">
-              <a:lnSpc>
-                <a:spcPct val="102000"/>
-              </a:lnSpc>
-              <a:buNone/>
-            </a:pPr>
-            <a:r>
-              <a:rPr lang="en-US" sz="1100" dirty="0">
-                <a:solidFill>
-                  <a:srgbClr val="2A2723"/>
-                </a:solidFill>
-                <a:latin typeface="Consolas" pitchFamily="34" charset="0"/>
-                <a:ea typeface="Consolas" pitchFamily="34" charset="-122"/>
-                <a:cs typeface="Consolas" pitchFamily="34" charset="-120"/>
-              </a:rPr>
-              <a:t>기한이 보고 기준일과 같으면 지연이 아니다.</a:t>
-            </a:r>
-            <a:endParaRPr lang="en-US" sz="1100" dirty="0"/>
-          </a:p>
-        </p:txBody>
-      </p:sp>
-      <p:sp>
-        <p:nvSpPr>
-          <p:cNvPr id="11" name="Shape 9"/>
-          <p:cNvSpPr/>
-          <p:nvPr/>
-        </p:nvSpPr>
-        <p:spPr>
-          <a:xfrm>
-            <a:off x="548640" y="4586859"/>
-            <a:ext cx="11091672" cy="769620"/>
-          </a:xfrm>
-          <a:prstGeom prst="roundRect">
-            <a:avLst>
-              <a:gd name="adj" fmla="val 7129"/>
-            </a:avLst>
-          </a:prstGeom>
-          <a:solidFill>
-            <a:srgbClr val="F2EDE4"/>
-          </a:solidFill>
-          <a:ln/>
-        </p:spPr>
-      </p:sp>
-      <p:sp>
-        <p:nvSpPr>
-          <p:cNvPr id="12" name="Shape 10"/>
-          <p:cNvSpPr/>
-          <p:nvPr/>
-        </p:nvSpPr>
-        <p:spPr>
-          <a:xfrm>
-            <a:off x="548640" y="4586859"/>
-            <a:ext cx="54864" cy="769620"/>
-          </a:xfrm>
-          <a:prstGeom prst="rect">
-            <a:avLst/>
-          </a:prstGeom>
-          <a:solidFill>
-            <a:srgbClr val="C8A15A"/>
-          </a:solidFill>
-          <a:ln/>
-        </p:spPr>
-      </p:sp>
-      <p:sp>
-        <p:nvSpPr>
-          <p:cNvPr id="13" name="Text 11"/>
-          <p:cNvSpPr/>
-          <p:nvPr/>
-        </p:nvSpPr>
-        <p:spPr>
-          <a:xfrm>
-            <a:off x="786384" y="4586859"/>
-            <a:ext cx="10707624" cy="769620"/>
-          </a:xfrm>
-          <a:prstGeom prst="rect">
-            <a:avLst/>
-          </a:prstGeom>
-          <a:noFill/>
-          <a:ln/>
-        </p:spPr>
-        <p:txBody>
-          <a:bodyPr wrap="square" rtlCol="0" anchor="ctr">
-            <a:normAutofit/>
-          </a:bodyPr>
-          <a:lstStyle/>
-          <a:p>
-            <a:pPr indent="0" marL="0">
-              <a:lnSpc>
-                <a:spcPct val="104000"/>
-              </a:lnSpc>
-              <a:buNone/>
-            </a:pPr>
-            <a:r>
-              <a:rPr lang="en-US" sz="1300" dirty="0">
-                <a:solidFill>
-                  <a:srgbClr val="6B6357"/>
-                </a:solidFill>
-                <a:latin typeface="Malgun Gothic" pitchFamily="34" charset="0"/>
-                <a:ea typeface="Malgun Gothic" pitchFamily="34" charset="-122"/>
-                <a:cs typeface="Malgun Gothic" pitchFamily="34" charset="-120"/>
-              </a:rPr>
-              <a:t>🎯 두 문장 모두 </a:t>
-            </a:r>
-            <a:pPr indent="0" marL="0">
-              <a:lnSpc>
-                <a:spcPct val="104000"/>
-              </a:lnSpc>
-              <a:buNone/>
-            </a:pPr>
-            <a:r>
-              <a:rPr lang="en-US" sz="1300" b="1" dirty="0">
-                <a:solidFill>
-                  <a:srgbClr val="3F6B5F"/>
-                </a:solidFill>
-                <a:latin typeface="Malgun Gothic" pitchFamily="34" charset="0"/>
-                <a:ea typeface="Malgun Gothic" pitchFamily="34" charset="-122"/>
-                <a:cs typeface="Malgun Gothic" pitchFamily="34" charset="-120"/>
-              </a:rPr>
-              <a:t>실제 판정을 바꿉니다</a:t>
-            </a:r>
-            <a:pPr indent="0" marL="0">
-              <a:lnSpc>
-                <a:spcPct val="104000"/>
-              </a:lnSpc>
-              <a:buNone/>
-            </a:pPr>
-            <a:r>
-              <a:rPr lang="en-US" sz="1300" dirty="0">
-                <a:solidFill>
-                  <a:srgbClr val="6B6357"/>
-                </a:solidFill>
-                <a:latin typeface="Malgun Gothic" pitchFamily="34" charset="0"/>
-                <a:ea typeface="Malgun Gothic" pitchFamily="34" charset="-122"/>
-                <a:cs typeface="Malgun Gothic" pitchFamily="34" charset="-120"/>
-              </a:rPr>
-              <a:t> — 첫 문장은 </a:t>
-            </a:r>
-            <a:pPr indent="0" marL="0">
-              <a:lnSpc>
-                <a:spcPct val="104000"/>
-              </a:lnSpc>
-              <a:buNone/>
-            </a:pPr>
-            <a:r>
-              <a:rPr lang="en-US" sz="1300" b="1" dirty="0">
-                <a:solidFill>
-                  <a:srgbClr val="2A2723"/>
-                </a:solidFill>
-                <a:latin typeface="Malgun Gothic" pitchFamily="34" charset="0"/>
-                <a:ea typeface="Malgun Gothic" pitchFamily="34" charset="-122"/>
-                <a:cs typeface="Malgun Gothic" pitchFamily="34" charset="-120"/>
-              </a:rPr>
-              <a:t>차단 요인이 남은 '배포 완료' 업무를 어느 범주에 넣을지</a:t>
-            </a:r>
-            <a:pPr indent="0" marL="0">
-              <a:lnSpc>
-                <a:spcPct val="104000"/>
-              </a:lnSpc>
-              <a:buNone/>
-            </a:pPr>
-            <a:r>
-              <a:rPr lang="en-US" sz="1300" dirty="0">
-                <a:solidFill>
-                  <a:srgbClr val="6B6357"/>
-                </a:solidFill>
-                <a:latin typeface="Malgun Gothic" pitchFamily="34" charset="0"/>
-                <a:ea typeface="Malgun Gothic" pitchFamily="34" charset="-122"/>
-                <a:cs typeface="Malgun Gothic" pitchFamily="34" charset="-120"/>
-              </a:rPr>
-              <a:t>, 두 번째는 </a:t>
-            </a:r>
-            <a:pPr indent="0" marL="0">
-              <a:lnSpc>
-                <a:spcPct val="104000"/>
-              </a:lnSpc>
-              <a:buNone/>
-            </a:pPr>
-            <a:r>
-              <a:rPr lang="en-US" sz="1300" b="1" dirty="0">
-                <a:solidFill>
-                  <a:srgbClr val="2A2723"/>
-                </a:solidFill>
-                <a:latin typeface="Malgun Gothic" pitchFamily="34" charset="0"/>
-                <a:ea typeface="Malgun Gothic" pitchFamily="34" charset="-122"/>
-                <a:cs typeface="Malgun Gothic" pitchFamily="34" charset="-120"/>
-              </a:rPr>
-              <a:t>보고 당일이 기한인 업무를 성급하게 지연으로 분류하지 않게</a:t>
-            </a:r>
-            <a:pPr indent="0" marL="0">
-              <a:lnSpc>
-                <a:spcPct val="104000"/>
-              </a:lnSpc>
-              <a:buNone/>
-            </a:pPr>
-            <a:r>
-              <a:rPr lang="en-US" sz="1300" dirty="0">
-                <a:solidFill>
-                  <a:srgbClr val="6B6357"/>
-                </a:solidFill>
-                <a:latin typeface="Malgun Gothic" pitchFamily="34" charset="0"/>
-                <a:ea typeface="Malgun Gothic" pitchFamily="34" charset="-122"/>
-                <a:cs typeface="Malgun Gothic" pitchFamily="34" charset="-120"/>
-              </a:rPr>
-              <a:t>. </a:t>
-            </a:r>
-            <a:pPr indent="0" marL="0">
-              <a:lnSpc>
-                <a:spcPct val="104000"/>
-              </a:lnSpc>
-              <a:buNone/>
-            </a:pPr>
-            <a:r>
-              <a:rPr lang="en-US" sz="1300" b="1" dirty="0">
-                <a:solidFill>
-                  <a:srgbClr val="A65A3F"/>
-                </a:solidFill>
-                <a:latin typeface="Malgun Gothic" pitchFamily="34" charset="0"/>
-                <a:ea typeface="Malgun Gothic" pitchFamily="34" charset="-122"/>
-                <a:cs typeface="Malgun Gothic" pitchFamily="34" charset="-120"/>
-              </a:rPr>
-              <a:t>본문에서 참조 링크를 읽었다는 것과 이런 규칙을 실제로 읽은 것은 다른 상태</a:t>
+              <a:t>⑩ Skill로 남기기</a:t>
             </a:r>
             <a:endParaRPr lang="en-US" sz="1300" dirty="0"/>
           </a:p>
@@ -3603,7 +3649,7 @@
                 <a:ea typeface="Malgun Gothic" pitchFamily="34" charset="-122"/>
                 <a:cs typeface="Malgun Gothic" pitchFamily="34" charset="-120"/>
               </a:rPr>
-              <a:t>사용하지 않는 폴더를 </a:t>
+              <a:t>두 </a:t>
             </a:r>
             <a:pPr indent="0" marL="0">
               <a:buNone/>
@@ -3611,13 +3657,27 @@
             <a:r>
               <a:rPr lang="en-US" sz="2400" b="1" dirty="0">
                 <a:solidFill>
-                  <a:srgbClr val="A65A3F"/>
-                </a:solidFill>
-                <a:latin typeface="Malgun Gothic" pitchFamily="34" charset="0"/>
-                <a:ea typeface="Malgun Gothic" pitchFamily="34" charset="-122"/>
-                <a:cs typeface="Malgun Gothic" pitchFamily="34" charset="-120"/>
-              </a:rPr>
-              <a:t>먼저 만들 필요는 없습니다</a:t>
+                  <a:srgbClr val="3F6B5F"/>
+                </a:solidFill>
+                <a:latin typeface="Malgun Gothic" pitchFamily="34" charset="0"/>
+                <a:ea typeface="Malgun Gothic" pitchFamily="34" charset="-122"/>
+                <a:cs typeface="Malgun Gothic" pitchFamily="34" charset="-120"/>
+              </a:rPr>
+              <a:t>파일</a:t>
+            </a:r>
+            <a:pPr indent="0" marL="0">
+              <a:buNone/>
+            </a:pPr>
+            <a:r>
+              <a:rPr lang="en-US" sz="2400" b="1" dirty="0">
+                <a:solidFill>
+                  <a:srgbClr val="2A2723"/>
+                </a:solidFill>
+                <a:latin typeface="Malgun Gothic" pitchFamily="34" charset="0"/>
+                <a:ea typeface="Malgun Gothic" pitchFamily="34" charset="-122"/>
+                <a:cs typeface="Malgun Gothic" pitchFamily="34" charset="-120"/>
+              </a:rPr>
+              <a:t>의 관계</a:t>
             </a:r>
             <a:endParaRPr lang="en-US" sz="2400" dirty="0"/>
           </a:p>
@@ -3643,9 +3703,806 @@
           <a:ln/>
         </p:spPr>
       </p:sp>
+      <p:sp>
+        <p:nvSpPr>
+          <p:cNvPr id="4" name="Shape 2"/>
+          <p:cNvSpPr/>
+          <p:nvPr/>
+        </p:nvSpPr>
+        <p:spPr>
+          <a:xfrm>
+            <a:off x="548640" y="1371600"/>
+            <a:ext cx="11091672" cy="1115568"/>
+          </a:xfrm>
+          <a:prstGeom prst="roundRect">
+            <a:avLst>
+              <a:gd name="adj" fmla="val 4098"/>
+            </a:avLst>
+          </a:prstGeom>
+          <a:solidFill>
+            <a:srgbClr val="F2EDE4"/>
+          </a:solidFill>
+          <a:ln w="12700">
+            <a:solidFill>
+              <a:srgbClr val="E3DACB"/>
+            </a:solidFill>
+            <a:prstDash val="solid"/>
+          </a:ln>
+        </p:spPr>
+      </p:sp>
+      <p:sp>
+        <p:nvSpPr>
+          <p:cNvPr id="5" name="Shape 3"/>
+          <p:cNvSpPr/>
+          <p:nvPr/>
+        </p:nvSpPr>
+        <p:spPr>
+          <a:xfrm>
+            <a:off x="548640" y="1371600"/>
+            <a:ext cx="54864" cy="1115568"/>
+          </a:xfrm>
+          <a:prstGeom prst="rect">
+            <a:avLst/>
+          </a:prstGeom>
+          <a:solidFill>
+            <a:srgbClr val="3F6B5F"/>
+          </a:solidFill>
+          <a:ln/>
+        </p:spPr>
+      </p:sp>
+      <p:sp>
+        <p:nvSpPr>
+          <p:cNvPr id="6" name="Text 4"/>
+          <p:cNvSpPr/>
+          <p:nvPr/>
+        </p:nvSpPr>
+        <p:spPr>
+          <a:xfrm>
+            <a:off x="768096" y="1463040"/>
+            <a:ext cx="10707624" cy="932688"/>
+          </a:xfrm>
+          <a:prstGeom prst="rect">
+            <a:avLst/>
+          </a:prstGeom>
+          <a:noFill/>
+          <a:ln/>
+        </p:spPr>
+        <p:txBody>
+          <a:bodyPr wrap="square" rtlCol="0" anchor="t">
+            <a:normAutofit/>
+          </a:bodyPr>
+          <a:lstStyle/>
+          <a:p>
+            <a:pPr algn="l" indent="0" marL="0">
+              <a:lnSpc>
+                <a:spcPct val="102000"/>
+              </a:lnSpc>
+              <a:buNone/>
+            </a:pPr>
+            <a:r>
+              <a:rPr lang="en-US" sz="1100" dirty="0">
+                <a:solidFill>
+                  <a:srgbClr val="2A2723"/>
+                </a:solidFill>
+                <a:latin typeface="Consolas" pitchFamily="34" charset="0"/>
+                <a:ea typeface="Consolas" pitchFamily="34" charset="-122"/>
+                <a:cs typeface="Consolas" pitchFamily="34" charset="-120"/>
+              </a:rPr>
+              <a:t>team-weekly-report/</a:t>
+            </a:r>
+            <a:endParaRPr lang="en-US" sz="1100" dirty="0"/>
+          </a:p>
+          <a:p>
+            <a:pPr algn="l" indent="0" marL="0">
+              <a:lnSpc>
+                <a:spcPct val="102000"/>
+              </a:lnSpc>
+              <a:buNone/>
+            </a:pPr>
+            <a:r>
+              <a:rPr lang="en-US" sz="1100" dirty="0">
+                <a:solidFill>
+                  <a:srgbClr val="2A2723"/>
+                </a:solidFill>
+                <a:latin typeface="Consolas" pitchFamily="34" charset="0"/>
+                <a:ea typeface="Consolas" pitchFamily="34" charset="-122"/>
+                <a:cs typeface="Consolas" pitchFamily="34" charset="-120"/>
+              </a:rPr>
+              <a:t>├── SKILL.md</a:t>
+            </a:r>
+            <a:endParaRPr lang="en-US" sz="1100" dirty="0"/>
+          </a:p>
+          <a:p>
+            <a:pPr algn="l" indent="0" marL="0">
+              <a:lnSpc>
+                <a:spcPct val="102000"/>
+              </a:lnSpc>
+              <a:buNone/>
+            </a:pPr>
+            <a:r>
+              <a:rPr lang="en-US" sz="1100" dirty="0">
+                <a:solidFill>
+                  <a:srgbClr val="2A2723"/>
+                </a:solidFill>
+                <a:latin typeface="Consolas" pitchFamily="34" charset="0"/>
+                <a:ea typeface="Consolas" pitchFamily="34" charset="-122"/>
+                <a:cs typeface="Consolas" pitchFamily="34" charset="-120"/>
+              </a:rPr>
+              <a:t>└── references/</a:t>
+            </a:r>
+            <a:endParaRPr lang="en-US" sz="1100" dirty="0"/>
+          </a:p>
+          <a:p>
+            <a:pPr algn="l" indent="0" marL="0">
+              <a:lnSpc>
+                <a:spcPct val="102000"/>
+              </a:lnSpc>
+              <a:buNone/>
+            </a:pPr>
+            <a:r>
+              <a:rPr lang="en-US" sz="1100" dirty="0">
+                <a:solidFill>
+                  <a:srgbClr val="2A2723"/>
+                </a:solidFill>
+                <a:latin typeface="Consolas" pitchFamily="34" charset="0"/>
+                <a:ea typeface="Consolas" pitchFamily="34" charset="-122"/>
+                <a:cs typeface="Consolas" pitchFamily="34" charset="-120"/>
+              </a:rPr>
+              <a:t>    └── team-rules.md</a:t>
+            </a:r>
+            <a:endParaRPr lang="en-US" sz="1100" dirty="0"/>
+          </a:p>
+        </p:txBody>
+      </p:sp>
+      <p:sp>
+        <p:nvSpPr>
+          <p:cNvPr id="7" name="Text 5"/>
+          <p:cNvSpPr/>
+          <p:nvPr/>
+        </p:nvSpPr>
+        <p:spPr>
+          <a:xfrm>
+            <a:off x="548640" y="2633472"/>
+            <a:ext cx="11091672" cy="993267"/>
+          </a:xfrm>
+          <a:prstGeom prst="rect">
+            <a:avLst/>
+          </a:prstGeom>
+          <a:noFill/>
+          <a:ln/>
+        </p:spPr>
+        <p:txBody>
+          <a:bodyPr wrap="square" rtlCol="0" anchor="t">
+            <a:normAutofit/>
+          </a:bodyPr>
+          <a:lstStyle/>
+          <a:p>
+            <a:pPr indent="0" marL="0">
+              <a:lnSpc>
+                <a:spcPct val="105000"/>
+              </a:lnSpc>
+              <a:buNone/>
+            </a:pPr>
+            <a:r>
+              <a:rPr lang="en-US" sz="1450" b="1" dirty="0">
+                <a:solidFill>
+                  <a:srgbClr val="3F6B5F"/>
+                </a:solidFill>
+                <a:latin typeface="Malgun Gothic" pitchFamily="34" charset="0"/>
+                <a:ea typeface="Malgun Gothic" pitchFamily="34" charset="-122"/>
+                <a:cs typeface="Malgun Gothic" pitchFamily="34" charset="-120"/>
+              </a:rPr>
+              <a:t>›  </a:t>
+            </a:r>
+            <a:pPr indent="0" marL="0">
+              <a:lnSpc>
+                <a:spcPct val="105000"/>
+              </a:lnSpc>
+              <a:buNone/>
+            </a:pPr>
+            <a:r>
+              <a:rPr lang="en-US" sz="1450" dirty="0">
+                <a:solidFill>
+                  <a:srgbClr val="6B6357"/>
+                </a:solidFill>
+                <a:latin typeface="Malgun Gothic" pitchFamily="34" charset="0"/>
+                <a:ea typeface="Malgun Gothic" pitchFamily="34" charset="-122"/>
+                <a:cs typeface="Malgun Gothic" pitchFamily="34" charset="-120"/>
+              </a:rPr>
+              <a:t>references/team-rules.md는 Skill 폴더를 기준으로 찾는 </a:t>
+            </a:r>
+            <a:pPr indent="0" marL="0">
+              <a:lnSpc>
+                <a:spcPct val="105000"/>
+              </a:lnSpc>
+              <a:buNone/>
+            </a:pPr>
+            <a:r>
+              <a:rPr lang="en-US" sz="1450" b="1" dirty="0">
+                <a:solidFill>
+                  <a:srgbClr val="2A2723"/>
+                </a:solidFill>
+                <a:latin typeface="Malgun Gothic" pitchFamily="34" charset="0"/>
+                <a:ea typeface="Malgun Gothic" pitchFamily="34" charset="-122"/>
+                <a:cs typeface="Malgun Gothic" pitchFamily="34" charset="-120"/>
+              </a:rPr>
+              <a:t>상대경로</a:t>
+            </a:r>
+            <a:pPr indent="0" marL="0">
+              <a:lnSpc>
+                <a:spcPct val="105000"/>
+              </a:lnSpc>
+              <a:buNone/>
+            </a:pPr>
+            <a:r>
+              <a:rPr lang="en-US" sz="1450" dirty="0">
+                <a:solidFill>
+                  <a:srgbClr val="6B6357"/>
+                </a:solidFill>
+                <a:latin typeface="Malgun Gothic" pitchFamily="34" charset="0"/>
+                <a:ea typeface="Malgun Gothic" pitchFamily="34" charset="-122"/>
+                <a:cs typeface="Malgun Gothic" pitchFamily="34" charset="-120"/>
+              </a:rPr>
+              <a:t> — 작성자 컴퓨터의 전체 위치를 적지 않았으므로 </a:t>
+            </a:r>
+            <a:pPr indent="0" marL="0">
+              <a:lnSpc>
+                <a:spcPct val="105000"/>
+              </a:lnSpc>
+              <a:spcAft>
+                <a:spcPts val="700"/>
+              </a:spcAft>
+              <a:buNone/>
+            </a:pPr>
+            <a:r>
+              <a:rPr lang="en-US" sz="1450" b="1" dirty="0">
+                <a:solidFill>
+                  <a:srgbClr val="3F6B5F"/>
+                </a:solidFill>
+                <a:latin typeface="Malgun Gothic" pitchFamily="34" charset="0"/>
+                <a:ea typeface="Malgun Gothic" pitchFamily="34" charset="-122"/>
+                <a:cs typeface="Malgun Gothic" pitchFamily="34" charset="-120"/>
+              </a:rPr>
+              <a:t>다른 컴퓨터로 옮겨도 두 파일의 관계를 유지</a:t>
+            </a:r>
+            <a:endParaRPr lang="en-US" sz="1450" dirty="0"/>
+          </a:p>
+          <a:p>
+            <a:pPr indent="0" marL="0">
+              <a:lnSpc>
+                <a:spcPct val="105000"/>
+              </a:lnSpc>
+              <a:buNone/>
+            </a:pPr>
+            <a:r>
+              <a:rPr lang="en-US" sz="1450" b="1" dirty="0">
+                <a:solidFill>
+                  <a:srgbClr val="3F6B5F"/>
+                </a:solidFill>
+                <a:latin typeface="Malgun Gothic" pitchFamily="34" charset="0"/>
+                <a:ea typeface="Malgun Gothic" pitchFamily="34" charset="-122"/>
+                <a:cs typeface="Malgun Gothic" pitchFamily="34" charset="-120"/>
+              </a:rPr>
+              <a:t>›  </a:t>
+            </a:r>
+            <a:pPr indent="0" marL="0">
+              <a:lnSpc>
+                <a:spcPct val="105000"/>
+              </a:lnSpc>
+              <a:buNone/>
+            </a:pPr>
+            <a:r>
+              <a:rPr lang="en-US" sz="1450" dirty="0">
+                <a:solidFill>
+                  <a:srgbClr val="6B6357"/>
+                </a:solidFill>
+                <a:latin typeface="Malgun Gothic" pitchFamily="34" charset="0"/>
+                <a:ea typeface="Malgun Gothic" pitchFamily="34" charset="-122"/>
+                <a:cs typeface="Malgun Gothic" pitchFamily="34" charset="-120"/>
+              </a:rPr>
+              <a:t>그래서 공유하거나 설치할 때는 </a:t>
+            </a:r>
+            <a:pPr indent="0" marL="0">
+              <a:lnSpc>
+                <a:spcPct val="105000"/>
+              </a:lnSpc>
+              <a:buNone/>
+            </a:pPr>
+            <a:r>
+              <a:rPr lang="en-US" sz="1450" b="1" dirty="0">
+                <a:solidFill>
+                  <a:srgbClr val="A65A3F"/>
+                </a:solidFill>
+                <a:latin typeface="Malgun Gothic" pitchFamily="34" charset="0"/>
+                <a:ea typeface="Malgun Gothic" pitchFamily="34" charset="-122"/>
+                <a:cs typeface="Malgun Gothic" pitchFamily="34" charset="-120"/>
+              </a:rPr>
+              <a:t>SKILL.md 하나가 아니라</a:t>
+            </a:r>
+            <a:pPr indent="0" marL="0">
+              <a:lnSpc>
+                <a:spcPct val="105000"/>
+              </a:lnSpc>
+              <a:buNone/>
+            </a:pPr>
+            <a:r>
+              <a:rPr lang="en-US" sz="1450" dirty="0">
+                <a:solidFill>
+                  <a:srgbClr val="6B6357"/>
+                </a:solidFill>
+                <a:latin typeface="Malgun Gothic" pitchFamily="34" charset="0"/>
+                <a:ea typeface="Malgun Gothic" pitchFamily="34" charset="-122"/>
+                <a:cs typeface="Malgun Gothic" pitchFamily="34" charset="-120"/>
+              </a:rPr>
+              <a:t> </a:t>
+            </a:r>
+            <a:pPr indent="0" marL="0">
+              <a:lnSpc>
+                <a:spcPct val="105000"/>
+              </a:lnSpc>
+              <a:buNone/>
+            </a:pPr>
+            <a:r>
+              <a:rPr lang="en-US" sz="1450" b="1" dirty="0">
+                <a:solidFill>
+                  <a:srgbClr val="3F6B5F"/>
+                </a:solidFill>
+                <a:latin typeface="Malgun Gothic" pitchFamily="34" charset="0"/>
+                <a:ea typeface="Malgun Gothic" pitchFamily="34" charset="-122"/>
+                <a:cs typeface="Malgun Gothic" pitchFamily="34" charset="-120"/>
+              </a:rPr>
+              <a:t>team-weekly-report 폴더 전체</a:t>
+            </a:r>
+            <a:pPr indent="0" marL="0">
+              <a:lnSpc>
+                <a:spcPct val="105000"/>
+              </a:lnSpc>
+              <a:spcAft>
+                <a:spcPts val="700"/>
+              </a:spcAft>
+              <a:buNone/>
+            </a:pPr>
+            <a:r>
+              <a:rPr lang="en-US" sz="1450" dirty="0">
+                <a:solidFill>
+                  <a:srgbClr val="6B6357"/>
+                </a:solidFill>
+                <a:latin typeface="Malgun Gothic" pitchFamily="34" charset="0"/>
+                <a:ea typeface="Malgun Gothic" pitchFamily="34" charset="-122"/>
+                <a:cs typeface="Malgun Gothic" pitchFamily="34" charset="-120"/>
+              </a:rPr>
+              <a:t>를 옮깁니다</a:t>
+            </a:r>
+            <a:endParaRPr lang="en-US" sz="1450" dirty="0"/>
+          </a:p>
+        </p:txBody>
+      </p:sp>
+      <p:sp>
+        <p:nvSpPr>
+          <p:cNvPr id="8" name="Shape 6"/>
+          <p:cNvSpPr/>
+          <p:nvPr/>
+        </p:nvSpPr>
+        <p:spPr>
+          <a:xfrm>
+            <a:off x="548640" y="3773043"/>
+            <a:ext cx="11091672" cy="667512"/>
+          </a:xfrm>
+          <a:prstGeom prst="roundRect">
+            <a:avLst>
+              <a:gd name="adj" fmla="val 6849"/>
+            </a:avLst>
+          </a:prstGeom>
+          <a:solidFill>
+            <a:srgbClr val="F2EDE4"/>
+          </a:solidFill>
+          <a:ln w="12700">
+            <a:solidFill>
+              <a:srgbClr val="E3DACB"/>
+            </a:solidFill>
+            <a:prstDash val="solid"/>
+          </a:ln>
+        </p:spPr>
+      </p:sp>
+      <p:sp>
+        <p:nvSpPr>
+          <p:cNvPr id="9" name="Shape 7"/>
+          <p:cNvSpPr/>
+          <p:nvPr/>
+        </p:nvSpPr>
+        <p:spPr>
+          <a:xfrm>
+            <a:off x="548640" y="3773043"/>
+            <a:ext cx="54864" cy="667512"/>
+          </a:xfrm>
+          <a:prstGeom prst="rect">
+            <a:avLst/>
+          </a:prstGeom>
+          <a:solidFill>
+            <a:srgbClr val="3F6B5F"/>
+          </a:solidFill>
+          <a:ln/>
+        </p:spPr>
+      </p:sp>
+      <p:sp>
+        <p:nvSpPr>
+          <p:cNvPr id="10" name="Text 8"/>
+          <p:cNvSpPr/>
+          <p:nvPr/>
+        </p:nvSpPr>
+        <p:spPr>
+          <a:xfrm>
+            <a:off x="768096" y="3864483"/>
+            <a:ext cx="10707624" cy="484632"/>
+          </a:xfrm>
+          <a:prstGeom prst="rect">
+            <a:avLst/>
+          </a:prstGeom>
+          <a:noFill/>
+          <a:ln/>
+        </p:spPr>
+        <p:txBody>
+          <a:bodyPr wrap="square" rtlCol="0" anchor="t">
+            <a:normAutofit/>
+          </a:bodyPr>
+          <a:lstStyle/>
+          <a:p>
+            <a:pPr algn="l" indent="0" marL="0">
+              <a:lnSpc>
+                <a:spcPct val="102000"/>
+              </a:lnSpc>
+              <a:buNone/>
+            </a:pPr>
+            <a:r>
+              <a:rPr lang="en-US" sz="1100" dirty="0">
+                <a:solidFill>
+                  <a:srgbClr val="2A2723"/>
+                </a:solidFill>
+                <a:latin typeface="Consolas" pitchFamily="34" charset="0"/>
+                <a:ea typeface="Consolas" pitchFamily="34" charset="-122"/>
+                <a:cs typeface="Consolas" pitchFamily="34" charset="-120"/>
+              </a:rPr>
+              <a:t>각 업무를 위험 → 완료 → 진행 순서로 확인하여 한 범주에만 넣는다.</a:t>
+            </a:r>
+            <a:endParaRPr lang="en-US" sz="1100" dirty="0"/>
+          </a:p>
+          <a:p>
+            <a:pPr algn="l" indent="0" marL="0">
+              <a:lnSpc>
+                <a:spcPct val="102000"/>
+              </a:lnSpc>
+              <a:buNone/>
+            </a:pPr>
+            <a:r>
+              <a:rPr lang="en-US" sz="1100" dirty="0">
+                <a:solidFill>
+                  <a:srgbClr val="2A2723"/>
+                </a:solidFill>
+                <a:latin typeface="Consolas" pitchFamily="34" charset="0"/>
+                <a:ea typeface="Consolas" pitchFamily="34" charset="-122"/>
+                <a:cs typeface="Consolas" pitchFamily="34" charset="-120"/>
+              </a:rPr>
+              <a:t>기한이 보고 기준일과 같으면 지연이 아니다.</a:t>
+            </a:r>
+            <a:endParaRPr lang="en-US" sz="1100" dirty="0"/>
+          </a:p>
+        </p:txBody>
+      </p:sp>
+      <p:sp>
+        <p:nvSpPr>
+          <p:cNvPr id="11" name="Shape 9"/>
+          <p:cNvSpPr/>
+          <p:nvPr/>
+        </p:nvSpPr>
+        <p:spPr>
+          <a:xfrm>
+            <a:off x="548640" y="4586859"/>
+            <a:ext cx="11091672" cy="769620"/>
+          </a:xfrm>
+          <a:prstGeom prst="roundRect">
+            <a:avLst>
+              <a:gd name="adj" fmla="val 7129"/>
+            </a:avLst>
+          </a:prstGeom>
+          <a:solidFill>
+            <a:srgbClr val="F2EDE4"/>
+          </a:solidFill>
+          <a:ln/>
+        </p:spPr>
+      </p:sp>
+      <p:sp>
+        <p:nvSpPr>
+          <p:cNvPr id="12" name="Shape 10"/>
+          <p:cNvSpPr/>
+          <p:nvPr/>
+        </p:nvSpPr>
+        <p:spPr>
+          <a:xfrm>
+            <a:off x="548640" y="4586859"/>
+            <a:ext cx="54864" cy="769620"/>
+          </a:xfrm>
+          <a:prstGeom prst="rect">
+            <a:avLst/>
+          </a:prstGeom>
+          <a:solidFill>
+            <a:srgbClr val="C8A15A"/>
+          </a:solidFill>
+          <a:ln/>
+        </p:spPr>
+      </p:sp>
+      <p:sp>
+        <p:nvSpPr>
+          <p:cNvPr id="13" name="Text 11"/>
+          <p:cNvSpPr/>
+          <p:nvPr/>
+        </p:nvSpPr>
+        <p:spPr>
+          <a:xfrm>
+            <a:off x="786384" y="4586859"/>
+            <a:ext cx="10707624" cy="769620"/>
+          </a:xfrm>
+          <a:prstGeom prst="rect">
+            <a:avLst/>
+          </a:prstGeom>
+          <a:noFill/>
+          <a:ln/>
+        </p:spPr>
+        <p:txBody>
+          <a:bodyPr wrap="square" rtlCol="0" anchor="ctr">
+            <a:normAutofit/>
+          </a:bodyPr>
+          <a:lstStyle/>
+          <a:p>
+            <a:pPr indent="0" marL="0">
+              <a:lnSpc>
+                <a:spcPct val="104000"/>
+              </a:lnSpc>
+              <a:buNone/>
+            </a:pPr>
+            <a:r>
+              <a:rPr lang="en-US" sz="1300" dirty="0">
+                <a:solidFill>
+                  <a:srgbClr val="6B6357"/>
+                </a:solidFill>
+                <a:latin typeface="Malgun Gothic" pitchFamily="34" charset="0"/>
+                <a:ea typeface="Malgun Gothic" pitchFamily="34" charset="-122"/>
+                <a:cs typeface="Malgun Gothic" pitchFamily="34" charset="-120"/>
+              </a:rPr>
+              <a:t>🎯 두 문장 모두 </a:t>
+            </a:r>
+            <a:pPr indent="0" marL="0">
+              <a:lnSpc>
+                <a:spcPct val="104000"/>
+              </a:lnSpc>
+              <a:buNone/>
+            </a:pPr>
+            <a:r>
+              <a:rPr lang="en-US" sz="1300" b="1" dirty="0">
+                <a:solidFill>
+                  <a:srgbClr val="3F6B5F"/>
+                </a:solidFill>
+                <a:latin typeface="Malgun Gothic" pitchFamily="34" charset="0"/>
+                <a:ea typeface="Malgun Gothic" pitchFamily="34" charset="-122"/>
+                <a:cs typeface="Malgun Gothic" pitchFamily="34" charset="-120"/>
+              </a:rPr>
+              <a:t>실제 판정을 바꿉니다</a:t>
+            </a:r>
+            <a:pPr indent="0" marL="0">
+              <a:lnSpc>
+                <a:spcPct val="104000"/>
+              </a:lnSpc>
+              <a:buNone/>
+            </a:pPr>
+            <a:r>
+              <a:rPr lang="en-US" sz="1300" dirty="0">
+                <a:solidFill>
+                  <a:srgbClr val="6B6357"/>
+                </a:solidFill>
+                <a:latin typeface="Malgun Gothic" pitchFamily="34" charset="0"/>
+                <a:ea typeface="Malgun Gothic" pitchFamily="34" charset="-122"/>
+                <a:cs typeface="Malgun Gothic" pitchFamily="34" charset="-120"/>
+              </a:rPr>
+              <a:t> — 첫 문장은 </a:t>
+            </a:r>
+            <a:pPr indent="0" marL="0">
+              <a:lnSpc>
+                <a:spcPct val="104000"/>
+              </a:lnSpc>
+              <a:buNone/>
+            </a:pPr>
+            <a:r>
+              <a:rPr lang="en-US" sz="1300" b="1" dirty="0">
+                <a:solidFill>
+                  <a:srgbClr val="2A2723"/>
+                </a:solidFill>
+                <a:latin typeface="Malgun Gothic" pitchFamily="34" charset="0"/>
+                <a:ea typeface="Malgun Gothic" pitchFamily="34" charset="-122"/>
+                <a:cs typeface="Malgun Gothic" pitchFamily="34" charset="-120"/>
+              </a:rPr>
+              <a:t>차단 요인이 남은 '배포 완료' 업무를 어느 범주에 넣을지</a:t>
+            </a:r>
+            <a:pPr indent="0" marL="0">
+              <a:lnSpc>
+                <a:spcPct val="104000"/>
+              </a:lnSpc>
+              <a:buNone/>
+            </a:pPr>
+            <a:r>
+              <a:rPr lang="en-US" sz="1300" dirty="0">
+                <a:solidFill>
+                  <a:srgbClr val="6B6357"/>
+                </a:solidFill>
+                <a:latin typeface="Malgun Gothic" pitchFamily="34" charset="0"/>
+                <a:ea typeface="Malgun Gothic" pitchFamily="34" charset="-122"/>
+                <a:cs typeface="Malgun Gothic" pitchFamily="34" charset="-120"/>
+              </a:rPr>
+              <a:t>, 두 번째는 </a:t>
+            </a:r>
+            <a:pPr indent="0" marL="0">
+              <a:lnSpc>
+                <a:spcPct val="104000"/>
+              </a:lnSpc>
+              <a:buNone/>
+            </a:pPr>
+            <a:r>
+              <a:rPr lang="en-US" sz="1300" b="1" dirty="0">
+                <a:solidFill>
+                  <a:srgbClr val="2A2723"/>
+                </a:solidFill>
+                <a:latin typeface="Malgun Gothic" pitchFamily="34" charset="0"/>
+                <a:ea typeface="Malgun Gothic" pitchFamily="34" charset="-122"/>
+                <a:cs typeface="Malgun Gothic" pitchFamily="34" charset="-120"/>
+              </a:rPr>
+              <a:t>보고 당일이 기한인 업무를 성급하게 지연으로 분류하지 않게</a:t>
+            </a:r>
+            <a:pPr indent="0" marL="0">
+              <a:lnSpc>
+                <a:spcPct val="104000"/>
+              </a:lnSpc>
+              <a:buNone/>
+            </a:pPr>
+            <a:r>
+              <a:rPr lang="en-US" sz="1300" dirty="0">
+                <a:solidFill>
+                  <a:srgbClr val="6B6357"/>
+                </a:solidFill>
+                <a:latin typeface="Malgun Gothic" pitchFamily="34" charset="0"/>
+                <a:ea typeface="Malgun Gothic" pitchFamily="34" charset="-122"/>
+                <a:cs typeface="Malgun Gothic" pitchFamily="34" charset="-120"/>
+              </a:rPr>
+              <a:t>. </a:t>
+            </a:r>
+            <a:pPr indent="0" marL="0">
+              <a:lnSpc>
+                <a:spcPct val="104000"/>
+              </a:lnSpc>
+              <a:buNone/>
+            </a:pPr>
+            <a:r>
+              <a:rPr lang="en-US" sz="1300" b="1" dirty="0">
+                <a:solidFill>
+                  <a:srgbClr val="A65A3F"/>
+                </a:solidFill>
+                <a:latin typeface="Malgun Gothic" pitchFamily="34" charset="0"/>
+                <a:ea typeface="Malgun Gothic" pitchFamily="34" charset="-122"/>
+                <a:cs typeface="Malgun Gothic" pitchFamily="34" charset="-120"/>
+              </a:rPr>
+              <a:t>본문에서 참조 링크를 읽었다는 것과 이런 규칙을 실제로 읽은 것은 다른 상태</a:t>
+            </a:r>
+            <a:endParaRPr lang="en-US" sz="1300" dirty="0"/>
+          </a:p>
+        </p:txBody>
+      </p:sp>
+    </p:spTree>
+  </p:cSld>
+  <p:clrMapOvr>
+    <a:masterClrMapping/>
+  </p:clrMapOvr>
+</p:sld>
+</file>
+
+<file path=ppt/slides/slide13.xml><?xml version="1.0" encoding="utf-8"?>
+<p:sld xmlns:a="http://schemas.openxmlformats.org/drawingml/2006/main" xmlns:r="http://schemas.openxmlformats.org/officeDocument/2006/relationships" xmlns:p="http://schemas.openxmlformats.org/presentationml/2006/main">
+  <p:cSld name="Slide 13">
+    <p:bg>
+      <p:bgPr>
+        <a:solidFill>
+          <a:srgbClr val="FAF8F4"/>
+        </a:solidFill>
+      </p:bgPr>
+    </p:bg>
+    <p:spTree>
+      <p:nvGrpSpPr>
+        <p:cNvPr id="1" name=""/>
+        <p:cNvGrpSpPr/>
+        <p:nvPr/>
+      </p:nvGrpSpPr>
+      <p:grpSpPr>
+        <a:xfrm>
+          <a:off x="0" y="0"/>
+          <a:ext cx="0" cy="0"/>
+          <a:chOff x="0" y="0"/>
+          <a:chExt cx="0" cy="0"/>
+        </a:xfrm>
+      </p:grpSpPr>
+      <p:sp>
+        <p:nvSpPr>
+          <p:cNvPr id="2" name="Text 0"/>
+          <p:cNvSpPr/>
+          <p:nvPr/>
+        </p:nvSpPr>
+        <p:spPr>
+          <a:xfrm>
+            <a:off x="548640" y="384048"/>
+            <a:ext cx="11091672" cy="731520"/>
+          </a:xfrm>
+          <a:prstGeom prst="rect">
+            <a:avLst/>
+          </a:prstGeom>
+          <a:noFill/>
+          <a:ln/>
+        </p:spPr>
+        <p:txBody>
+          <a:bodyPr wrap="square" rtlCol="0" anchor="ctr">
+            <a:normAutofit/>
+          </a:bodyPr>
+          <a:lstStyle/>
+          <a:p>
+            <a:pPr indent="0" marL="0">
+              <a:buNone/>
+            </a:pPr>
+            <a:r>
+              <a:rPr lang="en-US" sz="2400" b="1" dirty="0">
+                <a:solidFill>
+                  <a:srgbClr val="2A2723"/>
+                </a:solidFill>
+                <a:latin typeface="Malgun Gothic" pitchFamily="34" charset="0"/>
+                <a:ea typeface="Malgun Gothic" pitchFamily="34" charset="-122"/>
+                <a:cs typeface="Malgun Gothic" pitchFamily="34" charset="-120"/>
+              </a:rPr>
+              <a:t>사용하지 않는 폴더를 </a:t>
+            </a:r>
+            <a:pPr indent="0" marL="0">
+              <a:buNone/>
+            </a:pPr>
+            <a:r>
+              <a:rPr lang="en-US" sz="2400" b="1" dirty="0">
+                <a:solidFill>
+                  <a:srgbClr val="A65A3F"/>
+                </a:solidFill>
+                <a:latin typeface="Malgun Gothic" pitchFamily="34" charset="0"/>
+                <a:ea typeface="Malgun Gothic" pitchFamily="34" charset="-122"/>
+                <a:cs typeface="Malgun Gothic" pitchFamily="34" charset="-120"/>
+              </a:rPr>
+              <a:t>먼저 만들 필요는 없습니다</a:t>
+            </a:r>
+            <a:endParaRPr lang="en-US" sz="2400" dirty="0"/>
+          </a:p>
+        </p:txBody>
+      </p:sp>
+      <p:sp>
+        <p:nvSpPr>
+          <p:cNvPr id="3" name="Shape 1"/>
+          <p:cNvSpPr/>
+          <p:nvPr/>
+        </p:nvSpPr>
+        <p:spPr>
+          <a:xfrm>
+            <a:off x="566928" y="1133856"/>
+            <a:ext cx="777240" cy="41148"/>
+          </a:xfrm>
+          <a:prstGeom prst="rect">
+            <a:avLst/>
+          </a:prstGeom>
+          <a:solidFill>
+            <a:srgbClr val="3F6B5F"/>
+          </a:solidFill>
+          <a:ln/>
+        </p:spPr>
+      </p:sp>
       <p:graphicFrame>
         <p:nvGraphicFramePr>
-          <p:cNvPr id="13" name="Table 0"/>
+          <p:cNvPr id="14" name="Table 0"/>
           <p:cNvGraphicFramePr>
             <a:graphicFrameLocks noGrp="1"/>
           </p:cNvGraphicFramePr>
@@ -4404,243 +5261,6 @@
 </p:sld>
 </file>
 
-<file path=ppt/slides/slide13.xml><?xml version="1.0" encoding="utf-8"?>
-<p:sld xmlns:a="http://schemas.openxmlformats.org/drawingml/2006/main" xmlns:r="http://schemas.openxmlformats.org/officeDocument/2006/relationships" xmlns:p="http://schemas.openxmlformats.org/presentationml/2006/main">
-  <p:cSld name="Slide 13">
-    <p:bg>
-      <p:bgPr>
-        <a:solidFill>
-          <a:srgbClr val="FAF8F4"/>
-        </a:solidFill>
-      </p:bgPr>
-    </p:bg>
-    <p:spTree>
-      <p:nvGrpSpPr>
-        <p:cNvPr id="1" name=""/>
-        <p:cNvGrpSpPr/>
-        <p:nvPr/>
-      </p:nvGrpSpPr>
-      <p:grpSpPr>
-        <a:xfrm>
-          <a:off x="0" y="0"/>
-          <a:ext cx="0" cy="0"/>
-          <a:chOff x="0" y="0"/>
-          <a:chExt cx="0" cy="0"/>
-        </a:xfrm>
-      </p:grpSpPr>
-      <p:sp>
-        <p:nvSpPr>
-          <p:cNvPr id="2" name="Shape 0"/>
-          <p:cNvSpPr/>
-          <p:nvPr/>
-        </p:nvSpPr>
-        <p:spPr>
-          <a:xfrm>
-            <a:off x="5175504" y="1828800"/>
-            <a:ext cx="1828800" cy="1828800"/>
-          </a:xfrm>
-          <a:prstGeom prst="roundRect">
-            <a:avLst>
-              <a:gd name="adj" fmla="val 15000"/>
-            </a:avLst>
-          </a:prstGeom>
-          <a:solidFill>
-            <a:srgbClr val="3F6B5F"/>
-          </a:solidFill>
-          <a:ln/>
-        </p:spPr>
-      </p:sp>
-      <p:sp>
-        <p:nvSpPr>
-          <p:cNvPr id="3" name="Text 1"/>
-          <p:cNvSpPr/>
-          <p:nvPr/>
-        </p:nvSpPr>
-        <p:spPr>
-          <a:xfrm>
-            <a:off x="5175504" y="1828800"/>
-            <a:ext cx="1828800" cy="1828800"/>
-          </a:xfrm>
-          <a:prstGeom prst="rect">
-            <a:avLst/>
-          </a:prstGeom>
-          <a:noFill/>
-          <a:ln/>
-        </p:spPr>
-        <p:txBody>
-          <a:bodyPr wrap="square" rtlCol="0" anchor="ctr"/>
-          <a:lstStyle/>
-          <a:p>
-            <a:pPr algn="ctr" indent="0" marL="0">
-              <a:buNone/>
-            </a:pPr>
-            <a:r>
-              <a:rPr lang="en-US" sz="5200" b="1" dirty="0">
-                <a:solidFill>
-                  <a:srgbClr val="FFFFFF"/>
-                </a:solidFill>
-                <a:latin typeface="Malgun Gothic" pitchFamily="34" charset="0"/>
-                <a:ea typeface="Malgun Gothic" pitchFamily="34" charset="-122"/>
-                <a:cs typeface="Malgun Gothic" pitchFamily="34" charset="-120"/>
-              </a:rPr>
-              <a:t>4</a:t>
-            </a:r>
-            <a:endParaRPr lang="en-US" sz="5200" dirty="0"/>
-          </a:p>
-        </p:txBody>
-      </p:sp>
-      <p:sp>
-        <p:nvSpPr>
-          <p:cNvPr id="4" name="Text 2"/>
-          <p:cNvSpPr/>
-          <p:nvPr/>
-        </p:nvSpPr>
-        <p:spPr>
-          <a:xfrm>
-            <a:off x="914400" y="3931920"/>
-            <a:ext cx="10332720" cy="868680"/>
-          </a:xfrm>
-          <a:prstGeom prst="rect">
-            <a:avLst/>
-          </a:prstGeom>
-          <a:noFill/>
-          <a:ln/>
-        </p:spPr>
-        <p:txBody>
-          <a:bodyPr wrap="square" rtlCol="0" anchor="ctr"/>
-          <a:lstStyle/>
-          <a:p>
-            <a:pPr algn="ctr" indent="0" marL="0">
-              <a:buNone/>
-            </a:pPr>
-            <a:r>
-              <a:rPr lang="en-US" sz="3000" b="1" dirty="0">
-                <a:solidFill>
-                  <a:srgbClr val="2A2723"/>
-                </a:solidFill>
-                <a:latin typeface="Malgun Gothic" pitchFamily="34" charset="0"/>
-                <a:ea typeface="Malgun Gothic" pitchFamily="34" charset="-122"/>
-                <a:cs typeface="Malgun Gothic" pitchFamily="34" charset="-120"/>
-              </a:rPr>
-              <a:t>프로젝트에서 발견되는 위치</a:t>
-            </a:r>
-            <a:endParaRPr lang="en-US" sz="3000" dirty="0"/>
-          </a:p>
-        </p:txBody>
-      </p:sp>
-      <p:sp>
-        <p:nvSpPr>
-          <p:cNvPr id="5" name="Text 3"/>
-          <p:cNvSpPr/>
-          <p:nvPr/>
-        </p:nvSpPr>
-        <p:spPr>
-          <a:xfrm>
-            <a:off x="914400" y="4846320"/>
-            <a:ext cx="10332720" cy="548640"/>
-          </a:xfrm>
-          <a:prstGeom prst="rect">
-            <a:avLst/>
-          </a:prstGeom>
-          <a:noFill/>
-          <a:ln/>
-        </p:spPr>
-        <p:txBody>
-          <a:bodyPr wrap="square" rtlCol="0" anchor="ctr"/>
-          <a:lstStyle/>
-          <a:p>
-            <a:pPr algn="ctr" indent="0" marL="0">
-              <a:buNone/>
-            </a:pPr>
-            <a:r>
-              <a:rPr lang="en-US" sz="1600" dirty="0">
-                <a:solidFill>
-                  <a:srgbClr val="6B6357"/>
-                </a:solidFill>
-                <a:latin typeface="Malgun Gothic" pitchFamily="34" charset="0"/>
-                <a:ea typeface="Malgun Gothic" pitchFamily="34" charset="-122"/>
-                <a:cs typeface="Malgun Gothic" pitchFamily="34" charset="-120"/>
-              </a:rPr>
-              <a:t>파일이 있다는 것과 Skill로 발견되는 것은 다릅니다</a:t>
-            </a:r>
-            <a:endParaRPr lang="en-US" sz="1600" dirty="0"/>
-          </a:p>
-        </p:txBody>
-      </p:sp>
-      <p:sp>
-        <p:nvSpPr>
-          <p:cNvPr id="6" name="Shape 4"/>
-          <p:cNvSpPr/>
-          <p:nvPr/>
-        </p:nvSpPr>
-        <p:spPr>
-          <a:xfrm>
-            <a:off x="4594860" y="5486400"/>
-            <a:ext cx="2999232" cy="457200"/>
-          </a:xfrm>
-          <a:prstGeom prst="roundRect">
-            <a:avLst>
-              <a:gd name="adj" fmla="val 50000"/>
-            </a:avLst>
-          </a:prstGeom>
-          <a:solidFill>
-            <a:srgbClr val="F2EDE4"/>
-          </a:solidFill>
-          <a:ln w="12700">
-            <a:solidFill>
-              <a:srgbClr val="E3DACB"/>
-            </a:solidFill>
-            <a:prstDash val="solid"/>
-          </a:ln>
-        </p:spPr>
-      </p:sp>
-      <p:sp>
-        <p:nvSpPr>
-          <p:cNvPr id="7" name="Text 5"/>
-          <p:cNvSpPr/>
-          <p:nvPr/>
-        </p:nvSpPr>
-        <p:spPr>
-          <a:xfrm>
-            <a:off x="4594860" y="5486400"/>
-            <a:ext cx="2999232" cy="457200"/>
-          </a:xfrm>
-          <a:prstGeom prst="rect">
-            <a:avLst/>
-          </a:prstGeom>
-          <a:noFill/>
-          <a:ln/>
-        </p:spPr>
-        <p:txBody>
-          <a:bodyPr wrap="square" rtlCol="0" anchor="ctr"/>
-          <a:lstStyle/>
-          <a:p>
-            <a:pPr algn="ctr" indent="0" marL="0">
-              <a:buNone/>
-            </a:pPr>
-            <a:r>
-              <a:rPr lang="en-US" sz="1300" dirty="0">
-                <a:solidFill>
-                  <a:srgbClr val="6B6357"/>
-                </a:solidFill>
-                <a:latin typeface="Malgun Gothic" pitchFamily="34" charset="0"/>
-                <a:ea typeface="Malgun Gothic" pitchFamily="34" charset="-122"/>
-                <a:cs typeface="Malgun Gothic" pitchFamily="34" charset="-120"/>
-              </a:rPr>
-              <a:t>⑩ Skill로 남기기</a:t>
-            </a:r>
-            <a:endParaRPr lang="en-US" sz="1300" dirty="0"/>
-          </a:p>
-        </p:txBody>
-      </p:sp>
-    </p:spTree>
-  </p:cSld>
-  <p:clrMapOvr>
-    <a:masterClrMapping/>
-  </p:clrMapOvr>
-</p:sld>
-</file>
-
 <file path=ppt/slides/slide14.xml><?xml version="1.0" encoding="utf-8"?>
 <p:sld xmlns:a="http://schemas.openxmlformats.org/drawingml/2006/main" xmlns:r="http://schemas.openxmlformats.org/officeDocument/2006/relationships" xmlns:p="http://schemas.openxmlformats.org/presentationml/2006/main">
   <p:cSld name="Slide 14">
@@ -4667,6 +5287,243 @@
       </p:grpSpPr>
       <p:sp>
         <p:nvSpPr>
+          <p:cNvPr id="2" name="Shape 0"/>
+          <p:cNvSpPr/>
+          <p:nvPr/>
+        </p:nvSpPr>
+        <p:spPr>
+          <a:xfrm>
+            <a:off x="5175504" y="1828800"/>
+            <a:ext cx="1828800" cy="1828800"/>
+          </a:xfrm>
+          <a:prstGeom prst="roundRect">
+            <a:avLst>
+              <a:gd name="adj" fmla="val 15000"/>
+            </a:avLst>
+          </a:prstGeom>
+          <a:solidFill>
+            <a:srgbClr val="3F6B5F"/>
+          </a:solidFill>
+          <a:ln/>
+        </p:spPr>
+      </p:sp>
+      <p:sp>
+        <p:nvSpPr>
+          <p:cNvPr id="3" name="Text 1"/>
+          <p:cNvSpPr/>
+          <p:nvPr/>
+        </p:nvSpPr>
+        <p:spPr>
+          <a:xfrm>
+            <a:off x="5175504" y="1828800"/>
+            <a:ext cx="1828800" cy="1828800"/>
+          </a:xfrm>
+          <a:prstGeom prst="rect">
+            <a:avLst/>
+          </a:prstGeom>
+          <a:noFill/>
+          <a:ln/>
+        </p:spPr>
+        <p:txBody>
+          <a:bodyPr wrap="square" rtlCol="0" anchor="ctr"/>
+          <a:lstStyle/>
+          <a:p>
+            <a:pPr algn="ctr" indent="0" marL="0">
+              <a:buNone/>
+            </a:pPr>
+            <a:r>
+              <a:rPr lang="en-US" sz="5200" b="1" dirty="0">
+                <a:solidFill>
+                  <a:srgbClr val="FFFFFF"/>
+                </a:solidFill>
+                <a:latin typeface="Malgun Gothic" pitchFamily="34" charset="0"/>
+                <a:ea typeface="Malgun Gothic" pitchFamily="34" charset="-122"/>
+                <a:cs typeface="Malgun Gothic" pitchFamily="34" charset="-120"/>
+              </a:rPr>
+              <a:t>4</a:t>
+            </a:r>
+            <a:endParaRPr lang="en-US" sz="5200" dirty="0"/>
+          </a:p>
+        </p:txBody>
+      </p:sp>
+      <p:sp>
+        <p:nvSpPr>
+          <p:cNvPr id="4" name="Text 2"/>
+          <p:cNvSpPr/>
+          <p:nvPr/>
+        </p:nvSpPr>
+        <p:spPr>
+          <a:xfrm>
+            <a:off x="914400" y="3931920"/>
+            <a:ext cx="10332720" cy="868680"/>
+          </a:xfrm>
+          <a:prstGeom prst="rect">
+            <a:avLst/>
+          </a:prstGeom>
+          <a:noFill/>
+          <a:ln/>
+        </p:spPr>
+        <p:txBody>
+          <a:bodyPr wrap="square" rtlCol="0" anchor="ctr"/>
+          <a:lstStyle/>
+          <a:p>
+            <a:pPr algn="ctr" indent="0" marL="0">
+              <a:buNone/>
+            </a:pPr>
+            <a:r>
+              <a:rPr lang="en-US" sz="3000" b="1" dirty="0">
+                <a:solidFill>
+                  <a:srgbClr val="2A2723"/>
+                </a:solidFill>
+                <a:latin typeface="Malgun Gothic" pitchFamily="34" charset="0"/>
+                <a:ea typeface="Malgun Gothic" pitchFamily="34" charset="-122"/>
+                <a:cs typeface="Malgun Gothic" pitchFamily="34" charset="-120"/>
+              </a:rPr>
+              <a:t>프로젝트에서 발견되는 위치</a:t>
+            </a:r>
+            <a:endParaRPr lang="en-US" sz="3000" dirty="0"/>
+          </a:p>
+        </p:txBody>
+      </p:sp>
+      <p:sp>
+        <p:nvSpPr>
+          <p:cNvPr id="5" name="Text 3"/>
+          <p:cNvSpPr/>
+          <p:nvPr/>
+        </p:nvSpPr>
+        <p:spPr>
+          <a:xfrm>
+            <a:off x="914400" y="4846320"/>
+            <a:ext cx="10332720" cy="548640"/>
+          </a:xfrm>
+          <a:prstGeom prst="rect">
+            <a:avLst/>
+          </a:prstGeom>
+          <a:noFill/>
+          <a:ln/>
+        </p:spPr>
+        <p:txBody>
+          <a:bodyPr wrap="square" rtlCol="0" anchor="ctr"/>
+          <a:lstStyle/>
+          <a:p>
+            <a:pPr algn="ctr" indent="0" marL="0">
+              <a:buNone/>
+            </a:pPr>
+            <a:r>
+              <a:rPr lang="en-US" sz="1600" dirty="0">
+                <a:solidFill>
+                  <a:srgbClr val="6B6357"/>
+                </a:solidFill>
+                <a:latin typeface="Malgun Gothic" pitchFamily="34" charset="0"/>
+                <a:ea typeface="Malgun Gothic" pitchFamily="34" charset="-122"/>
+                <a:cs typeface="Malgun Gothic" pitchFamily="34" charset="-120"/>
+              </a:rPr>
+              <a:t>파일이 있다는 것과 Skill로 발견되는 것은 다릅니다</a:t>
+            </a:r>
+            <a:endParaRPr lang="en-US" sz="1600" dirty="0"/>
+          </a:p>
+        </p:txBody>
+      </p:sp>
+      <p:sp>
+        <p:nvSpPr>
+          <p:cNvPr id="6" name="Shape 4"/>
+          <p:cNvSpPr/>
+          <p:nvPr/>
+        </p:nvSpPr>
+        <p:spPr>
+          <a:xfrm>
+            <a:off x="4594860" y="5486400"/>
+            <a:ext cx="2999232" cy="457200"/>
+          </a:xfrm>
+          <a:prstGeom prst="roundRect">
+            <a:avLst>
+              <a:gd name="adj" fmla="val 50000"/>
+            </a:avLst>
+          </a:prstGeom>
+          <a:solidFill>
+            <a:srgbClr val="F2EDE4"/>
+          </a:solidFill>
+          <a:ln w="12700">
+            <a:solidFill>
+              <a:srgbClr val="E3DACB"/>
+            </a:solidFill>
+            <a:prstDash val="solid"/>
+          </a:ln>
+        </p:spPr>
+      </p:sp>
+      <p:sp>
+        <p:nvSpPr>
+          <p:cNvPr id="7" name="Text 5"/>
+          <p:cNvSpPr/>
+          <p:nvPr/>
+        </p:nvSpPr>
+        <p:spPr>
+          <a:xfrm>
+            <a:off x="4594860" y="5486400"/>
+            <a:ext cx="2999232" cy="457200"/>
+          </a:xfrm>
+          <a:prstGeom prst="rect">
+            <a:avLst/>
+          </a:prstGeom>
+          <a:noFill/>
+          <a:ln/>
+        </p:spPr>
+        <p:txBody>
+          <a:bodyPr wrap="square" rtlCol="0" anchor="ctr"/>
+          <a:lstStyle/>
+          <a:p>
+            <a:pPr algn="ctr" indent="0" marL="0">
+              <a:buNone/>
+            </a:pPr>
+            <a:r>
+              <a:rPr lang="en-US" sz="1300" dirty="0">
+                <a:solidFill>
+                  <a:srgbClr val="6B6357"/>
+                </a:solidFill>
+                <a:latin typeface="Malgun Gothic" pitchFamily="34" charset="0"/>
+                <a:ea typeface="Malgun Gothic" pitchFamily="34" charset="-122"/>
+                <a:cs typeface="Malgun Gothic" pitchFamily="34" charset="-120"/>
+              </a:rPr>
+              <a:t>⑩ Skill로 남기기</a:t>
+            </a:r>
+            <a:endParaRPr lang="en-US" sz="1300" dirty="0"/>
+          </a:p>
+        </p:txBody>
+      </p:sp>
+    </p:spTree>
+  </p:cSld>
+  <p:clrMapOvr>
+    <a:masterClrMapping/>
+  </p:clrMapOvr>
+</p:sld>
+</file>
+
+<file path=ppt/slides/slide15.xml><?xml version="1.0" encoding="utf-8"?>
+<p:sld xmlns:a="http://schemas.openxmlformats.org/drawingml/2006/main" xmlns:r="http://schemas.openxmlformats.org/officeDocument/2006/relationships" xmlns:p="http://schemas.openxmlformats.org/presentationml/2006/main">
+  <p:cSld name="Slide 15">
+    <p:bg>
+      <p:bgPr>
+        <a:solidFill>
+          <a:srgbClr val="FAF8F4"/>
+        </a:solidFill>
+      </p:bgPr>
+    </p:bg>
+    <p:spTree>
+      <p:nvGrpSpPr>
+        <p:cNvPr id="1" name=""/>
+        <p:cNvGrpSpPr/>
+        <p:nvPr/>
+      </p:nvGrpSpPr>
+      <p:grpSpPr>
+        <a:xfrm>
+          <a:off x="0" y="0"/>
+          <a:ext cx="0" cy="0"/>
+          <a:chOff x="0" y="0"/>
+          <a:chExt cx="0" cy="0"/>
+        </a:xfrm>
+      </p:grpSpPr>
+      <p:sp>
+        <p:nvSpPr>
           <p:cNvPr id="2" name="Text 0"/>
           <p:cNvSpPr/>
           <p:nvPr/>
@@ -4742,7 +5599,7 @@
       </p:sp>
       <p:graphicFrame>
         <p:nvGraphicFramePr>
-          <p:cNvPr id="15" name="Table 0"/>
+          <p:cNvPr id="16" name="Table 0"/>
           <p:cNvGraphicFramePr>
             <a:graphicFrameLocks noGrp="1"/>
           </p:cNvGraphicFramePr>
@@ -5891,735 +6748,6 @@
 </p:sld>
 </file>
 
-<file path=ppt/slides/slide15.xml><?xml version="1.0" encoding="utf-8"?>
-<p:sld xmlns:a="http://schemas.openxmlformats.org/drawingml/2006/main" xmlns:r="http://schemas.openxmlformats.org/officeDocument/2006/relationships" xmlns:p="http://schemas.openxmlformats.org/presentationml/2006/main">
-  <p:cSld name="Slide 15">
-    <p:bg>
-      <p:bgPr>
-        <a:solidFill>
-          <a:srgbClr val="FAF8F4"/>
-        </a:solidFill>
-      </p:bgPr>
-    </p:bg>
-    <p:spTree>
-      <p:nvGrpSpPr>
-        <p:cNvPr id="1" name=""/>
-        <p:cNvGrpSpPr/>
-        <p:nvPr/>
-      </p:nvGrpSpPr>
-      <p:grpSpPr>
-        <a:xfrm>
-          <a:off x="0" y="0"/>
-          <a:ext cx="0" cy="0"/>
-          <a:chOff x="0" y="0"/>
-          <a:chExt cx="0" cy="0"/>
-        </a:xfrm>
-      </p:grpSpPr>
-      <p:sp>
-        <p:nvSpPr>
-          <p:cNvPr id="2" name="Text 0"/>
-          <p:cNvSpPr/>
-          <p:nvPr/>
-        </p:nvSpPr>
-        <p:spPr>
-          <a:xfrm>
-            <a:off x="548640" y="384048"/>
-            <a:ext cx="11091672" cy="731520"/>
-          </a:xfrm>
-          <a:prstGeom prst="rect">
-            <a:avLst/>
-          </a:prstGeom>
-          <a:noFill/>
-          <a:ln/>
-        </p:spPr>
-        <p:txBody>
-          <a:bodyPr wrap="square" rtlCol="0" anchor="ctr">
-            <a:normAutofit/>
-          </a:bodyPr>
-          <a:lstStyle/>
-          <a:p>
-            <a:pPr indent="0" marL="0">
-              <a:buNone/>
-            </a:pPr>
-            <a:r>
-              <a:rPr lang="en-US" sz="2400" b="1" dirty="0">
-                <a:solidFill>
-                  <a:srgbClr val="2A2723"/>
-                </a:solidFill>
-                <a:latin typeface="Malgun Gothic" pitchFamily="34" charset="0"/>
-                <a:ea typeface="Malgun Gothic" pitchFamily="34" charset="-122"/>
-                <a:cs typeface="Malgun Gothic" pitchFamily="34" charset="-120"/>
-              </a:rPr>
-              <a:t>이름을 지정하여 </a:t>
-            </a:r>
-            <a:pPr indent="0" marL="0">
-              <a:buNone/>
-            </a:pPr>
-            <a:r>
-              <a:rPr lang="en-US" sz="2400" b="1" dirty="0">
-                <a:solidFill>
-                  <a:srgbClr val="3A5A8C"/>
-                </a:solidFill>
-                <a:latin typeface="Malgun Gothic" pitchFamily="34" charset="0"/>
-                <a:ea typeface="Malgun Gothic" pitchFamily="34" charset="-122"/>
-                <a:cs typeface="Malgun Gothic" pitchFamily="34" charset="-120"/>
-              </a:rPr>
-              <a:t>불러오기</a:t>
-            </a:r>
-            <a:endParaRPr lang="en-US" sz="2400" dirty="0"/>
-          </a:p>
-        </p:txBody>
-      </p:sp>
-      <p:sp>
-        <p:nvSpPr>
-          <p:cNvPr id="3" name="Shape 1"/>
-          <p:cNvSpPr/>
-          <p:nvPr/>
-        </p:nvSpPr>
-        <p:spPr>
-          <a:xfrm>
-            <a:off x="566928" y="1133856"/>
-            <a:ext cx="777240" cy="41148"/>
-          </a:xfrm>
-          <a:prstGeom prst="rect">
-            <a:avLst/>
-          </a:prstGeom>
-          <a:solidFill>
-            <a:srgbClr val="3F6B5F"/>
-          </a:solidFill>
-          <a:ln/>
-        </p:spPr>
-      </p:sp>
-      <p:sp>
-        <p:nvSpPr>
-          <p:cNvPr id="4" name="Shape 2"/>
-          <p:cNvSpPr/>
-          <p:nvPr/>
-        </p:nvSpPr>
-        <p:spPr>
-          <a:xfrm>
-            <a:off x="548640" y="1371600"/>
-            <a:ext cx="11091672" cy="891540"/>
-          </a:xfrm>
-          <a:prstGeom prst="roundRect">
-            <a:avLst>
-              <a:gd name="adj" fmla="val 5128"/>
-            </a:avLst>
-          </a:prstGeom>
-          <a:solidFill>
-            <a:srgbClr val="F2EDE4"/>
-          </a:solidFill>
-          <a:ln w="12700">
-            <a:solidFill>
-              <a:srgbClr val="E3DACB"/>
-            </a:solidFill>
-            <a:prstDash val="solid"/>
-          </a:ln>
-        </p:spPr>
-      </p:sp>
-      <p:sp>
-        <p:nvSpPr>
-          <p:cNvPr id="5" name="Shape 3"/>
-          <p:cNvSpPr/>
-          <p:nvPr/>
-        </p:nvSpPr>
-        <p:spPr>
-          <a:xfrm>
-            <a:off x="548640" y="1371600"/>
-            <a:ext cx="54864" cy="891540"/>
-          </a:xfrm>
-          <a:prstGeom prst="rect">
-            <a:avLst/>
-          </a:prstGeom>
-          <a:solidFill>
-            <a:srgbClr val="3F6B5F"/>
-          </a:solidFill>
-          <a:ln/>
-        </p:spPr>
-      </p:sp>
-      <p:sp>
-        <p:nvSpPr>
-          <p:cNvPr id="6" name="Text 4"/>
-          <p:cNvSpPr/>
-          <p:nvPr/>
-        </p:nvSpPr>
-        <p:spPr>
-          <a:xfrm>
-            <a:off x="768096" y="1463040"/>
-            <a:ext cx="10707624" cy="708660"/>
-          </a:xfrm>
-          <a:prstGeom prst="rect">
-            <a:avLst/>
-          </a:prstGeom>
-          <a:noFill/>
-          <a:ln/>
-        </p:spPr>
-        <p:txBody>
-          <a:bodyPr wrap="square" rtlCol="0" anchor="t">
-            <a:normAutofit/>
-          </a:bodyPr>
-          <a:lstStyle/>
-          <a:p>
-            <a:pPr algn="l" indent="0" marL="0">
-              <a:lnSpc>
-                <a:spcPct val="102000"/>
-              </a:lnSpc>
-              <a:buNone/>
-            </a:pPr>
-            <a:r>
-              <a:rPr lang="en-US" sz="1100" dirty="0">
-                <a:solidFill>
-                  <a:srgbClr val="2A2723"/>
-                </a:solidFill>
-                <a:latin typeface="Consolas" pitchFamily="34" charset="0"/>
-                <a:ea typeface="Consolas" pitchFamily="34" charset="-122"/>
-                <a:cs typeface="Consolas" pitchFamily="34" charset="-120"/>
-              </a:rPr>
-              <a:t>/team-weekly-report 첫째 주 기록으로 보고서를 만들어 줘.      # Claude Code</a:t>
-            </a:r>
-            <a:endParaRPr lang="en-US" sz="1100" dirty="0"/>
-          </a:p>
-          <a:p>
-            <a:pPr algn="l" indent="0" marL="0">
-              <a:lnSpc>
-                <a:spcPct val="102000"/>
-              </a:lnSpc>
-              <a:buNone/>
-            </a:pPr>
-            <a:endParaRPr lang="en-US" sz="1100" dirty="0"/>
-          </a:p>
-          <a:p>
-            <a:pPr algn="l" indent="0" marL="0">
-              <a:lnSpc>
-                <a:spcPct val="102000"/>
-              </a:lnSpc>
-              <a:buNone/>
-            </a:pPr>
-            <a:r>
-              <a:rPr lang="en-US" sz="1100" dirty="0">
-                <a:solidFill>
-                  <a:srgbClr val="2A2723"/>
-                </a:solidFill>
-                <a:latin typeface="Consolas" pitchFamily="34" charset="0"/>
-                <a:ea typeface="Consolas" pitchFamily="34" charset="-122"/>
-                <a:cs typeface="Consolas" pitchFamily="34" charset="-120"/>
-              </a:rPr>
-              <a:t>team-weekly-report 스킬을 사용해 첫째 주 보고서를 만들어 줘.   # OpenCode</a:t>
-            </a:r>
-            <a:endParaRPr lang="en-US" sz="1100" dirty="0"/>
-          </a:p>
-        </p:txBody>
-      </p:sp>
-      <p:sp>
-        <p:nvSpPr>
-          <p:cNvPr id="7" name="Text 5"/>
-          <p:cNvSpPr/>
-          <p:nvPr/>
-        </p:nvSpPr>
-        <p:spPr>
-          <a:xfrm>
-            <a:off x="548640" y="2409444"/>
-            <a:ext cx="11091672" cy="1609725"/>
-          </a:xfrm>
-          <a:prstGeom prst="rect">
-            <a:avLst/>
-          </a:prstGeom>
-          <a:noFill/>
-          <a:ln/>
-        </p:spPr>
-        <p:txBody>
-          <a:bodyPr wrap="square" rtlCol="0" anchor="t">
-            <a:normAutofit/>
-          </a:bodyPr>
-          <a:lstStyle/>
-          <a:p>
-            <a:pPr indent="0" marL="0">
-              <a:lnSpc>
-                <a:spcPct val="105000"/>
-              </a:lnSpc>
-              <a:buNone/>
-            </a:pPr>
-            <a:r>
-              <a:rPr lang="en-US" sz="1450" b="1" dirty="0">
-                <a:solidFill>
-                  <a:srgbClr val="3F6B5F"/>
-                </a:solidFill>
-                <a:latin typeface="Malgun Gothic" pitchFamily="34" charset="0"/>
-                <a:ea typeface="Malgun Gothic" pitchFamily="34" charset="-122"/>
-                <a:cs typeface="Malgun Gothic" pitchFamily="34" charset="-120"/>
-              </a:rPr>
-              <a:t>›  </a:t>
-            </a:r>
-            <a:pPr indent="0" marL="0">
-              <a:lnSpc>
-                <a:spcPct val="105000"/>
-              </a:lnSpc>
-              <a:buNone/>
-            </a:pPr>
-            <a:r>
-              <a:rPr lang="en-US" sz="1450" dirty="0">
-                <a:solidFill>
-                  <a:srgbClr val="6B6357"/>
-                </a:solidFill>
-                <a:latin typeface="Malgun Gothic" pitchFamily="34" charset="0"/>
-                <a:ea typeface="Malgun Gothic" pitchFamily="34" charset="-122"/>
-                <a:cs typeface="Malgun Gothic" pitchFamily="34" charset="-120"/>
-              </a:rPr>
-              <a:t>OpenCode는 </a:t>
-            </a:r>
-            <a:pPr indent="0" marL="0">
-              <a:lnSpc>
-                <a:spcPct val="105000"/>
-              </a:lnSpc>
-              <a:buNone/>
-            </a:pPr>
-            <a:r>
-              <a:rPr lang="en-US" sz="1450" b="1" dirty="0">
-                <a:solidFill>
-                  <a:srgbClr val="2A2723"/>
-                </a:solidFill>
-                <a:latin typeface="Malgun Gothic" pitchFamily="34" charset="0"/>
-                <a:ea typeface="Malgun Gothic" pitchFamily="34" charset="-122"/>
-                <a:cs typeface="Malgun Gothic" pitchFamily="34" charset="-120"/>
-              </a:rPr>
-              <a:t>내부 skill 도구</a:t>
-            </a:r>
-            <a:pPr indent="0" marL="0">
-              <a:lnSpc>
-                <a:spcPct val="105000"/>
-              </a:lnSpc>
-              <a:buNone/>
-            </a:pPr>
-            <a:r>
-              <a:rPr lang="en-US" sz="1450" dirty="0">
-                <a:solidFill>
-                  <a:srgbClr val="6B6357"/>
-                </a:solidFill>
-                <a:latin typeface="Malgun Gothic" pitchFamily="34" charset="0"/>
-                <a:ea typeface="Malgun Gothic" pitchFamily="34" charset="-122"/>
-                <a:cs typeface="Malgun Gothic" pitchFamily="34" charset="-120"/>
-              </a:rPr>
-              <a:t>로 Skill 내용을 불러옵니다 — </a:t>
-            </a:r>
-            <a:pPr indent="0" marL="0">
-              <a:lnSpc>
-                <a:spcPct val="105000"/>
-              </a:lnSpc>
-              <a:buNone/>
-            </a:pPr>
-            <a:r>
-              <a:rPr lang="en-US" sz="1450" b="1" dirty="0">
-                <a:solidFill>
-                  <a:srgbClr val="A65A3F"/>
-                </a:solidFill>
-                <a:latin typeface="Malgun Gothic" pitchFamily="34" charset="0"/>
-                <a:ea typeface="Malgun Gothic" pitchFamily="34" charset="-122"/>
-                <a:cs typeface="Malgun Gothic" pitchFamily="34" charset="-120"/>
-              </a:rPr>
-              <a:t>사용자가 그 내부 호출 코드를 직접 입력할 필요는 없고</a:t>
-            </a:r>
-            <a:pPr indent="0" marL="0">
-              <a:lnSpc>
-                <a:spcPct val="105000"/>
-              </a:lnSpc>
-              <a:buNone/>
-            </a:pPr>
-            <a:r>
-              <a:rPr lang="en-US" sz="1450" dirty="0">
-                <a:solidFill>
-                  <a:srgbClr val="6B6357"/>
-                </a:solidFill>
-                <a:latin typeface="Malgun Gothic" pitchFamily="34" charset="0"/>
-                <a:ea typeface="Malgun Gothic" pitchFamily="34" charset="-122"/>
-                <a:cs typeface="Malgun Gothic" pitchFamily="34" charset="-120"/>
-              </a:rPr>
-              <a:t>, </a:t>
-            </a:r>
-            <a:pPr indent="0" marL="0">
-              <a:lnSpc>
-                <a:spcPct val="105000"/>
-              </a:lnSpc>
-              <a:spcAft>
-                <a:spcPts val="700"/>
-              </a:spcAft>
-              <a:buNone/>
-            </a:pPr>
-            <a:r>
-              <a:rPr lang="en-US" sz="1450" b="1" dirty="0">
-                <a:solidFill>
-                  <a:srgbClr val="A65A3F"/>
-                </a:solidFill>
-                <a:latin typeface="Malgun Gothic" pitchFamily="34" charset="0"/>
-                <a:ea typeface="Malgun Gothic" pitchFamily="34" charset="-122"/>
-                <a:cs typeface="Malgun Gothic" pitchFamily="34" charset="-120"/>
-              </a:rPr>
-              <a:t>Claude Code의 슬래시 문법을 OpenCode에서 똑같이 써야 하는 것으로 이해하지 마세요</a:t>
-            </a:r>
-            <a:endParaRPr lang="en-US" sz="1450" dirty="0"/>
-          </a:p>
-          <a:p>
-            <a:pPr indent="0" marL="0">
-              <a:lnSpc>
-                <a:spcPct val="105000"/>
-              </a:lnSpc>
-              <a:buNone/>
-            </a:pPr>
-            <a:r>
-              <a:rPr lang="en-US" sz="1450" b="1" dirty="0">
-                <a:solidFill>
-                  <a:srgbClr val="3F6B5F"/>
-                </a:solidFill>
-                <a:latin typeface="Malgun Gothic" pitchFamily="34" charset="0"/>
-                <a:ea typeface="Malgun Gothic" pitchFamily="34" charset="-122"/>
-                <a:cs typeface="Malgun Gothic" pitchFamily="34" charset="-120"/>
-              </a:rPr>
-              <a:t>›  </a:t>
-            </a:r>
-            <a:pPr indent="0" marL="0">
-              <a:lnSpc>
-                <a:spcPct val="105000"/>
-              </a:lnSpc>
-              <a:buNone/>
-            </a:pPr>
-            <a:r>
-              <a:rPr lang="en-US" sz="1450" dirty="0">
-                <a:solidFill>
-                  <a:srgbClr val="6B6357"/>
-                </a:solidFill>
-                <a:latin typeface="Malgun Gothic" pitchFamily="34" charset="0"/>
-                <a:ea typeface="Malgun Gothic" pitchFamily="34" charset="-122"/>
-                <a:cs typeface="Malgun Gothic" pitchFamily="34" charset="-120"/>
-              </a:rPr>
-              <a:t>AI의 '스킬을 사용했습니다'라는 말과 함께 </a:t>
-            </a:r>
-            <a:pPr indent="0" marL="0">
-              <a:lnSpc>
-                <a:spcPct val="105000"/>
-              </a:lnSpc>
-              <a:buNone/>
-            </a:pPr>
-            <a:r>
-              <a:rPr lang="en-US" sz="1450" b="1" dirty="0">
-                <a:solidFill>
-                  <a:srgbClr val="3F6B5F"/>
-                </a:solidFill>
-                <a:latin typeface="Malgun Gothic" pitchFamily="34" charset="0"/>
-                <a:ea typeface="Malgun Gothic" pitchFamily="34" charset="-122"/>
-                <a:cs typeface="Malgun Gothic" pitchFamily="34" charset="-120"/>
-              </a:rPr>
-              <a:t>실제 파일 읽기 또는 Skill 로드 기록</a:t>
-            </a:r>
-            <a:pPr indent="0" marL="0">
-              <a:lnSpc>
-                <a:spcPct val="105000"/>
-              </a:lnSpc>
-              <a:buNone/>
-            </a:pPr>
-            <a:r>
-              <a:rPr lang="en-US" sz="1450" dirty="0">
-                <a:solidFill>
-                  <a:srgbClr val="6B6357"/>
-                </a:solidFill>
-                <a:latin typeface="Malgun Gothic" pitchFamily="34" charset="0"/>
-                <a:ea typeface="Malgun Gothic" pitchFamily="34" charset="-122"/>
-                <a:cs typeface="Malgun Gothic" pitchFamily="34" charset="-120"/>
-              </a:rPr>
-              <a:t>을 살펴보세요 — team-weekly-report를 불러왔는지, 그 뒤 </a:t>
-            </a:r>
-            <a:pPr indent="0" marL="0">
-              <a:lnSpc>
-                <a:spcPct val="105000"/>
-              </a:lnSpc>
-              <a:spcAft>
-                <a:spcPts val="700"/>
-              </a:spcAft>
-              <a:buNone/>
-            </a:pPr>
-            <a:r>
-              <a:rPr lang="en-US" sz="1450" b="1" dirty="0">
-                <a:solidFill>
-                  <a:srgbClr val="2A2723"/>
-                </a:solidFill>
-                <a:latin typeface="Malgun Gothic" pitchFamily="34" charset="0"/>
-                <a:ea typeface="Malgun Gothic" pitchFamily="34" charset="-122"/>
-                <a:cs typeface="Malgun Gothic" pitchFamily="34" charset="-120"/>
-              </a:rPr>
-              <a:t>references/team-rules.md를 읽었는지</a:t>
-            </a:r>
-            <a:endParaRPr lang="en-US" sz="1450" dirty="0"/>
-          </a:p>
-          <a:p>
-            <a:pPr indent="0" marL="0">
-              <a:lnSpc>
-                <a:spcPct val="105000"/>
-              </a:lnSpc>
-              <a:buNone/>
-            </a:pPr>
-            <a:r>
-              <a:rPr lang="en-US" sz="1450" b="1" dirty="0">
-                <a:solidFill>
-                  <a:srgbClr val="3F6B5F"/>
-                </a:solidFill>
-                <a:latin typeface="Malgun Gothic" pitchFamily="34" charset="0"/>
-                <a:ea typeface="Malgun Gothic" pitchFamily="34" charset="-122"/>
-                <a:cs typeface="Malgun Gothic" pitchFamily="34" charset="-120"/>
-              </a:rPr>
-              <a:t>›  </a:t>
-            </a:r>
-            <a:pPr indent="0" marL="0">
-              <a:lnSpc>
-                <a:spcPct val="105000"/>
-              </a:lnSpc>
-              <a:buNone/>
-            </a:pPr>
-            <a:r>
-              <a:rPr lang="en-US" sz="1450" dirty="0">
-                <a:solidFill>
-                  <a:srgbClr val="6B6357"/>
-                </a:solidFill>
-                <a:latin typeface="Malgun Gothic" pitchFamily="34" charset="0"/>
-                <a:ea typeface="Malgun Gothic" pitchFamily="34" charset="-122"/>
-                <a:cs typeface="Malgun Gothic" pitchFamily="34" charset="-120"/>
-              </a:rPr>
-              <a:t>맞춰 볼 것 — </a:t>
-            </a:r>
-            <a:pPr indent="0" marL="0">
-              <a:lnSpc>
-                <a:spcPct val="105000"/>
-              </a:lnSpc>
-              <a:spcAft>
-                <a:spcPts val="700"/>
-              </a:spcAft>
-              <a:buNone/>
-            </a:pPr>
-            <a:r>
-              <a:rPr lang="en-US" sz="1450" b="1" dirty="0">
-                <a:solidFill>
-                  <a:srgbClr val="2A2723"/>
-                </a:solidFill>
-                <a:latin typeface="Malgun Gothic" pitchFamily="34" charset="0"/>
-                <a:ea typeface="Malgun Gothic" pitchFamily="34" charset="-122"/>
-                <a:cs typeface="Malgun Gothic" pitchFamily="34" charset="-120"/>
-              </a:rPr>
-              <a:t>첫째 주 업무가 네 건인지, 보고 기준일이 2026-09-04인지, 업무 ID별 근거가 붙었는지</a:t>
-            </a:r>
-            <a:endParaRPr lang="en-US" sz="1450" dirty="0"/>
-          </a:p>
-        </p:txBody>
-      </p:sp>
-      <p:sp>
-        <p:nvSpPr>
-          <p:cNvPr id="8" name="Shape 6"/>
-          <p:cNvSpPr/>
-          <p:nvPr/>
-        </p:nvSpPr>
-        <p:spPr>
-          <a:xfrm>
-            <a:off x="548640" y="4165473"/>
-            <a:ext cx="11091672" cy="1017270"/>
-          </a:xfrm>
-          <a:prstGeom prst="roundRect">
-            <a:avLst>
-              <a:gd name="adj" fmla="val 5393"/>
-            </a:avLst>
-          </a:prstGeom>
-          <a:solidFill>
-            <a:srgbClr val="F2EDE4"/>
-          </a:solidFill>
-          <a:ln/>
-        </p:spPr>
-      </p:sp>
-      <p:sp>
-        <p:nvSpPr>
-          <p:cNvPr id="9" name="Shape 7"/>
-          <p:cNvSpPr/>
-          <p:nvPr/>
-        </p:nvSpPr>
-        <p:spPr>
-          <a:xfrm>
-            <a:off x="548640" y="4165473"/>
-            <a:ext cx="54864" cy="1017270"/>
-          </a:xfrm>
-          <a:prstGeom prst="rect">
-            <a:avLst/>
-          </a:prstGeom>
-          <a:solidFill>
-            <a:srgbClr val="C8A15A"/>
-          </a:solidFill>
-          <a:ln/>
-        </p:spPr>
-      </p:sp>
-      <p:sp>
-        <p:nvSpPr>
-          <p:cNvPr id="10" name="Text 8"/>
-          <p:cNvSpPr/>
-          <p:nvPr/>
-        </p:nvSpPr>
-        <p:spPr>
-          <a:xfrm>
-            <a:off x="786384" y="4165473"/>
-            <a:ext cx="10707624" cy="1017270"/>
-          </a:xfrm>
-          <a:prstGeom prst="rect">
-            <a:avLst/>
-          </a:prstGeom>
-          <a:noFill/>
-          <a:ln/>
-        </p:spPr>
-        <p:txBody>
-          <a:bodyPr wrap="square" rtlCol="0" anchor="ctr">
-            <a:normAutofit/>
-          </a:bodyPr>
-          <a:lstStyle/>
-          <a:p>
-            <a:pPr indent="0" marL="0">
-              <a:lnSpc>
-                <a:spcPct val="104000"/>
-              </a:lnSpc>
-              <a:buNone/>
-            </a:pPr>
-            <a:r>
-              <a:rPr lang="en-US" sz="1300" dirty="0">
-                <a:solidFill>
-                  <a:srgbClr val="6B6357"/>
-                </a:solidFill>
-                <a:latin typeface="Malgun Gothic" pitchFamily="34" charset="0"/>
-                <a:ea typeface="Malgun Gothic" pitchFamily="34" charset="-122"/>
-                <a:cs typeface="Malgun Gothic" pitchFamily="34" charset="-120"/>
-              </a:rPr>
-              <a:t>🔧 Skill을 찾지 못했다면 — </a:t>
-            </a:r>
-            <a:pPr indent="0" marL="0">
-              <a:lnSpc>
-                <a:spcPct val="104000"/>
-              </a:lnSpc>
-              <a:buNone/>
-            </a:pPr>
-            <a:r>
-              <a:rPr lang="en-US" sz="1300" b="1" dirty="0">
-                <a:solidFill>
-                  <a:srgbClr val="3F6B5F"/>
-                </a:solidFill>
-                <a:latin typeface="Malgun Gothic" pitchFamily="34" charset="0"/>
-                <a:ea typeface="Malgun Gothic" pitchFamily="34" charset="-122"/>
-                <a:cs typeface="Malgun Gothic" pitchFamily="34" charset="-120"/>
-              </a:rPr>
-              <a:t>현재 열어 놓은 프로젝트 위치와 최종 파일 경로</a:t>
-            </a:r>
-            <a:pPr indent="0" marL="0">
-              <a:lnSpc>
-                <a:spcPct val="104000"/>
-              </a:lnSpc>
-              <a:buNone/>
-            </a:pPr>
-            <a:r>
-              <a:rPr lang="en-US" sz="1300" dirty="0">
-                <a:solidFill>
-                  <a:srgbClr val="6B6357"/>
-                </a:solidFill>
-                <a:latin typeface="Malgun Gothic" pitchFamily="34" charset="0"/>
-                <a:ea typeface="Malgun Gothic" pitchFamily="34" charset="-122"/>
-                <a:cs typeface="Malgun Gothic" pitchFamily="34" charset="-120"/>
-              </a:rPr>
-              <a:t> → </a:t>
-            </a:r>
-            <a:pPr indent="0" marL="0">
-              <a:lnSpc>
-                <a:spcPct val="104000"/>
-              </a:lnSpc>
-              <a:buNone/>
-            </a:pPr>
-            <a:r>
-              <a:rPr lang="en-US" sz="1300" b="1" dirty="0">
-                <a:solidFill>
-                  <a:srgbClr val="2A2723"/>
-                </a:solidFill>
-                <a:latin typeface="Malgun Gothic" pitchFamily="34" charset="0"/>
-                <a:ea typeface="Malgun Gothic" pitchFamily="34" charset="-122"/>
-                <a:cs typeface="Malgun Gothic" pitchFamily="34" charset="-120"/>
-              </a:rPr>
-              <a:t>파일 이름이 정확히 SKILL.md인지, 앞부분의 이름과 설명이 있는지</a:t>
-            </a:r>
-            <a:pPr indent="0" marL="0">
-              <a:lnSpc>
-                <a:spcPct val="104000"/>
-              </a:lnSpc>
-              <a:buNone/>
-            </a:pPr>
-            <a:r>
-              <a:rPr lang="en-US" sz="1300" dirty="0">
-                <a:solidFill>
-                  <a:srgbClr val="6B6357"/>
-                </a:solidFill>
-                <a:latin typeface="Malgun Gothic" pitchFamily="34" charset="0"/>
-                <a:ea typeface="Malgun Gothic" pitchFamily="34" charset="-122"/>
-                <a:cs typeface="Malgun Gothic" pitchFamily="34" charset="-120"/>
-              </a:rPr>
-              <a:t> → OpenCode는 </a:t>
-            </a:r>
-            <a:pPr indent="0" marL="0">
-              <a:lnSpc>
-                <a:spcPct val="104000"/>
-              </a:lnSpc>
-              <a:buNone/>
-            </a:pPr>
-            <a:r>
-              <a:rPr lang="en-US" sz="1300" b="1" dirty="0">
-                <a:solidFill>
-                  <a:srgbClr val="2A2723"/>
-                </a:solidFill>
-                <a:latin typeface="Malgun Gothic" pitchFamily="34" charset="0"/>
-                <a:ea typeface="Malgun Gothic" pitchFamily="34" charset="-122"/>
-                <a:cs typeface="Malgun Gothic" pitchFamily="34" charset="-120"/>
-              </a:rPr>
-              <a:t>Skill 접근 권한이나 skill 도구가 꺼져 있는지</a:t>
-            </a:r>
-            <a:pPr indent="0" marL="0">
-              <a:lnSpc>
-                <a:spcPct val="104000"/>
-              </a:lnSpc>
-              <a:buNone/>
-            </a:pPr>
-            <a:r>
-              <a:rPr lang="en-US" sz="1300" dirty="0">
-                <a:solidFill>
-                  <a:srgbClr val="6B6357"/>
-                </a:solidFill>
-                <a:latin typeface="Malgun Gothic" pitchFamily="34" charset="0"/>
-                <a:ea typeface="Malgun Gothic" pitchFamily="34" charset="-122"/>
-                <a:cs typeface="Malgun Gothic" pitchFamily="34" charset="-120"/>
-              </a:rPr>
-              <a:t>. Claude Code는 감시 중인 디렉터리 변경을 반영하지만 </a:t>
-            </a:r>
-            <a:pPr indent="0" marL="0">
-              <a:lnSpc>
-                <a:spcPct val="104000"/>
-              </a:lnSpc>
-              <a:buNone/>
-            </a:pPr>
-            <a:r>
-              <a:rPr lang="en-US" sz="1300" b="1" dirty="0">
-                <a:solidFill>
-                  <a:srgbClr val="A65A3F"/>
-                </a:solidFill>
-                <a:latin typeface="Malgun Gothic" pitchFamily="34" charset="0"/>
-                <a:ea typeface="Malgun Gothic" pitchFamily="34" charset="-122"/>
-                <a:cs typeface="Malgun Gothic" pitchFamily="34" charset="-120"/>
-              </a:rPr>
-              <a:t>세션 시작 때 없던 최상위 Skills 디렉터리를 처음 만든 경우에는 재시작이 필요</a:t>
-            </a:r>
-            <a:endParaRPr lang="en-US" sz="1300" dirty="0"/>
-          </a:p>
-        </p:txBody>
-      </p:sp>
-    </p:spTree>
-  </p:cSld>
-  <p:clrMapOvr>
-    <a:masterClrMapping/>
-  </p:clrMapOvr>
-</p:sld>
-</file>
-
 <file path=ppt/slides/slide16.xml><?xml version="1.0" encoding="utf-8"?>
 <p:sld xmlns:a="http://schemas.openxmlformats.org/drawingml/2006/main" xmlns:r="http://schemas.openxmlformats.org/officeDocument/2006/relationships" xmlns:p="http://schemas.openxmlformats.org/presentationml/2006/main">
   <p:cSld name="Slide 16">
@@ -6679,6 +6807,735 @@
                 <a:ea typeface="Malgun Gothic" pitchFamily="34" charset="-122"/>
                 <a:cs typeface="Malgun Gothic" pitchFamily="34" charset="-120"/>
               </a:rPr>
+              <a:t>이름을 지정하여 </a:t>
+            </a:r>
+            <a:pPr indent="0" marL="0">
+              <a:buNone/>
+            </a:pPr>
+            <a:r>
+              <a:rPr lang="en-US" sz="2400" b="1" dirty="0">
+                <a:solidFill>
+                  <a:srgbClr val="3A5A8C"/>
+                </a:solidFill>
+                <a:latin typeface="Malgun Gothic" pitchFamily="34" charset="0"/>
+                <a:ea typeface="Malgun Gothic" pitchFamily="34" charset="-122"/>
+                <a:cs typeface="Malgun Gothic" pitchFamily="34" charset="-120"/>
+              </a:rPr>
+              <a:t>불러오기</a:t>
+            </a:r>
+            <a:endParaRPr lang="en-US" sz="2400" dirty="0"/>
+          </a:p>
+        </p:txBody>
+      </p:sp>
+      <p:sp>
+        <p:nvSpPr>
+          <p:cNvPr id="3" name="Shape 1"/>
+          <p:cNvSpPr/>
+          <p:nvPr/>
+        </p:nvSpPr>
+        <p:spPr>
+          <a:xfrm>
+            <a:off x="566928" y="1133856"/>
+            <a:ext cx="777240" cy="41148"/>
+          </a:xfrm>
+          <a:prstGeom prst="rect">
+            <a:avLst/>
+          </a:prstGeom>
+          <a:solidFill>
+            <a:srgbClr val="3F6B5F"/>
+          </a:solidFill>
+          <a:ln/>
+        </p:spPr>
+      </p:sp>
+      <p:sp>
+        <p:nvSpPr>
+          <p:cNvPr id="4" name="Shape 2"/>
+          <p:cNvSpPr/>
+          <p:nvPr/>
+        </p:nvSpPr>
+        <p:spPr>
+          <a:xfrm>
+            <a:off x="548640" y="1371600"/>
+            <a:ext cx="11091672" cy="891540"/>
+          </a:xfrm>
+          <a:prstGeom prst="roundRect">
+            <a:avLst>
+              <a:gd name="adj" fmla="val 5128"/>
+            </a:avLst>
+          </a:prstGeom>
+          <a:solidFill>
+            <a:srgbClr val="F2EDE4"/>
+          </a:solidFill>
+          <a:ln w="12700">
+            <a:solidFill>
+              <a:srgbClr val="E3DACB"/>
+            </a:solidFill>
+            <a:prstDash val="solid"/>
+          </a:ln>
+        </p:spPr>
+      </p:sp>
+      <p:sp>
+        <p:nvSpPr>
+          <p:cNvPr id="5" name="Shape 3"/>
+          <p:cNvSpPr/>
+          <p:nvPr/>
+        </p:nvSpPr>
+        <p:spPr>
+          <a:xfrm>
+            <a:off x="548640" y="1371600"/>
+            <a:ext cx="54864" cy="891540"/>
+          </a:xfrm>
+          <a:prstGeom prst="rect">
+            <a:avLst/>
+          </a:prstGeom>
+          <a:solidFill>
+            <a:srgbClr val="3F6B5F"/>
+          </a:solidFill>
+          <a:ln/>
+        </p:spPr>
+      </p:sp>
+      <p:sp>
+        <p:nvSpPr>
+          <p:cNvPr id="6" name="Text 4"/>
+          <p:cNvSpPr/>
+          <p:nvPr/>
+        </p:nvSpPr>
+        <p:spPr>
+          <a:xfrm>
+            <a:off x="768096" y="1463040"/>
+            <a:ext cx="10707624" cy="708660"/>
+          </a:xfrm>
+          <a:prstGeom prst="rect">
+            <a:avLst/>
+          </a:prstGeom>
+          <a:noFill/>
+          <a:ln/>
+        </p:spPr>
+        <p:txBody>
+          <a:bodyPr wrap="square" rtlCol="0" anchor="t">
+            <a:normAutofit/>
+          </a:bodyPr>
+          <a:lstStyle/>
+          <a:p>
+            <a:pPr algn="l" indent="0" marL="0">
+              <a:lnSpc>
+                <a:spcPct val="102000"/>
+              </a:lnSpc>
+              <a:buNone/>
+            </a:pPr>
+            <a:r>
+              <a:rPr lang="en-US" sz="1100" dirty="0">
+                <a:solidFill>
+                  <a:srgbClr val="2A2723"/>
+                </a:solidFill>
+                <a:latin typeface="Consolas" pitchFamily="34" charset="0"/>
+                <a:ea typeface="Consolas" pitchFamily="34" charset="-122"/>
+                <a:cs typeface="Consolas" pitchFamily="34" charset="-120"/>
+              </a:rPr>
+              <a:t>/team-weekly-report 첫째 주 기록으로 보고서를 만들어 줘.      # Claude Code</a:t>
+            </a:r>
+            <a:endParaRPr lang="en-US" sz="1100" dirty="0"/>
+          </a:p>
+          <a:p>
+            <a:pPr algn="l" indent="0" marL="0">
+              <a:lnSpc>
+                <a:spcPct val="102000"/>
+              </a:lnSpc>
+              <a:buNone/>
+            </a:pPr>
+            <a:endParaRPr lang="en-US" sz="1100" dirty="0"/>
+          </a:p>
+          <a:p>
+            <a:pPr algn="l" indent="0" marL="0">
+              <a:lnSpc>
+                <a:spcPct val="102000"/>
+              </a:lnSpc>
+              <a:buNone/>
+            </a:pPr>
+            <a:r>
+              <a:rPr lang="en-US" sz="1100" dirty="0">
+                <a:solidFill>
+                  <a:srgbClr val="2A2723"/>
+                </a:solidFill>
+                <a:latin typeface="Consolas" pitchFamily="34" charset="0"/>
+                <a:ea typeface="Consolas" pitchFamily="34" charset="-122"/>
+                <a:cs typeface="Consolas" pitchFamily="34" charset="-120"/>
+              </a:rPr>
+              <a:t>team-weekly-report 스킬을 사용해 첫째 주 보고서를 만들어 줘.   # OpenCode</a:t>
+            </a:r>
+            <a:endParaRPr lang="en-US" sz="1100" dirty="0"/>
+          </a:p>
+        </p:txBody>
+      </p:sp>
+      <p:sp>
+        <p:nvSpPr>
+          <p:cNvPr id="7" name="Text 5"/>
+          <p:cNvSpPr/>
+          <p:nvPr/>
+        </p:nvSpPr>
+        <p:spPr>
+          <a:xfrm>
+            <a:off x="548640" y="2409444"/>
+            <a:ext cx="11091672" cy="1609725"/>
+          </a:xfrm>
+          <a:prstGeom prst="rect">
+            <a:avLst/>
+          </a:prstGeom>
+          <a:noFill/>
+          <a:ln/>
+        </p:spPr>
+        <p:txBody>
+          <a:bodyPr wrap="square" rtlCol="0" anchor="t">
+            <a:normAutofit/>
+          </a:bodyPr>
+          <a:lstStyle/>
+          <a:p>
+            <a:pPr indent="0" marL="0">
+              <a:lnSpc>
+                <a:spcPct val="105000"/>
+              </a:lnSpc>
+              <a:buNone/>
+            </a:pPr>
+            <a:r>
+              <a:rPr lang="en-US" sz="1450" b="1" dirty="0">
+                <a:solidFill>
+                  <a:srgbClr val="3F6B5F"/>
+                </a:solidFill>
+                <a:latin typeface="Malgun Gothic" pitchFamily="34" charset="0"/>
+                <a:ea typeface="Malgun Gothic" pitchFamily="34" charset="-122"/>
+                <a:cs typeface="Malgun Gothic" pitchFamily="34" charset="-120"/>
+              </a:rPr>
+              <a:t>›  </a:t>
+            </a:r>
+            <a:pPr indent="0" marL="0">
+              <a:lnSpc>
+                <a:spcPct val="105000"/>
+              </a:lnSpc>
+              <a:buNone/>
+            </a:pPr>
+            <a:r>
+              <a:rPr lang="en-US" sz="1450" dirty="0">
+                <a:solidFill>
+                  <a:srgbClr val="6B6357"/>
+                </a:solidFill>
+                <a:latin typeface="Malgun Gothic" pitchFamily="34" charset="0"/>
+                <a:ea typeface="Malgun Gothic" pitchFamily="34" charset="-122"/>
+                <a:cs typeface="Malgun Gothic" pitchFamily="34" charset="-120"/>
+              </a:rPr>
+              <a:t>OpenCode는 </a:t>
+            </a:r>
+            <a:pPr indent="0" marL="0">
+              <a:lnSpc>
+                <a:spcPct val="105000"/>
+              </a:lnSpc>
+              <a:buNone/>
+            </a:pPr>
+            <a:r>
+              <a:rPr lang="en-US" sz="1450" b="1" dirty="0">
+                <a:solidFill>
+                  <a:srgbClr val="2A2723"/>
+                </a:solidFill>
+                <a:latin typeface="Malgun Gothic" pitchFamily="34" charset="0"/>
+                <a:ea typeface="Malgun Gothic" pitchFamily="34" charset="-122"/>
+                <a:cs typeface="Malgun Gothic" pitchFamily="34" charset="-120"/>
+              </a:rPr>
+              <a:t>내부 skill 도구</a:t>
+            </a:r>
+            <a:pPr indent="0" marL="0">
+              <a:lnSpc>
+                <a:spcPct val="105000"/>
+              </a:lnSpc>
+              <a:buNone/>
+            </a:pPr>
+            <a:r>
+              <a:rPr lang="en-US" sz="1450" dirty="0">
+                <a:solidFill>
+                  <a:srgbClr val="6B6357"/>
+                </a:solidFill>
+                <a:latin typeface="Malgun Gothic" pitchFamily="34" charset="0"/>
+                <a:ea typeface="Malgun Gothic" pitchFamily="34" charset="-122"/>
+                <a:cs typeface="Malgun Gothic" pitchFamily="34" charset="-120"/>
+              </a:rPr>
+              <a:t>로 Skill 내용을 불러옵니다 — </a:t>
+            </a:r>
+            <a:pPr indent="0" marL="0">
+              <a:lnSpc>
+                <a:spcPct val="105000"/>
+              </a:lnSpc>
+              <a:buNone/>
+            </a:pPr>
+            <a:r>
+              <a:rPr lang="en-US" sz="1450" b="1" dirty="0">
+                <a:solidFill>
+                  <a:srgbClr val="A65A3F"/>
+                </a:solidFill>
+                <a:latin typeface="Malgun Gothic" pitchFamily="34" charset="0"/>
+                <a:ea typeface="Malgun Gothic" pitchFamily="34" charset="-122"/>
+                <a:cs typeface="Malgun Gothic" pitchFamily="34" charset="-120"/>
+              </a:rPr>
+              <a:t>사용자가 그 내부 호출 코드를 직접 입력할 필요는 없고</a:t>
+            </a:r>
+            <a:pPr indent="0" marL="0">
+              <a:lnSpc>
+                <a:spcPct val="105000"/>
+              </a:lnSpc>
+              <a:buNone/>
+            </a:pPr>
+            <a:r>
+              <a:rPr lang="en-US" sz="1450" dirty="0">
+                <a:solidFill>
+                  <a:srgbClr val="6B6357"/>
+                </a:solidFill>
+                <a:latin typeface="Malgun Gothic" pitchFamily="34" charset="0"/>
+                <a:ea typeface="Malgun Gothic" pitchFamily="34" charset="-122"/>
+                <a:cs typeface="Malgun Gothic" pitchFamily="34" charset="-120"/>
+              </a:rPr>
+              <a:t>, </a:t>
+            </a:r>
+            <a:pPr indent="0" marL="0">
+              <a:lnSpc>
+                <a:spcPct val="105000"/>
+              </a:lnSpc>
+              <a:spcAft>
+                <a:spcPts val="700"/>
+              </a:spcAft>
+              <a:buNone/>
+            </a:pPr>
+            <a:r>
+              <a:rPr lang="en-US" sz="1450" b="1" dirty="0">
+                <a:solidFill>
+                  <a:srgbClr val="A65A3F"/>
+                </a:solidFill>
+                <a:latin typeface="Malgun Gothic" pitchFamily="34" charset="0"/>
+                <a:ea typeface="Malgun Gothic" pitchFamily="34" charset="-122"/>
+                <a:cs typeface="Malgun Gothic" pitchFamily="34" charset="-120"/>
+              </a:rPr>
+              <a:t>Claude Code의 슬래시 문법을 OpenCode에서 똑같이 써야 하는 것으로 이해하지 마세요</a:t>
+            </a:r>
+            <a:endParaRPr lang="en-US" sz="1450" dirty="0"/>
+          </a:p>
+          <a:p>
+            <a:pPr indent="0" marL="0">
+              <a:lnSpc>
+                <a:spcPct val="105000"/>
+              </a:lnSpc>
+              <a:buNone/>
+            </a:pPr>
+            <a:r>
+              <a:rPr lang="en-US" sz="1450" b="1" dirty="0">
+                <a:solidFill>
+                  <a:srgbClr val="3F6B5F"/>
+                </a:solidFill>
+                <a:latin typeface="Malgun Gothic" pitchFamily="34" charset="0"/>
+                <a:ea typeface="Malgun Gothic" pitchFamily="34" charset="-122"/>
+                <a:cs typeface="Malgun Gothic" pitchFamily="34" charset="-120"/>
+              </a:rPr>
+              <a:t>›  </a:t>
+            </a:r>
+            <a:pPr indent="0" marL="0">
+              <a:lnSpc>
+                <a:spcPct val="105000"/>
+              </a:lnSpc>
+              <a:buNone/>
+            </a:pPr>
+            <a:r>
+              <a:rPr lang="en-US" sz="1450" dirty="0">
+                <a:solidFill>
+                  <a:srgbClr val="6B6357"/>
+                </a:solidFill>
+                <a:latin typeface="Malgun Gothic" pitchFamily="34" charset="0"/>
+                <a:ea typeface="Malgun Gothic" pitchFamily="34" charset="-122"/>
+                <a:cs typeface="Malgun Gothic" pitchFamily="34" charset="-120"/>
+              </a:rPr>
+              <a:t>AI의 '스킬을 사용했습니다'라는 말과 함께 </a:t>
+            </a:r>
+            <a:pPr indent="0" marL="0">
+              <a:lnSpc>
+                <a:spcPct val="105000"/>
+              </a:lnSpc>
+              <a:buNone/>
+            </a:pPr>
+            <a:r>
+              <a:rPr lang="en-US" sz="1450" b="1" dirty="0">
+                <a:solidFill>
+                  <a:srgbClr val="3F6B5F"/>
+                </a:solidFill>
+                <a:latin typeface="Malgun Gothic" pitchFamily="34" charset="0"/>
+                <a:ea typeface="Malgun Gothic" pitchFamily="34" charset="-122"/>
+                <a:cs typeface="Malgun Gothic" pitchFamily="34" charset="-120"/>
+              </a:rPr>
+              <a:t>실제 파일 읽기 또는 Skill 로드 기록</a:t>
+            </a:r>
+            <a:pPr indent="0" marL="0">
+              <a:lnSpc>
+                <a:spcPct val="105000"/>
+              </a:lnSpc>
+              <a:buNone/>
+            </a:pPr>
+            <a:r>
+              <a:rPr lang="en-US" sz="1450" dirty="0">
+                <a:solidFill>
+                  <a:srgbClr val="6B6357"/>
+                </a:solidFill>
+                <a:latin typeface="Malgun Gothic" pitchFamily="34" charset="0"/>
+                <a:ea typeface="Malgun Gothic" pitchFamily="34" charset="-122"/>
+                <a:cs typeface="Malgun Gothic" pitchFamily="34" charset="-120"/>
+              </a:rPr>
+              <a:t>을 살펴보세요 — team-weekly-report를 불러왔는지, 그 뒤 </a:t>
+            </a:r>
+            <a:pPr indent="0" marL="0">
+              <a:lnSpc>
+                <a:spcPct val="105000"/>
+              </a:lnSpc>
+              <a:spcAft>
+                <a:spcPts val="700"/>
+              </a:spcAft>
+              <a:buNone/>
+            </a:pPr>
+            <a:r>
+              <a:rPr lang="en-US" sz="1450" b="1" dirty="0">
+                <a:solidFill>
+                  <a:srgbClr val="2A2723"/>
+                </a:solidFill>
+                <a:latin typeface="Malgun Gothic" pitchFamily="34" charset="0"/>
+                <a:ea typeface="Malgun Gothic" pitchFamily="34" charset="-122"/>
+                <a:cs typeface="Malgun Gothic" pitchFamily="34" charset="-120"/>
+              </a:rPr>
+              <a:t>references/team-rules.md를 읽었는지</a:t>
+            </a:r>
+            <a:endParaRPr lang="en-US" sz="1450" dirty="0"/>
+          </a:p>
+          <a:p>
+            <a:pPr indent="0" marL="0">
+              <a:lnSpc>
+                <a:spcPct val="105000"/>
+              </a:lnSpc>
+              <a:buNone/>
+            </a:pPr>
+            <a:r>
+              <a:rPr lang="en-US" sz="1450" b="1" dirty="0">
+                <a:solidFill>
+                  <a:srgbClr val="3F6B5F"/>
+                </a:solidFill>
+                <a:latin typeface="Malgun Gothic" pitchFamily="34" charset="0"/>
+                <a:ea typeface="Malgun Gothic" pitchFamily="34" charset="-122"/>
+                <a:cs typeface="Malgun Gothic" pitchFamily="34" charset="-120"/>
+              </a:rPr>
+              <a:t>›  </a:t>
+            </a:r>
+            <a:pPr indent="0" marL="0">
+              <a:lnSpc>
+                <a:spcPct val="105000"/>
+              </a:lnSpc>
+              <a:buNone/>
+            </a:pPr>
+            <a:r>
+              <a:rPr lang="en-US" sz="1450" dirty="0">
+                <a:solidFill>
+                  <a:srgbClr val="6B6357"/>
+                </a:solidFill>
+                <a:latin typeface="Malgun Gothic" pitchFamily="34" charset="0"/>
+                <a:ea typeface="Malgun Gothic" pitchFamily="34" charset="-122"/>
+                <a:cs typeface="Malgun Gothic" pitchFamily="34" charset="-120"/>
+              </a:rPr>
+              <a:t>맞춰 볼 것 — </a:t>
+            </a:r>
+            <a:pPr indent="0" marL="0">
+              <a:lnSpc>
+                <a:spcPct val="105000"/>
+              </a:lnSpc>
+              <a:spcAft>
+                <a:spcPts val="700"/>
+              </a:spcAft>
+              <a:buNone/>
+            </a:pPr>
+            <a:r>
+              <a:rPr lang="en-US" sz="1450" b="1" dirty="0">
+                <a:solidFill>
+                  <a:srgbClr val="2A2723"/>
+                </a:solidFill>
+                <a:latin typeface="Malgun Gothic" pitchFamily="34" charset="0"/>
+                <a:ea typeface="Malgun Gothic" pitchFamily="34" charset="-122"/>
+                <a:cs typeface="Malgun Gothic" pitchFamily="34" charset="-120"/>
+              </a:rPr>
+              <a:t>첫째 주 업무가 네 건인지, 보고 기준일이 2026-09-04인지, 업무 ID별 근거가 붙었는지</a:t>
+            </a:r>
+            <a:endParaRPr lang="en-US" sz="1450" dirty="0"/>
+          </a:p>
+        </p:txBody>
+      </p:sp>
+      <p:sp>
+        <p:nvSpPr>
+          <p:cNvPr id="8" name="Shape 6"/>
+          <p:cNvSpPr/>
+          <p:nvPr/>
+        </p:nvSpPr>
+        <p:spPr>
+          <a:xfrm>
+            <a:off x="548640" y="4165473"/>
+            <a:ext cx="11091672" cy="1017270"/>
+          </a:xfrm>
+          <a:prstGeom prst="roundRect">
+            <a:avLst>
+              <a:gd name="adj" fmla="val 5393"/>
+            </a:avLst>
+          </a:prstGeom>
+          <a:solidFill>
+            <a:srgbClr val="F2EDE4"/>
+          </a:solidFill>
+          <a:ln/>
+        </p:spPr>
+      </p:sp>
+      <p:sp>
+        <p:nvSpPr>
+          <p:cNvPr id="9" name="Shape 7"/>
+          <p:cNvSpPr/>
+          <p:nvPr/>
+        </p:nvSpPr>
+        <p:spPr>
+          <a:xfrm>
+            <a:off x="548640" y="4165473"/>
+            <a:ext cx="54864" cy="1017270"/>
+          </a:xfrm>
+          <a:prstGeom prst="rect">
+            <a:avLst/>
+          </a:prstGeom>
+          <a:solidFill>
+            <a:srgbClr val="C8A15A"/>
+          </a:solidFill>
+          <a:ln/>
+        </p:spPr>
+      </p:sp>
+      <p:sp>
+        <p:nvSpPr>
+          <p:cNvPr id="10" name="Text 8"/>
+          <p:cNvSpPr/>
+          <p:nvPr/>
+        </p:nvSpPr>
+        <p:spPr>
+          <a:xfrm>
+            <a:off x="786384" y="4165473"/>
+            <a:ext cx="10707624" cy="1017270"/>
+          </a:xfrm>
+          <a:prstGeom prst="rect">
+            <a:avLst/>
+          </a:prstGeom>
+          <a:noFill/>
+          <a:ln/>
+        </p:spPr>
+        <p:txBody>
+          <a:bodyPr wrap="square" rtlCol="0" anchor="ctr">
+            <a:normAutofit/>
+          </a:bodyPr>
+          <a:lstStyle/>
+          <a:p>
+            <a:pPr indent="0" marL="0">
+              <a:lnSpc>
+                <a:spcPct val="104000"/>
+              </a:lnSpc>
+              <a:buNone/>
+            </a:pPr>
+            <a:r>
+              <a:rPr lang="en-US" sz="1300" dirty="0">
+                <a:solidFill>
+                  <a:srgbClr val="6B6357"/>
+                </a:solidFill>
+                <a:latin typeface="Malgun Gothic" pitchFamily="34" charset="0"/>
+                <a:ea typeface="Malgun Gothic" pitchFamily="34" charset="-122"/>
+                <a:cs typeface="Malgun Gothic" pitchFamily="34" charset="-120"/>
+              </a:rPr>
+              <a:t>🔧 Skill을 찾지 못했다면 — </a:t>
+            </a:r>
+            <a:pPr indent="0" marL="0">
+              <a:lnSpc>
+                <a:spcPct val="104000"/>
+              </a:lnSpc>
+              <a:buNone/>
+            </a:pPr>
+            <a:r>
+              <a:rPr lang="en-US" sz="1300" b="1" dirty="0">
+                <a:solidFill>
+                  <a:srgbClr val="3F6B5F"/>
+                </a:solidFill>
+                <a:latin typeface="Malgun Gothic" pitchFamily="34" charset="0"/>
+                <a:ea typeface="Malgun Gothic" pitchFamily="34" charset="-122"/>
+                <a:cs typeface="Malgun Gothic" pitchFamily="34" charset="-120"/>
+              </a:rPr>
+              <a:t>현재 열어 놓은 프로젝트 위치와 최종 파일 경로</a:t>
+            </a:r>
+            <a:pPr indent="0" marL="0">
+              <a:lnSpc>
+                <a:spcPct val="104000"/>
+              </a:lnSpc>
+              <a:buNone/>
+            </a:pPr>
+            <a:r>
+              <a:rPr lang="en-US" sz="1300" dirty="0">
+                <a:solidFill>
+                  <a:srgbClr val="6B6357"/>
+                </a:solidFill>
+                <a:latin typeface="Malgun Gothic" pitchFamily="34" charset="0"/>
+                <a:ea typeface="Malgun Gothic" pitchFamily="34" charset="-122"/>
+                <a:cs typeface="Malgun Gothic" pitchFamily="34" charset="-120"/>
+              </a:rPr>
+              <a:t> → </a:t>
+            </a:r>
+            <a:pPr indent="0" marL="0">
+              <a:lnSpc>
+                <a:spcPct val="104000"/>
+              </a:lnSpc>
+              <a:buNone/>
+            </a:pPr>
+            <a:r>
+              <a:rPr lang="en-US" sz="1300" b="1" dirty="0">
+                <a:solidFill>
+                  <a:srgbClr val="2A2723"/>
+                </a:solidFill>
+                <a:latin typeface="Malgun Gothic" pitchFamily="34" charset="0"/>
+                <a:ea typeface="Malgun Gothic" pitchFamily="34" charset="-122"/>
+                <a:cs typeface="Malgun Gothic" pitchFamily="34" charset="-120"/>
+              </a:rPr>
+              <a:t>파일 이름이 정확히 SKILL.md인지, 앞부분의 이름과 설명이 있는지</a:t>
+            </a:r>
+            <a:pPr indent="0" marL="0">
+              <a:lnSpc>
+                <a:spcPct val="104000"/>
+              </a:lnSpc>
+              <a:buNone/>
+            </a:pPr>
+            <a:r>
+              <a:rPr lang="en-US" sz="1300" dirty="0">
+                <a:solidFill>
+                  <a:srgbClr val="6B6357"/>
+                </a:solidFill>
+                <a:latin typeface="Malgun Gothic" pitchFamily="34" charset="0"/>
+                <a:ea typeface="Malgun Gothic" pitchFamily="34" charset="-122"/>
+                <a:cs typeface="Malgun Gothic" pitchFamily="34" charset="-120"/>
+              </a:rPr>
+              <a:t> → OpenCode는 </a:t>
+            </a:r>
+            <a:pPr indent="0" marL="0">
+              <a:lnSpc>
+                <a:spcPct val="104000"/>
+              </a:lnSpc>
+              <a:buNone/>
+            </a:pPr>
+            <a:r>
+              <a:rPr lang="en-US" sz="1300" b="1" dirty="0">
+                <a:solidFill>
+                  <a:srgbClr val="2A2723"/>
+                </a:solidFill>
+                <a:latin typeface="Malgun Gothic" pitchFamily="34" charset="0"/>
+                <a:ea typeface="Malgun Gothic" pitchFamily="34" charset="-122"/>
+                <a:cs typeface="Malgun Gothic" pitchFamily="34" charset="-120"/>
+              </a:rPr>
+              <a:t>Skill 접근 권한이나 skill 도구가 꺼져 있는지</a:t>
+            </a:r>
+            <a:pPr indent="0" marL="0">
+              <a:lnSpc>
+                <a:spcPct val="104000"/>
+              </a:lnSpc>
+              <a:buNone/>
+            </a:pPr>
+            <a:r>
+              <a:rPr lang="en-US" sz="1300" dirty="0">
+                <a:solidFill>
+                  <a:srgbClr val="6B6357"/>
+                </a:solidFill>
+                <a:latin typeface="Malgun Gothic" pitchFamily="34" charset="0"/>
+                <a:ea typeface="Malgun Gothic" pitchFamily="34" charset="-122"/>
+                <a:cs typeface="Malgun Gothic" pitchFamily="34" charset="-120"/>
+              </a:rPr>
+              <a:t>. Claude Code는 감시 중인 디렉터리 변경을 반영하지만 </a:t>
+            </a:r>
+            <a:pPr indent="0" marL="0">
+              <a:lnSpc>
+                <a:spcPct val="104000"/>
+              </a:lnSpc>
+              <a:buNone/>
+            </a:pPr>
+            <a:r>
+              <a:rPr lang="en-US" sz="1300" b="1" dirty="0">
+                <a:solidFill>
+                  <a:srgbClr val="A65A3F"/>
+                </a:solidFill>
+                <a:latin typeface="Malgun Gothic" pitchFamily="34" charset="0"/>
+                <a:ea typeface="Malgun Gothic" pitchFamily="34" charset="-122"/>
+                <a:cs typeface="Malgun Gothic" pitchFamily="34" charset="-120"/>
+              </a:rPr>
+              <a:t>세션 시작 때 없던 최상위 Skills 디렉터리를 처음 만든 경우에는 재시작이 필요</a:t>
+            </a:r>
+            <a:endParaRPr lang="en-US" sz="1300" dirty="0"/>
+          </a:p>
+        </p:txBody>
+      </p:sp>
+    </p:spTree>
+  </p:cSld>
+  <p:clrMapOvr>
+    <a:masterClrMapping/>
+  </p:clrMapOvr>
+</p:sld>
+</file>
+
+<file path=ppt/slides/slide17.xml><?xml version="1.0" encoding="utf-8"?>
+<p:sld xmlns:a="http://schemas.openxmlformats.org/drawingml/2006/main" xmlns:r="http://schemas.openxmlformats.org/officeDocument/2006/relationships" xmlns:p="http://schemas.openxmlformats.org/presentationml/2006/main">
+  <p:cSld name="Slide 17">
+    <p:bg>
+      <p:bgPr>
+        <a:solidFill>
+          <a:srgbClr val="FAF8F4"/>
+        </a:solidFill>
+      </p:bgPr>
+    </p:bg>
+    <p:spTree>
+      <p:nvGrpSpPr>
+        <p:cNvPr id="1" name=""/>
+        <p:cNvGrpSpPr/>
+        <p:nvPr/>
+      </p:nvGrpSpPr>
+      <p:grpSpPr>
+        <a:xfrm>
+          <a:off x="0" y="0"/>
+          <a:ext cx="0" cy="0"/>
+          <a:chOff x="0" y="0"/>
+          <a:chExt cx="0" cy="0"/>
+        </a:xfrm>
+      </p:grpSpPr>
+      <p:sp>
+        <p:nvSpPr>
+          <p:cNvPr id="2" name="Text 0"/>
+          <p:cNvSpPr/>
+          <p:nvPr/>
+        </p:nvSpPr>
+        <p:spPr>
+          <a:xfrm>
+            <a:off x="548640" y="384048"/>
+            <a:ext cx="11091672" cy="731520"/>
+          </a:xfrm>
+          <a:prstGeom prst="rect">
+            <a:avLst/>
+          </a:prstGeom>
+          <a:noFill/>
+          <a:ln/>
+        </p:spPr>
+        <p:txBody>
+          <a:bodyPr wrap="square" rtlCol="0" anchor="ctr">
+            <a:normAutofit/>
+          </a:bodyPr>
+          <a:lstStyle/>
+          <a:p>
+            <a:pPr indent="0" marL="0">
+              <a:buNone/>
+            </a:pPr>
+            <a:r>
+              <a:rPr lang="en-US" sz="2400" b="1" dirty="0">
+                <a:solidFill>
+                  <a:srgbClr val="2A2723"/>
+                </a:solidFill>
+                <a:latin typeface="Malgun Gothic" pitchFamily="34" charset="0"/>
+                <a:ea typeface="Malgun Gothic" pitchFamily="34" charset="-122"/>
+                <a:cs typeface="Malgun Gothic" pitchFamily="34" charset="-120"/>
+              </a:rPr>
               <a:t>❓ 이해도 확인</a:t>
             </a:r>
             <a:endParaRPr lang="en-US" sz="2400" dirty="0"/>
@@ -7531,9 +8388,9 @@
 </p:sld>
 </file>
 
-<file path=ppt/slides/slide17.xml><?xml version="1.0" encoding="utf-8"?>
+<file path=ppt/slides/slide18.xml><?xml version="1.0" encoding="utf-8"?>
 <p:sld xmlns:a="http://schemas.openxmlformats.org/drawingml/2006/main" xmlns:r="http://schemas.openxmlformats.org/officeDocument/2006/relationships" xmlns:p="http://schemas.openxmlformats.org/presentationml/2006/main">
-  <p:cSld name="Slide 17">
+  <p:cSld name="Slide 18">
     <p:bg>
       <p:bgPr>
         <a:solidFill>
@@ -10803,7 +11660,7 @@
                 <a:ea typeface="Malgun Gothic" pitchFamily="34" charset="-122"/>
                 <a:cs typeface="Malgun Gothic" pitchFamily="34" charset="-120"/>
               </a:rPr>
-              <a:t>SKILL.md </a:t>
+              <a:t>SKILL.md 본문 </a:t>
             </a:r>
             <a:pPr indent="0" marL="0">
               <a:buNone/>
@@ -10817,7 +11674,21 @@
                 <a:ea typeface="Malgun Gothic" pitchFamily="34" charset="-122"/>
                 <a:cs typeface="Malgun Gothic" pitchFamily="34" charset="-120"/>
               </a:rPr>
-              <a:t>본문</a:t>
+              <a:t>①</a:t>
+            </a:r>
+            <a:pPr indent="0" marL="0">
+              <a:buNone/>
+            </a:pPr>
+            <a:r>
+              <a:rPr lang="en-US" sz="2400" b="1" dirty="0">
+                <a:solidFill>
+                  <a:srgbClr val="2A2723"/>
+                </a:solidFill>
+                <a:latin typeface="Malgun Gothic" pitchFamily="34" charset="0"/>
+                <a:ea typeface="Malgun Gothic" pitchFamily="34" charset="-122"/>
+                <a:cs typeface="Malgun Gothic" pitchFamily="34" charset="-120"/>
+              </a:rPr>
+              <a:t> — 앞부분과 범위</a:t>
             </a:r>
             <a:endParaRPr lang="en-US" sz="2400" dirty="0"/>
           </a:p>
@@ -10852,11 +11723,11 @@
         <p:spPr>
           <a:xfrm>
             <a:off x="548640" y="1371600"/>
-            <a:ext cx="11091672" cy="5138928"/>
+            <a:ext cx="11091672" cy="3579876"/>
           </a:xfrm>
           <a:prstGeom prst="roundRect">
             <a:avLst>
-              <a:gd name="adj" fmla="val 890"/>
+              <a:gd name="adj" fmla="val 1277"/>
             </a:avLst>
           </a:prstGeom>
           <a:solidFill>
@@ -10879,7 +11750,7 @@
         <p:spPr>
           <a:xfrm>
             <a:off x="548640" y="1371600"/>
-            <a:ext cx="54864" cy="5138928"/>
+            <a:ext cx="54864" cy="3579876"/>
           </a:xfrm>
           <a:prstGeom prst="rect">
             <a:avLst/>
@@ -10899,7 +11770,7 @@
         <p:spPr>
           <a:xfrm>
             <a:off x="768096" y="1463040"/>
-            <a:ext cx="10707624" cy="4956048"/>
+            <a:ext cx="10707624" cy="3396996"/>
           </a:xfrm>
           <a:prstGeom prst="rect">
             <a:avLst/>
@@ -11176,233 +12047,6 @@
                 <a:cs typeface="Consolas" pitchFamily="34" charset="-120"/>
               </a:rPr>
               <a:t>프로젝트 관리 기준으로 바꾸지 않는다.</a:t>
-            </a:r>
-            <a:endParaRPr lang="en-US" sz="1100" dirty="0"/>
-          </a:p>
-          <a:p>
-            <a:pPr algn="l" indent="0" marL="0">
-              <a:lnSpc>
-                <a:spcPct val="102000"/>
-              </a:lnSpc>
-              <a:buNone/>
-            </a:pPr>
-            <a:endParaRPr lang="en-US" sz="1100" dirty="0"/>
-          </a:p>
-          <a:p>
-            <a:pPr algn="l" indent="0" marL="0">
-              <a:lnSpc>
-                <a:spcPct val="102000"/>
-              </a:lnSpc>
-              <a:buNone/>
-            </a:pPr>
-            <a:r>
-              <a:rPr lang="en-US" sz="1100" dirty="0">
-                <a:solidFill>
-                  <a:srgbClr val="2A2723"/>
-                </a:solidFill>
-                <a:latin typeface="Consolas" pitchFamily="34" charset="0"/>
-                <a:ea typeface="Consolas" pitchFamily="34" charset="-122"/>
-                <a:cs typeface="Consolas" pitchFamily="34" charset="-120"/>
-              </a:rPr>
-              <a:t>사용자가 준 JSON이나 파일이 있으면 그것을 사용한다. 연결된</a:t>
-            </a:r>
-            <a:endParaRPr lang="en-US" sz="1100" dirty="0"/>
-          </a:p>
-          <a:p>
-            <a:pPr algn="l" indent="0" marL="0">
-              <a:lnSpc>
-                <a:spcPct val="102000"/>
-              </a:lnSpc>
-              <a:buNone/>
-            </a:pPr>
-            <a:r>
-              <a:rPr lang="en-US" sz="1100" dirty="0">
-                <a:solidFill>
-                  <a:srgbClr val="2A2723"/>
-                </a:solidFill>
-                <a:latin typeface="Consolas" pitchFamily="34" charset="0"/>
-                <a:ea typeface="Consolas" pitchFamily="34" charset="-122"/>
-                <a:cs typeface="Consolas" pitchFamily="34" charset="-120"/>
-              </a:rPr>
-              <a:t>get_weekly_records로 조회해도 된다. MCP 연결은 필수가 아니며, 보고서를</a:t>
-            </a:r>
-            <a:endParaRPr lang="en-US" sz="1100" dirty="0"/>
-          </a:p>
-          <a:p>
-            <a:pPr algn="l" indent="0" marL="0">
-              <a:lnSpc>
-                <a:spcPct val="102000"/>
-              </a:lnSpc>
-              <a:buNone/>
-            </a:pPr>
-            <a:r>
-              <a:rPr lang="en-US" sz="1100" dirty="0">
-                <a:solidFill>
-                  <a:srgbClr val="2A2723"/>
-                </a:solidFill>
-                <a:latin typeface="Consolas" pitchFamily="34" charset="0"/>
-                <a:ea typeface="Consolas" pitchFamily="34" charset="-122"/>
-                <a:cs typeface="Consolas" pitchFamily="34" charset="-120"/>
-              </a:rPr>
-              <a:t>쓰기 위해 새 서버 설치나 계정 인증을 시작할 필요는 없다. 대상 주차를</a:t>
-            </a:r>
-            <a:endParaRPr lang="en-US" sz="1100" dirty="0"/>
-          </a:p>
-          <a:p>
-            <a:pPr algn="l" indent="0" marL="0">
-              <a:lnSpc>
-                <a:spcPct val="102000"/>
-              </a:lnSpc>
-              <a:buNone/>
-            </a:pPr>
-            <a:r>
-              <a:rPr lang="en-US" sz="1100" dirty="0">
-                <a:solidFill>
-                  <a:srgbClr val="2A2723"/>
-                </a:solidFill>
-                <a:latin typeface="Consolas" pitchFamily="34" charset="0"/>
-                <a:ea typeface="Consolas" pitchFamily="34" charset="-122"/>
-                <a:cs typeface="Consolas" pitchFamily="34" charset="-120"/>
-              </a:rPr>
-              <a:t>알 수 없으면 주차를 확인한다.</a:t>
-            </a:r>
-            <a:endParaRPr lang="en-US" sz="1100" dirty="0"/>
-          </a:p>
-          <a:p>
-            <a:pPr algn="l" indent="0" marL="0">
-              <a:lnSpc>
-                <a:spcPct val="102000"/>
-              </a:lnSpc>
-              <a:buNone/>
-            </a:pPr>
-            <a:endParaRPr lang="en-US" sz="1100" dirty="0"/>
-          </a:p>
-          <a:p>
-            <a:pPr algn="l" indent="0" marL="0">
-              <a:lnSpc>
-                <a:spcPct val="102000"/>
-              </a:lnSpc>
-              <a:buNone/>
-            </a:pPr>
-            <a:r>
-              <a:rPr lang="en-US" sz="1100" dirty="0">
-                <a:solidFill>
-                  <a:srgbClr val="2A2723"/>
-                </a:solidFill>
-                <a:latin typeface="Consolas" pitchFamily="34" charset="0"/>
-                <a:ea typeface="Consolas" pitchFamily="34" charset="-122"/>
-                <a:cs typeface="Consolas" pitchFamily="34" charset="-120"/>
-              </a:rPr>
-              <a:t>입력의 report_date를 기준으로 각 기록을 한 번씩 분류한다. 보고서에는 업무</a:t>
-            </a:r>
-            <a:endParaRPr lang="en-US" sz="1100" dirty="0"/>
-          </a:p>
-          <a:p>
-            <a:pPr algn="l" indent="0" marL="0">
-              <a:lnSpc>
-                <a:spcPct val="102000"/>
-              </a:lnSpc>
-              <a:buNone/>
-            </a:pPr>
-            <a:r>
-              <a:rPr lang="en-US" sz="1100" dirty="0">
-                <a:solidFill>
-                  <a:srgbClr val="2A2723"/>
-                </a:solidFill>
-                <a:latin typeface="Consolas" pitchFamily="34" charset="0"/>
-                <a:ea typeface="Consolas" pitchFamily="34" charset="-122"/>
-                <a:cs typeface="Consolas" pitchFamily="34" charset="-120"/>
-              </a:rPr>
-              <a:t>ID와 판정의 근거가 된 필드를 남긴다. 팀 규칙으로 판정할 수 없거나 기록이</a:t>
-            </a:r>
-            <a:endParaRPr lang="en-US" sz="1100" dirty="0"/>
-          </a:p>
-          <a:p>
-            <a:pPr algn="l" indent="0" marL="0">
-              <a:lnSpc>
-                <a:spcPct val="102000"/>
-              </a:lnSpc>
-              <a:buNone/>
-            </a:pPr>
-            <a:r>
-              <a:rPr lang="en-US" sz="1100" dirty="0">
-                <a:solidFill>
-                  <a:srgbClr val="2A2723"/>
-                </a:solidFill>
-                <a:latin typeface="Consolas" pitchFamily="34" charset="0"/>
-                <a:ea typeface="Consolas" pitchFamily="34" charset="-122"/>
-                <a:cs typeface="Consolas" pitchFamily="34" charset="-120"/>
-              </a:rPr>
-              <a:t>충돌하면 위험 항목으로 분리하고 확인이 필요한 사실을 적는다.</a:t>
-            </a:r>
-            <a:endParaRPr lang="en-US" sz="1100" dirty="0"/>
-          </a:p>
-          <a:p>
-            <a:pPr algn="l" indent="0" marL="0">
-              <a:lnSpc>
-                <a:spcPct val="102000"/>
-              </a:lnSpc>
-              <a:buNone/>
-            </a:pPr>
-            <a:endParaRPr lang="en-US" sz="1100" dirty="0"/>
-          </a:p>
-          <a:p>
-            <a:pPr algn="l" indent="0" marL="0">
-              <a:lnSpc>
-                <a:spcPct val="102000"/>
-              </a:lnSpc>
-              <a:buNone/>
-            </a:pPr>
-            <a:r>
-              <a:rPr lang="en-US" sz="1100" dirty="0">
-                <a:solidFill>
-                  <a:srgbClr val="2A2723"/>
-                </a:solidFill>
-                <a:latin typeface="Consolas" pitchFamily="34" charset="0"/>
-                <a:ea typeface="Consolas" pitchFamily="34" charset="-122"/>
-                <a:cs typeface="Consolas" pitchFamily="34" charset="-120"/>
-              </a:rPr>
-              <a:t>보고서를 파일로 요청받으면 Markdown으로 저장한다. 이 Skill은 기록 자체를</a:t>
-            </a:r>
-            <a:endParaRPr lang="en-US" sz="1100" dirty="0"/>
-          </a:p>
-          <a:p>
-            <a:pPr algn="l" indent="0" marL="0">
-              <a:lnSpc>
-                <a:spcPct val="102000"/>
-              </a:lnSpc>
-              <a:buNone/>
-            </a:pPr>
-            <a:r>
-              <a:rPr lang="en-US" sz="1100" dirty="0">
-                <a:solidFill>
-                  <a:srgbClr val="2A2723"/>
-                </a:solidFill>
-                <a:latin typeface="Consolas" pitchFamily="34" charset="0"/>
-                <a:ea typeface="Consolas" pitchFamily="34" charset="-122"/>
-                <a:cs typeface="Consolas" pitchFamily="34" charset="-120"/>
-              </a:rPr>
-              <a:t>고치거나 메시지를 발송하지 않는다. 사용자가 규칙 변경을 요청하면 해당</a:t>
-            </a:r>
-            <a:endParaRPr lang="en-US" sz="1100" dirty="0"/>
-          </a:p>
-          <a:p>
-            <a:pPr algn="l" indent="0" marL="0">
-              <a:lnSpc>
-                <a:spcPct val="102000"/>
-              </a:lnSpc>
-              <a:buNone/>
-            </a:pPr>
-            <a:r>
-              <a:rPr lang="en-US" sz="1100" dirty="0">
-                <a:solidFill>
-                  <a:srgbClr val="2A2723"/>
-                </a:solidFill>
-                <a:latin typeface="Consolas" pitchFamily="34" charset="0"/>
-                <a:ea typeface="Consolas" pitchFamily="34" charset="-122"/>
-                <a:cs typeface="Consolas" pitchFamily="34" charset="-120"/>
-              </a:rPr>
-              <a:t>요청의 기준을 우선하고 보고서에 달라진 기준을 표시한다.</a:t>
             </a:r>
             <a:endParaRPr lang="en-US" sz="1100" dirty="0"/>
           </a:p>
@@ -11475,7 +12119,7 @@
                 <a:ea typeface="Malgun Gothic" pitchFamily="34" charset="-122"/>
                 <a:cs typeface="Malgun Gothic" pitchFamily="34" charset="-120"/>
               </a:rPr>
-              <a:t>문단마다 </a:t>
+              <a:t>SKILL.md 본문 </a:t>
             </a:r>
             <a:pPr indent="0" marL="0">
               <a:buNone/>
@@ -11483,13 +12127,13 @@
             <a:r>
               <a:rPr lang="en-US" sz="2400" b="1" dirty="0">
                 <a:solidFill>
-                  <a:srgbClr val="3A5A8C"/>
-                </a:solidFill>
-                <a:latin typeface="Malgun Gothic" pitchFamily="34" charset="0"/>
-                <a:ea typeface="Malgun Gothic" pitchFamily="34" charset="-122"/>
-                <a:cs typeface="Malgun Gothic" pitchFamily="34" charset="-120"/>
-              </a:rPr>
-              <a:t>맡는 일</a:t>
+                  <a:srgbClr val="3F6B5F"/>
+                </a:solidFill>
+                <a:latin typeface="Malgun Gothic" pitchFamily="34" charset="0"/>
+                <a:ea typeface="Malgun Gothic" pitchFamily="34" charset="-122"/>
+                <a:cs typeface="Malgun Gothic" pitchFamily="34" charset="-120"/>
+              </a:rPr>
+              <a:t>②</a:t>
             </a:r>
             <a:pPr indent="0" marL="0">
               <a:buNone/>
@@ -11503,7 +12147,7 @@
                 <a:ea typeface="Malgun Gothic" pitchFamily="34" charset="-122"/>
                 <a:cs typeface="Malgun Gothic" pitchFamily="34" charset="-120"/>
               </a:rPr>
-              <a:t>이 있습니다</a:t>
+              <a:t> — 자료·판단·산출물</a:t>
             </a:r>
             <a:endParaRPr lang="en-US" sz="2400" dirty="0"/>
           </a:p>
@@ -11529,9 +12173,419 @@
           <a:ln/>
         </p:spPr>
       </p:sp>
+      <p:sp>
+        <p:nvSpPr>
+          <p:cNvPr id="4" name="Shape 2"/>
+          <p:cNvSpPr/>
+          <p:nvPr/>
+        </p:nvSpPr>
+        <p:spPr>
+          <a:xfrm>
+            <a:off x="548640" y="1371600"/>
+            <a:ext cx="11091672" cy="2907792"/>
+          </a:xfrm>
+          <a:prstGeom prst="roundRect">
+            <a:avLst>
+              <a:gd name="adj" fmla="val 1572"/>
+            </a:avLst>
+          </a:prstGeom>
+          <a:solidFill>
+            <a:srgbClr val="F2EDE4"/>
+          </a:solidFill>
+          <a:ln w="12700">
+            <a:solidFill>
+              <a:srgbClr val="E3DACB"/>
+            </a:solidFill>
+            <a:prstDash val="solid"/>
+          </a:ln>
+        </p:spPr>
+      </p:sp>
+      <p:sp>
+        <p:nvSpPr>
+          <p:cNvPr id="5" name="Shape 3"/>
+          <p:cNvSpPr/>
+          <p:nvPr/>
+        </p:nvSpPr>
+        <p:spPr>
+          <a:xfrm>
+            <a:off x="548640" y="1371600"/>
+            <a:ext cx="54864" cy="2907792"/>
+          </a:xfrm>
+          <a:prstGeom prst="rect">
+            <a:avLst/>
+          </a:prstGeom>
+          <a:solidFill>
+            <a:srgbClr val="3F6B5F"/>
+          </a:solidFill>
+          <a:ln/>
+        </p:spPr>
+      </p:sp>
+      <p:sp>
+        <p:nvSpPr>
+          <p:cNvPr id="6" name="Text 4"/>
+          <p:cNvSpPr/>
+          <p:nvPr/>
+        </p:nvSpPr>
+        <p:spPr>
+          <a:xfrm>
+            <a:off x="768096" y="1463040"/>
+            <a:ext cx="10707624" cy="2724912"/>
+          </a:xfrm>
+          <a:prstGeom prst="rect">
+            <a:avLst/>
+          </a:prstGeom>
+          <a:noFill/>
+          <a:ln/>
+        </p:spPr>
+        <p:txBody>
+          <a:bodyPr wrap="square" rtlCol="0" anchor="t">
+            <a:normAutofit/>
+          </a:bodyPr>
+          <a:lstStyle/>
+          <a:p>
+            <a:pPr algn="l" indent="0" marL="0">
+              <a:lnSpc>
+                <a:spcPct val="102000"/>
+              </a:lnSpc>
+              <a:buNone/>
+            </a:pPr>
+            <a:r>
+              <a:rPr lang="en-US" sz="1100" dirty="0">
+                <a:solidFill>
+                  <a:srgbClr val="2A2723"/>
+                </a:solidFill>
+                <a:latin typeface="Consolas" pitchFamily="34" charset="0"/>
+                <a:ea typeface="Consolas" pitchFamily="34" charset="-122"/>
+                <a:cs typeface="Consolas" pitchFamily="34" charset="-120"/>
+              </a:rPr>
+              <a:t>사용자가 준 JSON이나 파일이 있으면 그것을 사용한다. 연결된</a:t>
+            </a:r>
+            <a:endParaRPr lang="en-US" sz="1100" dirty="0"/>
+          </a:p>
+          <a:p>
+            <a:pPr algn="l" indent="0" marL="0">
+              <a:lnSpc>
+                <a:spcPct val="102000"/>
+              </a:lnSpc>
+              <a:buNone/>
+            </a:pPr>
+            <a:r>
+              <a:rPr lang="en-US" sz="1100" dirty="0">
+                <a:solidFill>
+                  <a:srgbClr val="2A2723"/>
+                </a:solidFill>
+                <a:latin typeface="Consolas" pitchFamily="34" charset="0"/>
+                <a:ea typeface="Consolas" pitchFamily="34" charset="-122"/>
+                <a:cs typeface="Consolas" pitchFamily="34" charset="-120"/>
+              </a:rPr>
+              <a:t>get_weekly_records로 조회해도 된다. MCP 연결은 필수가 아니며, 보고서를</a:t>
+            </a:r>
+            <a:endParaRPr lang="en-US" sz="1100" dirty="0"/>
+          </a:p>
+          <a:p>
+            <a:pPr algn="l" indent="0" marL="0">
+              <a:lnSpc>
+                <a:spcPct val="102000"/>
+              </a:lnSpc>
+              <a:buNone/>
+            </a:pPr>
+            <a:r>
+              <a:rPr lang="en-US" sz="1100" dirty="0">
+                <a:solidFill>
+                  <a:srgbClr val="2A2723"/>
+                </a:solidFill>
+                <a:latin typeface="Consolas" pitchFamily="34" charset="0"/>
+                <a:ea typeface="Consolas" pitchFamily="34" charset="-122"/>
+                <a:cs typeface="Consolas" pitchFamily="34" charset="-120"/>
+              </a:rPr>
+              <a:t>쓰기 위해 새 서버 설치나 계정 인증을 시작할 필요는 없다. 대상 주차를</a:t>
+            </a:r>
+            <a:endParaRPr lang="en-US" sz="1100" dirty="0"/>
+          </a:p>
+          <a:p>
+            <a:pPr algn="l" indent="0" marL="0">
+              <a:lnSpc>
+                <a:spcPct val="102000"/>
+              </a:lnSpc>
+              <a:buNone/>
+            </a:pPr>
+            <a:r>
+              <a:rPr lang="en-US" sz="1100" dirty="0">
+                <a:solidFill>
+                  <a:srgbClr val="2A2723"/>
+                </a:solidFill>
+                <a:latin typeface="Consolas" pitchFamily="34" charset="0"/>
+                <a:ea typeface="Consolas" pitchFamily="34" charset="-122"/>
+                <a:cs typeface="Consolas" pitchFamily="34" charset="-120"/>
+              </a:rPr>
+              <a:t>알 수 없으면 주차를 확인한다.</a:t>
+            </a:r>
+            <a:endParaRPr lang="en-US" sz="1100" dirty="0"/>
+          </a:p>
+          <a:p>
+            <a:pPr algn="l" indent="0" marL="0">
+              <a:lnSpc>
+                <a:spcPct val="102000"/>
+              </a:lnSpc>
+              <a:buNone/>
+            </a:pPr>
+            <a:endParaRPr lang="en-US" sz="1100" dirty="0"/>
+          </a:p>
+          <a:p>
+            <a:pPr algn="l" indent="0" marL="0">
+              <a:lnSpc>
+                <a:spcPct val="102000"/>
+              </a:lnSpc>
+              <a:buNone/>
+            </a:pPr>
+            <a:r>
+              <a:rPr lang="en-US" sz="1100" dirty="0">
+                <a:solidFill>
+                  <a:srgbClr val="2A2723"/>
+                </a:solidFill>
+                <a:latin typeface="Consolas" pitchFamily="34" charset="0"/>
+                <a:ea typeface="Consolas" pitchFamily="34" charset="-122"/>
+                <a:cs typeface="Consolas" pitchFamily="34" charset="-120"/>
+              </a:rPr>
+              <a:t>입력의 report_date를 기준으로 각 기록을 한 번씩 분류한다. 보고서에는 업무</a:t>
+            </a:r>
+            <a:endParaRPr lang="en-US" sz="1100" dirty="0"/>
+          </a:p>
+          <a:p>
+            <a:pPr algn="l" indent="0" marL="0">
+              <a:lnSpc>
+                <a:spcPct val="102000"/>
+              </a:lnSpc>
+              <a:buNone/>
+            </a:pPr>
+            <a:r>
+              <a:rPr lang="en-US" sz="1100" dirty="0">
+                <a:solidFill>
+                  <a:srgbClr val="2A2723"/>
+                </a:solidFill>
+                <a:latin typeface="Consolas" pitchFamily="34" charset="0"/>
+                <a:ea typeface="Consolas" pitchFamily="34" charset="-122"/>
+                <a:cs typeface="Consolas" pitchFamily="34" charset="-120"/>
+              </a:rPr>
+              <a:t>ID와 판정의 근거가 된 필드를 남긴다. 팀 규칙으로 판정할 수 없거나 기록이</a:t>
+            </a:r>
+            <a:endParaRPr lang="en-US" sz="1100" dirty="0"/>
+          </a:p>
+          <a:p>
+            <a:pPr algn="l" indent="0" marL="0">
+              <a:lnSpc>
+                <a:spcPct val="102000"/>
+              </a:lnSpc>
+              <a:buNone/>
+            </a:pPr>
+            <a:r>
+              <a:rPr lang="en-US" sz="1100" dirty="0">
+                <a:solidFill>
+                  <a:srgbClr val="2A2723"/>
+                </a:solidFill>
+                <a:latin typeface="Consolas" pitchFamily="34" charset="0"/>
+                <a:ea typeface="Consolas" pitchFamily="34" charset="-122"/>
+                <a:cs typeface="Consolas" pitchFamily="34" charset="-120"/>
+              </a:rPr>
+              <a:t>충돌하면 위험 항목으로 분리하고 확인이 필요한 사실을 적는다.</a:t>
+            </a:r>
+            <a:endParaRPr lang="en-US" sz="1100" dirty="0"/>
+          </a:p>
+          <a:p>
+            <a:pPr algn="l" indent="0" marL="0">
+              <a:lnSpc>
+                <a:spcPct val="102000"/>
+              </a:lnSpc>
+              <a:buNone/>
+            </a:pPr>
+            <a:endParaRPr lang="en-US" sz="1100" dirty="0"/>
+          </a:p>
+          <a:p>
+            <a:pPr algn="l" indent="0" marL="0">
+              <a:lnSpc>
+                <a:spcPct val="102000"/>
+              </a:lnSpc>
+              <a:buNone/>
+            </a:pPr>
+            <a:r>
+              <a:rPr lang="en-US" sz="1100" dirty="0">
+                <a:solidFill>
+                  <a:srgbClr val="2A2723"/>
+                </a:solidFill>
+                <a:latin typeface="Consolas" pitchFamily="34" charset="0"/>
+                <a:ea typeface="Consolas" pitchFamily="34" charset="-122"/>
+                <a:cs typeface="Consolas" pitchFamily="34" charset="-120"/>
+              </a:rPr>
+              <a:t>보고서를 파일로 요청받으면 Markdown으로 저장한다. 이 Skill은 기록 자체를</a:t>
+            </a:r>
+            <a:endParaRPr lang="en-US" sz="1100" dirty="0"/>
+          </a:p>
+          <a:p>
+            <a:pPr algn="l" indent="0" marL="0">
+              <a:lnSpc>
+                <a:spcPct val="102000"/>
+              </a:lnSpc>
+              <a:buNone/>
+            </a:pPr>
+            <a:r>
+              <a:rPr lang="en-US" sz="1100" dirty="0">
+                <a:solidFill>
+                  <a:srgbClr val="2A2723"/>
+                </a:solidFill>
+                <a:latin typeface="Consolas" pitchFamily="34" charset="0"/>
+                <a:ea typeface="Consolas" pitchFamily="34" charset="-122"/>
+                <a:cs typeface="Consolas" pitchFamily="34" charset="-120"/>
+              </a:rPr>
+              <a:t>고치거나 메시지를 발송하지 않는다. 사용자가 규칙 변경을 요청하면 해당</a:t>
+            </a:r>
+            <a:endParaRPr lang="en-US" sz="1100" dirty="0"/>
+          </a:p>
+          <a:p>
+            <a:pPr algn="l" indent="0" marL="0">
+              <a:lnSpc>
+                <a:spcPct val="102000"/>
+              </a:lnSpc>
+              <a:buNone/>
+            </a:pPr>
+            <a:r>
+              <a:rPr lang="en-US" sz="1100" dirty="0">
+                <a:solidFill>
+                  <a:srgbClr val="2A2723"/>
+                </a:solidFill>
+                <a:latin typeface="Consolas" pitchFamily="34" charset="0"/>
+                <a:ea typeface="Consolas" pitchFamily="34" charset="-122"/>
+                <a:cs typeface="Consolas" pitchFamily="34" charset="-120"/>
+              </a:rPr>
+              <a:t>요청의 기준을 우선하고 보고서에 달라진 기준을 표시한다.</a:t>
+            </a:r>
+            <a:endParaRPr lang="en-US" sz="1100" dirty="0"/>
+          </a:p>
+        </p:txBody>
+      </p:sp>
+    </p:spTree>
+  </p:cSld>
+  <p:clrMapOvr>
+    <a:masterClrMapping/>
+  </p:clrMapOvr>
+</p:sld>
+</file>
+
+<file path=ppt/slides/slide9.xml><?xml version="1.0" encoding="utf-8"?>
+<p:sld xmlns:a="http://schemas.openxmlformats.org/drawingml/2006/main" xmlns:r="http://schemas.openxmlformats.org/officeDocument/2006/relationships" xmlns:p="http://schemas.openxmlformats.org/presentationml/2006/main">
+  <p:cSld name="Slide 9">
+    <p:bg>
+      <p:bgPr>
+        <a:solidFill>
+          <a:srgbClr val="FAF8F4"/>
+        </a:solidFill>
+      </p:bgPr>
+    </p:bg>
+    <p:spTree>
+      <p:nvGrpSpPr>
+        <p:cNvPr id="1" name=""/>
+        <p:cNvGrpSpPr/>
+        <p:nvPr/>
+      </p:nvGrpSpPr>
+      <p:grpSpPr>
+        <a:xfrm>
+          <a:off x="0" y="0"/>
+          <a:ext cx="0" cy="0"/>
+          <a:chOff x="0" y="0"/>
+          <a:chExt cx="0" cy="0"/>
+        </a:xfrm>
+      </p:grpSpPr>
+      <p:sp>
+        <p:nvSpPr>
+          <p:cNvPr id="2" name="Text 0"/>
+          <p:cNvSpPr/>
+          <p:nvPr/>
+        </p:nvSpPr>
+        <p:spPr>
+          <a:xfrm>
+            <a:off x="548640" y="384048"/>
+            <a:ext cx="11091672" cy="731520"/>
+          </a:xfrm>
+          <a:prstGeom prst="rect">
+            <a:avLst/>
+          </a:prstGeom>
+          <a:noFill/>
+          <a:ln/>
+        </p:spPr>
+        <p:txBody>
+          <a:bodyPr wrap="square" rtlCol="0" anchor="ctr">
+            <a:normAutofit/>
+          </a:bodyPr>
+          <a:lstStyle/>
+          <a:p>
+            <a:pPr indent="0" marL="0">
+              <a:buNone/>
+            </a:pPr>
+            <a:r>
+              <a:rPr lang="en-US" sz="2400" b="1" dirty="0">
+                <a:solidFill>
+                  <a:srgbClr val="2A2723"/>
+                </a:solidFill>
+                <a:latin typeface="Malgun Gothic" pitchFamily="34" charset="0"/>
+                <a:ea typeface="Malgun Gothic" pitchFamily="34" charset="-122"/>
+                <a:cs typeface="Malgun Gothic" pitchFamily="34" charset="-120"/>
+              </a:rPr>
+              <a:t>문단마다 </a:t>
+            </a:r>
+            <a:pPr indent="0" marL="0">
+              <a:buNone/>
+            </a:pPr>
+            <a:r>
+              <a:rPr lang="en-US" sz="2400" b="1" dirty="0">
+                <a:solidFill>
+                  <a:srgbClr val="3A5A8C"/>
+                </a:solidFill>
+                <a:latin typeface="Malgun Gothic" pitchFamily="34" charset="0"/>
+                <a:ea typeface="Malgun Gothic" pitchFamily="34" charset="-122"/>
+                <a:cs typeface="Malgun Gothic" pitchFamily="34" charset="-120"/>
+              </a:rPr>
+              <a:t>맡는 일</a:t>
+            </a:r>
+            <a:pPr indent="0" marL="0">
+              <a:buNone/>
+            </a:pPr>
+            <a:r>
+              <a:rPr lang="en-US" sz="2400" b="1" dirty="0">
+                <a:solidFill>
+                  <a:srgbClr val="2A2723"/>
+                </a:solidFill>
+                <a:latin typeface="Malgun Gothic" pitchFamily="34" charset="0"/>
+                <a:ea typeface="Malgun Gothic" pitchFamily="34" charset="-122"/>
+                <a:cs typeface="Malgun Gothic" pitchFamily="34" charset="-120"/>
+              </a:rPr>
+              <a:t>이 있습니다</a:t>
+            </a:r>
+            <a:endParaRPr lang="en-US" sz="2400" dirty="0"/>
+          </a:p>
+        </p:txBody>
+      </p:sp>
+      <p:sp>
+        <p:nvSpPr>
+          <p:cNvPr id="3" name="Shape 1"/>
+          <p:cNvSpPr/>
+          <p:nvPr/>
+        </p:nvSpPr>
+        <p:spPr>
+          <a:xfrm>
+            <a:off x="566928" y="1133856"/>
+            <a:ext cx="777240" cy="41148"/>
+          </a:xfrm>
+          <a:prstGeom prst="rect">
+            <a:avLst/>
+          </a:prstGeom>
+          <a:solidFill>
+            <a:srgbClr val="3F6B5F"/>
+          </a:solidFill>
+          <a:ln/>
+        </p:spPr>
+      </p:sp>
       <p:graphicFrame>
         <p:nvGraphicFramePr>
-          <p:cNvPr id="9" name="Table 0"/>
+          <p:cNvPr id="10" name="Table 0"/>
           <p:cNvGraphicFramePr>
             <a:graphicFrameLocks noGrp="1"/>
           </p:cNvGraphicFramePr>
@@ -12387,774 +13441,6 @@
           </a:graphicData>
         </a:graphic>
       </p:graphicFrame>
-    </p:spTree>
-  </p:cSld>
-  <p:clrMapOvr>
-    <a:masterClrMapping/>
-  </p:clrMapOvr>
-</p:sld>
-</file>
-
-<file path=ppt/slides/slide9.xml><?xml version="1.0" encoding="utf-8"?>
-<p:sld xmlns:a="http://schemas.openxmlformats.org/drawingml/2006/main" xmlns:r="http://schemas.openxmlformats.org/officeDocument/2006/relationships" xmlns:p="http://schemas.openxmlformats.org/presentationml/2006/main">
-  <p:cSld name="Slide 9">
-    <p:bg>
-      <p:bgPr>
-        <a:solidFill>
-          <a:srgbClr val="FAF8F4"/>
-        </a:solidFill>
-      </p:bgPr>
-    </p:bg>
-    <p:spTree>
-      <p:nvGrpSpPr>
-        <p:cNvPr id="1" name=""/>
-        <p:cNvGrpSpPr/>
-        <p:nvPr/>
-      </p:nvGrpSpPr>
-      <p:grpSpPr>
-        <a:xfrm>
-          <a:off x="0" y="0"/>
-          <a:ext cx="0" cy="0"/>
-          <a:chOff x="0" y="0"/>
-          <a:chExt cx="0" cy="0"/>
-        </a:xfrm>
-      </p:grpSpPr>
-      <p:sp>
-        <p:nvSpPr>
-          <p:cNvPr id="2" name="Text 0"/>
-          <p:cNvSpPr/>
-          <p:nvPr/>
-        </p:nvSpPr>
-        <p:spPr>
-          <a:xfrm>
-            <a:off x="548640" y="384048"/>
-            <a:ext cx="11091672" cy="731520"/>
-          </a:xfrm>
-          <a:prstGeom prst="rect">
-            <a:avLst/>
-          </a:prstGeom>
-          <a:noFill/>
-          <a:ln/>
-        </p:spPr>
-        <p:txBody>
-          <a:bodyPr wrap="square" rtlCol="0" anchor="ctr">
-            <a:normAutofit/>
-          </a:bodyPr>
-          <a:lstStyle/>
-          <a:p>
-            <a:pPr indent="0" marL="0">
-              <a:buNone/>
-            </a:pPr>
-            <a:r>
-              <a:rPr lang="en-US" sz="2400" b="1" dirty="0">
-                <a:solidFill>
-                  <a:srgbClr val="2A2723"/>
-                </a:solidFill>
-                <a:latin typeface="Malgun Gothic" pitchFamily="34" charset="0"/>
-                <a:ea typeface="Malgun Gothic" pitchFamily="34" charset="-122"/>
-                <a:cs typeface="Malgun Gothic" pitchFamily="34" charset="-120"/>
-              </a:rPr>
-              <a:t>앞부분과 </a:t>
-            </a:r>
-            <a:pPr indent="0" marL="0">
-              <a:buNone/>
-            </a:pPr>
-            <a:r>
-              <a:rPr lang="en-US" sz="2400" b="1" dirty="0">
-                <a:solidFill>
-                  <a:srgbClr val="3F6B5F"/>
-                </a:solidFill>
-                <a:latin typeface="Malgun Gothic" pitchFamily="34" charset="0"/>
-                <a:ea typeface="Malgun Gothic" pitchFamily="34" charset="-122"/>
-                <a:cs typeface="Malgun Gothic" pitchFamily="34" charset="-120"/>
-              </a:rPr>
-              <a:t>본문</a:t>
-            </a:r>
-            <a:endParaRPr lang="en-US" sz="2400" dirty="0"/>
-          </a:p>
-        </p:txBody>
-      </p:sp>
-      <p:sp>
-        <p:nvSpPr>
-          <p:cNvPr id="3" name="Shape 1"/>
-          <p:cNvSpPr/>
-          <p:nvPr/>
-        </p:nvSpPr>
-        <p:spPr>
-          <a:xfrm>
-            <a:off x="566928" y="1133856"/>
-            <a:ext cx="777240" cy="41148"/>
-          </a:xfrm>
-          <a:prstGeom prst="rect">
-            <a:avLst/>
-          </a:prstGeom>
-          <a:solidFill>
-            <a:srgbClr val="3F6B5F"/>
-          </a:solidFill>
-          <a:ln/>
-        </p:spPr>
-      </p:sp>
-      <p:sp>
-        <p:nvSpPr>
-          <p:cNvPr id="4" name="Text 2"/>
-          <p:cNvSpPr/>
-          <p:nvPr/>
-        </p:nvSpPr>
-        <p:spPr>
-          <a:xfrm>
-            <a:off x="548640" y="1371600"/>
-            <a:ext cx="11091672" cy="1949958"/>
-          </a:xfrm>
-          <a:prstGeom prst="rect">
-            <a:avLst/>
-          </a:prstGeom>
-          <a:noFill/>
-          <a:ln/>
-        </p:spPr>
-        <p:txBody>
-          <a:bodyPr wrap="square" rtlCol="0" anchor="t">
-            <a:normAutofit/>
-          </a:bodyPr>
-          <a:lstStyle/>
-          <a:p>
-            <a:pPr indent="0" marL="0">
-              <a:lnSpc>
-                <a:spcPct val="105000"/>
-              </a:lnSpc>
-              <a:buNone/>
-            </a:pPr>
-            <a:r>
-              <a:rPr lang="en-US" sz="1450" b="1" dirty="0">
-                <a:solidFill>
-                  <a:srgbClr val="3F6B5F"/>
-                </a:solidFill>
-                <a:latin typeface="Malgun Gothic" pitchFamily="34" charset="0"/>
-                <a:ea typeface="Malgun Gothic" pitchFamily="34" charset="-122"/>
-                <a:cs typeface="Malgun Gothic" pitchFamily="34" charset="-120"/>
-              </a:rPr>
-              <a:t>›  </a:t>
-            </a:r>
-            <a:pPr indent="0" marL="0">
-              <a:lnSpc>
-                <a:spcPct val="105000"/>
-              </a:lnSpc>
-              <a:buNone/>
-            </a:pPr>
-            <a:r>
-              <a:rPr lang="en-US" sz="1450" dirty="0">
-                <a:solidFill>
-                  <a:srgbClr val="6B6357"/>
-                </a:solidFill>
-                <a:latin typeface="Malgun Gothic" pitchFamily="34" charset="0"/>
-                <a:ea typeface="Malgun Gothic" pitchFamily="34" charset="-122"/>
-                <a:cs typeface="Malgun Gothic" pitchFamily="34" charset="-120"/>
-              </a:rPr>
-              <a:t>.md는 </a:t>
-            </a:r>
-            <a:pPr indent="0" marL="0">
-              <a:lnSpc>
-                <a:spcPct val="105000"/>
-              </a:lnSpc>
-              <a:buNone/>
-            </a:pPr>
-            <a:r>
-              <a:rPr lang="en-US" sz="1450" b="1" dirty="0">
-                <a:solidFill>
-                  <a:srgbClr val="2A2723"/>
-                </a:solidFill>
-                <a:latin typeface="Malgun Gothic" pitchFamily="34" charset="0"/>
-                <a:ea typeface="Malgun Gothic" pitchFamily="34" charset="-122"/>
-                <a:cs typeface="Malgun Gothic" pitchFamily="34" charset="-120"/>
-              </a:rPr>
-              <a:t>Markdown</a:t>
-            </a:r>
-            <a:pPr indent="0" marL="0">
-              <a:lnSpc>
-                <a:spcPct val="105000"/>
-              </a:lnSpc>
-              <a:spcAft>
-                <a:spcPts val="700"/>
-              </a:spcAft>
-              <a:buNone/>
-            </a:pPr>
-            <a:r>
-              <a:rPr lang="en-US" sz="1450" dirty="0">
-                <a:solidFill>
-                  <a:srgbClr val="6B6357"/>
-                </a:solidFill>
-                <a:latin typeface="Malgun Gothic" pitchFamily="34" charset="0"/>
-                <a:ea typeface="Malgun Gothic" pitchFamily="34" charset="-122"/>
-                <a:cs typeface="Malgun Gothic" pitchFamily="34" charset="-120"/>
-              </a:rPr>
-              <a:t> 문서의 확장자 — 평문에 기호를 붙여 제목·목록·링크를 표현. #은 제목, 대괄호 안은 링크에 보이는 문구, 괄호 안은 대상 파일의 위치</a:t>
-            </a:r>
-            <a:endParaRPr lang="en-US" sz="1450" dirty="0"/>
-          </a:p>
-          <a:p>
-            <a:pPr indent="0" marL="0">
-              <a:lnSpc>
-                <a:spcPct val="105000"/>
-              </a:lnSpc>
-              <a:buNone/>
-            </a:pPr>
-            <a:r>
-              <a:rPr lang="en-US" sz="1450" b="1" dirty="0">
-                <a:solidFill>
-                  <a:srgbClr val="3F6B5F"/>
-                </a:solidFill>
-                <a:latin typeface="Malgun Gothic" pitchFamily="34" charset="0"/>
-                <a:ea typeface="Malgun Gothic" pitchFamily="34" charset="-122"/>
-                <a:cs typeface="Malgun Gothic" pitchFamily="34" charset="-120"/>
-              </a:rPr>
-              <a:t>›  </a:t>
-            </a:r>
-            <a:pPr indent="0" marL="0">
-              <a:lnSpc>
-                <a:spcPct val="105000"/>
-              </a:lnSpc>
-              <a:buNone/>
-            </a:pPr>
-            <a:r>
-              <a:rPr lang="en-US" sz="1450" dirty="0">
-                <a:solidFill>
-                  <a:srgbClr val="6B6357"/>
-                </a:solidFill>
-                <a:latin typeface="Malgun Gothic" pitchFamily="34" charset="0"/>
-                <a:ea typeface="Malgun Gothic" pitchFamily="34" charset="-122"/>
-                <a:cs typeface="Malgun Gothic" pitchFamily="34" charset="-120"/>
-              </a:rPr>
-              <a:t>맨 위 --- 사이의 구역을 </a:t>
-            </a:r>
-            <a:pPr indent="0" marL="0">
-              <a:lnSpc>
-                <a:spcPct val="105000"/>
-              </a:lnSpc>
-              <a:buNone/>
-            </a:pPr>
-            <a:r>
-              <a:rPr lang="en-US" sz="1450" b="1" dirty="0">
-                <a:solidFill>
-                  <a:srgbClr val="2A2723"/>
-                </a:solidFill>
-                <a:latin typeface="Malgun Gothic" pitchFamily="34" charset="0"/>
-                <a:ea typeface="Malgun Gothic" pitchFamily="34" charset="-122"/>
-                <a:cs typeface="Malgun Gothic" pitchFamily="34" charset="-120"/>
-              </a:rPr>
-              <a:t>frontmatter</a:t>
-            </a:r>
-            <a:pPr indent="0" marL="0">
-              <a:lnSpc>
-                <a:spcPct val="105000"/>
-              </a:lnSpc>
-              <a:buNone/>
-            </a:pPr>
-            <a:r>
-              <a:rPr lang="en-US" sz="1450" dirty="0">
-                <a:solidFill>
-                  <a:srgbClr val="6B6357"/>
-                </a:solidFill>
-                <a:latin typeface="Malgun Gothic" pitchFamily="34" charset="0"/>
-                <a:ea typeface="Malgun Gothic" pitchFamily="34" charset="-122"/>
-                <a:cs typeface="Malgun Gothic" pitchFamily="34" charset="-120"/>
-              </a:rPr>
-              <a:t>라 하며 </a:t>
-            </a:r>
-            <a:pPr indent="0" marL="0">
-              <a:lnSpc>
-                <a:spcPct val="105000"/>
-              </a:lnSpc>
-              <a:buNone/>
-            </a:pPr>
-            <a:r>
-              <a:rPr lang="en-US" sz="1450" b="1" dirty="0">
-                <a:solidFill>
-                  <a:srgbClr val="2A2723"/>
-                </a:solidFill>
-                <a:latin typeface="Malgun Gothic" pitchFamily="34" charset="0"/>
-                <a:ea typeface="Malgun Gothic" pitchFamily="34" charset="-122"/>
-                <a:cs typeface="Malgun Gothic" pitchFamily="34" charset="-120"/>
-              </a:rPr>
-              <a:t>YAML</a:t>
-            </a:r>
-            <a:pPr indent="0" marL="0">
-              <a:lnSpc>
-                <a:spcPct val="105000"/>
-              </a:lnSpc>
-              <a:buNone/>
-            </a:pPr>
-            <a:r>
-              <a:rPr lang="en-US" sz="1450" dirty="0">
-                <a:solidFill>
-                  <a:srgbClr val="6B6357"/>
-                </a:solidFill>
-                <a:latin typeface="Malgun Gothic" pitchFamily="34" charset="0"/>
-                <a:ea typeface="Malgun Gothic" pitchFamily="34" charset="-122"/>
-                <a:cs typeface="Malgun Gothic" pitchFamily="34" charset="-120"/>
-              </a:rPr>
-              <a:t>(속성: 값)로 적습니다 — </a:t>
-            </a:r>
-            <a:pPr indent="0" marL="0">
-              <a:lnSpc>
-                <a:spcPct val="105000"/>
-              </a:lnSpc>
-              <a:spcAft>
-                <a:spcPts val="700"/>
-              </a:spcAft>
-              <a:buNone/>
-            </a:pPr>
-            <a:r>
-              <a:rPr lang="en-US" sz="1450" b="1" dirty="0">
-                <a:solidFill>
-                  <a:srgbClr val="3F6B5F"/>
-                </a:solidFill>
-                <a:latin typeface="Malgun Gothic" pitchFamily="34" charset="0"/>
-                <a:ea typeface="Malgun Gothic" pitchFamily="34" charset="-122"/>
-                <a:cs typeface="Malgun Gothic" pitchFamily="34" charset="-120"/>
-              </a:rPr>
-              <a:t>본문이 실제 작업 지침이라면 앞부분은 Skill을 발견하고 선택하는 데 쓰는 안내</a:t>
-            </a:r>
-            <a:endParaRPr lang="en-US" sz="1450" dirty="0"/>
-          </a:p>
-          <a:p>
-            <a:pPr indent="0" marL="0">
-              <a:lnSpc>
-                <a:spcPct val="105000"/>
-              </a:lnSpc>
-              <a:buNone/>
-            </a:pPr>
-            <a:r>
-              <a:rPr lang="en-US" sz="1450" b="1" dirty="0">
-                <a:solidFill>
-                  <a:srgbClr val="3F6B5F"/>
-                </a:solidFill>
-                <a:latin typeface="Malgun Gothic" pitchFamily="34" charset="0"/>
-                <a:ea typeface="Malgun Gothic" pitchFamily="34" charset="-122"/>
-                <a:cs typeface="Malgun Gothic" pitchFamily="34" charset="-120"/>
-              </a:rPr>
-              <a:t>›  </a:t>
-            </a:r>
-            <a:pPr indent="0" marL="0">
-              <a:lnSpc>
-                <a:spcPct val="105000"/>
-              </a:lnSpc>
-              <a:buNone/>
-            </a:pPr>
-            <a:r>
-              <a:rPr lang="en-US" sz="1450" dirty="0">
-                <a:solidFill>
-                  <a:srgbClr val="6B6357"/>
-                </a:solidFill>
-                <a:latin typeface="Malgun Gothic" pitchFamily="34" charset="0"/>
-                <a:ea typeface="Malgun Gothic" pitchFamily="34" charset="-122"/>
-                <a:cs typeface="Malgun Gothic" pitchFamily="34" charset="-120"/>
-              </a:rPr>
-              <a:t>name은 </a:t>
-            </a:r>
-            <a:pPr indent="0" marL="0">
-              <a:lnSpc>
-                <a:spcPct val="105000"/>
-              </a:lnSpc>
-              <a:buNone/>
-            </a:pPr>
-            <a:r>
-              <a:rPr lang="en-US" sz="1450" b="1" dirty="0">
-                <a:solidFill>
-                  <a:srgbClr val="2A2723"/>
-                </a:solidFill>
-                <a:latin typeface="Malgun Gothic" pitchFamily="34" charset="0"/>
-                <a:ea typeface="Malgun Gothic" pitchFamily="34" charset="-122"/>
-                <a:cs typeface="Malgun Gothic" pitchFamily="34" charset="-120"/>
-              </a:rPr>
-              <a:t>폴더와 함께 다룰 식별자</a:t>
-            </a:r>
-            <a:pPr indent="0" marL="0">
-              <a:lnSpc>
-                <a:spcPct val="105000"/>
-              </a:lnSpc>
-              <a:buNone/>
-            </a:pPr>
-            <a:r>
-              <a:rPr lang="en-US" sz="1450" dirty="0">
-                <a:solidFill>
-                  <a:srgbClr val="6B6357"/>
-                </a:solidFill>
-                <a:latin typeface="Malgun Gothic" pitchFamily="34" charset="0"/>
-                <a:ea typeface="Malgun Gothic" pitchFamily="34" charset="-122"/>
-                <a:cs typeface="Malgun Gothic" pitchFamily="34" charset="-120"/>
-              </a:rPr>
-              <a:t>. description에는 </a:t>
-            </a:r>
-            <a:pPr indent="0" marL="0">
-              <a:lnSpc>
-                <a:spcPct val="105000"/>
-              </a:lnSpc>
-              <a:buNone/>
-            </a:pPr>
-            <a:r>
-              <a:rPr lang="en-US" sz="1450" b="1" dirty="0">
-                <a:solidFill>
-                  <a:srgbClr val="3F6B5F"/>
-                </a:solidFill>
-                <a:latin typeface="Malgun Gothic" pitchFamily="34" charset="0"/>
-                <a:ea typeface="Malgun Gothic" pitchFamily="34" charset="-122"/>
-                <a:cs typeface="Malgun Gothic" pitchFamily="34" charset="-120"/>
-              </a:rPr>
-              <a:t>'무엇을 하는지'와 '언제 필요한지'</a:t>
-            </a:r>
-            <a:pPr indent="0" marL="0">
-              <a:lnSpc>
-                <a:spcPct val="105000"/>
-              </a:lnSpc>
-              <a:buNone/>
-            </a:pPr>
-            <a:r>
-              <a:rPr lang="en-US" sz="1450" dirty="0">
-                <a:solidFill>
-                  <a:srgbClr val="6B6357"/>
-                </a:solidFill>
-                <a:latin typeface="Malgun Gothic" pitchFamily="34" charset="0"/>
-                <a:ea typeface="Malgun Gothic" pitchFamily="34" charset="-122"/>
-                <a:cs typeface="Malgun Gothic" pitchFamily="34" charset="-120"/>
-              </a:rPr>
-              <a:t>를 — 예제의 '주간 업무 보고', '이번 주 진행 상황 정리'는 </a:t>
-            </a:r>
-            <a:pPr indent="0" marL="0">
-              <a:lnSpc>
-                <a:spcPct val="105000"/>
-              </a:lnSpc>
-              <a:buNone/>
-            </a:pPr>
-            <a:r>
-              <a:rPr lang="en-US" sz="1450" b="1" dirty="0">
-                <a:solidFill>
-                  <a:srgbClr val="2A2723"/>
-                </a:solidFill>
-                <a:latin typeface="Malgun Gothic" pitchFamily="34" charset="0"/>
-                <a:ea typeface="Malgun Gothic" pitchFamily="34" charset="-122"/>
-                <a:cs typeface="Malgun Gothic" pitchFamily="34" charset="-120"/>
-              </a:rPr>
-              <a:t>사용자가 할 법한 요청</a:t>
-            </a:r>
-            <a:pPr indent="0" marL="0">
-              <a:lnSpc>
-                <a:spcPct val="105000"/>
-              </a:lnSpc>
-              <a:spcAft>
-                <a:spcPts val="700"/>
-              </a:spcAft>
-              <a:buNone/>
-            </a:pPr>
-            <a:r>
-              <a:rPr lang="en-US" sz="1450" dirty="0">
-                <a:solidFill>
-                  <a:srgbClr val="6B6357"/>
-                </a:solidFill>
-                <a:latin typeface="Malgun Gothic" pitchFamily="34" charset="0"/>
-                <a:ea typeface="Malgun Gothic" pitchFamily="34" charset="-122"/>
-                <a:cs typeface="Malgun Gothic" pitchFamily="34" charset="-120"/>
-              </a:rPr>
-              <a:t>과 연결</a:t>
-            </a:r>
-            <a:endParaRPr lang="en-US" sz="1450" dirty="0"/>
-          </a:p>
-          <a:p>
-            <a:pPr indent="0" marL="0">
-              <a:lnSpc>
-                <a:spcPct val="105000"/>
-              </a:lnSpc>
-              <a:buNone/>
-            </a:pPr>
-            <a:r>
-              <a:rPr lang="en-US" sz="1450" b="1" dirty="0">
-                <a:solidFill>
-                  <a:srgbClr val="3F6B5F"/>
-                </a:solidFill>
-                <a:latin typeface="Malgun Gothic" pitchFamily="34" charset="0"/>
-                <a:ea typeface="Malgun Gothic" pitchFamily="34" charset="-122"/>
-                <a:cs typeface="Malgun Gothic" pitchFamily="34" charset="-120"/>
-              </a:rPr>
-              <a:t>›  </a:t>
-            </a:r>
-            <a:pPr indent="0" marL="0">
-              <a:lnSpc>
-                <a:spcPct val="105000"/>
-              </a:lnSpc>
-              <a:buNone/>
-            </a:pPr>
-            <a:r>
-              <a:rPr lang="en-US" sz="1450" b="1" dirty="0">
-                <a:solidFill>
-                  <a:srgbClr val="A65A3F"/>
-                </a:solidFill>
-                <a:latin typeface="Malgun Gothic" pitchFamily="34" charset="0"/>
-                <a:ea typeface="Malgun Gothic" pitchFamily="34" charset="-122"/>
-                <a:cs typeface="Malgun Gothic" pitchFamily="34" charset="-120"/>
-              </a:rPr>
-              <a:t>'모든 일을 완벽히 처리한다'처럼 넓게 쓰면 선택 기준이 흐려집니다</a:t>
-            </a:r>
-            <a:pPr indent="0" marL="0">
-              <a:lnSpc>
-                <a:spcPct val="105000"/>
-              </a:lnSpc>
-              <a:buNone/>
-            </a:pPr>
-            <a:r>
-              <a:rPr lang="en-US" sz="1450" dirty="0">
-                <a:solidFill>
-                  <a:srgbClr val="6B6357"/>
-                </a:solidFill>
-                <a:latin typeface="Malgun Gothic" pitchFamily="34" charset="0"/>
-                <a:ea typeface="Malgun Gothic" pitchFamily="34" charset="-122"/>
-                <a:cs typeface="Malgun Gothic" pitchFamily="34" charset="-120"/>
-              </a:rPr>
-              <a:t> — </a:t>
-            </a:r>
-            <a:pPr indent="0" marL="0">
-              <a:lnSpc>
-                <a:spcPct val="105000"/>
-              </a:lnSpc>
-              <a:buNone/>
-            </a:pPr>
-            <a:r>
-              <a:rPr lang="en-US" sz="1450" b="1" dirty="0">
-                <a:solidFill>
-                  <a:srgbClr val="3F6B5F"/>
-                </a:solidFill>
-                <a:latin typeface="Malgun Gothic" pitchFamily="34" charset="0"/>
-                <a:ea typeface="Malgun Gothic" pitchFamily="34" charset="-122"/>
-                <a:cs typeface="Malgun Gothic" pitchFamily="34" charset="-120"/>
-              </a:rPr>
-              <a:t>제외 문장을 계속 늘리는 것보다 업무 범위를 먼저 정확하게</a:t>
-            </a:r>
-            <a:pPr indent="0" marL="0">
-              <a:lnSpc>
-                <a:spcPct val="105000"/>
-              </a:lnSpc>
-              <a:spcAft>
-                <a:spcPts val="700"/>
-              </a:spcAft>
-              <a:buNone/>
-            </a:pPr>
-            <a:r>
-              <a:rPr lang="en-US" sz="1450" dirty="0">
-                <a:solidFill>
-                  <a:srgbClr val="6B6357"/>
-                </a:solidFill>
-                <a:latin typeface="Malgun Gothic" pitchFamily="34" charset="0"/>
-                <a:ea typeface="Malgun Gothic" pitchFamily="34" charset="-122"/>
-                <a:cs typeface="Malgun Gothic" pitchFamily="34" charset="-120"/>
-              </a:rPr>
-              <a:t> 표현하세요</a:t>
-            </a:r>
-            <a:endParaRPr lang="en-US" sz="1450" dirty="0"/>
-          </a:p>
-        </p:txBody>
-      </p:sp>
-      <p:sp>
-        <p:nvSpPr>
-          <p:cNvPr id="5" name="Shape 3"/>
-          <p:cNvSpPr/>
-          <p:nvPr/>
-        </p:nvSpPr>
-        <p:spPr>
-          <a:xfrm>
-            <a:off x="548640" y="3467862"/>
-            <a:ext cx="11091672" cy="769620"/>
-          </a:xfrm>
-          <a:prstGeom prst="roundRect">
-            <a:avLst>
-              <a:gd name="adj" fmla="val 7129"/>
-            </a:avLst>
-          </a:prstGeom>
-          <a:solidFill>
-            <a:srgbClr val="F2EDE4"/>
-          </a:solidFill>
-          <a:ln/>
-        </p:spPr>
-      </p:sp>
-      <p:sp>
-        <p:nvSpPr>
-          <p:cNvPr id="6" name="Shape 4"/>
-          <p:cNvSpPr/>
-          <p:nvPr/>
-        </p:nvSpPr>
-        <p:spPr>
-          <a:xfrm>
-            <a:off x="548640" y="3467862"/>
-            <a:ext cx="54864" cy="769620"/>
-          </a:xfrm>
-          <a:prstGeom prst="rect">
-            <a:avLst/>
-          </a:prstGeom>
-          <a:solidFill>
-            <a:srgbClr val="C8A15A"/>
-          </a:solidFill>
-          <a:ln/>
-        </p:spPr>
-      </p:sp>
-      <p:sp>
-        <p:nvSpPr>
-          <p:cNvPr id="7" name="Text 5"/>
-          <p:cNvSpPr/>
-          <p:nvPr/>
-        </p:nvSpPr>
-        <p:spPr>
-          <a:xfrm>
-            <a:off x="786384" y="3467862"/>
-            <a:ext cx="10707624" cy="769620"/>
-          </a:xfrm>
-          <a:prstGeom prst="rect">
-            <a:avLst/>
-          </a:prstGeom>
-          <a:noFill/>
-          <a:ln/>
-        </p:spPr>
-        <p:txBody>
-          <a:bodyPr wrap="square" rtlCol="0" anchor="ctr">
-            <a:normAutofit/>
-          </a:bodyPr>
-          <a:lstStyle/>
-          <a:p>
-            <a:pPr indent="0" marL="0">
-              <a:lnSpc>
-                <a:spcPct val="104000"/>
-              </a:lnSpc>
-              <a:buNone/>
-            </a:pPr>
-            <a:r>
-              <a:rPr lang="en-US" sz="1300" dirty="0">
-                <a:solidFill>
-                  <a:srgbClr val="6B6357"/>
-                </a:solidFill>
-                <a:latin typeface="Malgun Gothic" pitchFamily="34" charset="0"/>
-                <a:ea typeface="Malgun Gothic" pitchFamily="34" charset="-122"/>
-                <a:cs typeface="Malgun Gothic" pitchFamily="34" charset="-120"/>
-              </a:rPr>
-              <a:t>📐 형식 규칙 — 파일 이름은 </a:t>
-            </a:r>
-            <a:pPr indent="0" marL="0">
-              <a:lnSpc>
-                <a:spcPct val="104000"/>
-              </a:lnSpc>
-              <a:buNone/>
-            </a:pPr>
-            <a:r>
-              <a:rPr lang="en-US" sz="1300" b="1" dirty="0">
-                <a:solidFill>
-                  <a:srgbClr val="2A2723"/>
-                </a:solidFill>
-                <a:latin typeface="Malgun Gothic" pitchFamily="34" charset="0"/>
-                <a:ea typeface="Malgun Gothic" pitchFamily="34" charset="-122"/>
-                <a:cs typeface="Malgun Gothic" pitchFamily="34" charset="-120"/>
-              </a:rPr>
-              <a:t>대문자를 포함해 SKILL.md</a:t>
-            </a:r>
-            <a:pPr indent="0" marL="0">
-              <a:lnSpc>
-                <a:spcPct val="104000"/>
-              </a:lnSpc>
-              <a:buNone/>
-            </a:pPr>
-            <a:r>
-              <a:rPr lang="en-US" sz="1300" dirty="0">
-                <a:solidFill>
-                  <a:srgbClr val="6B6357"/>
-                </a:solidFill>
-                <a:latin typeface="Malgun Gothic" pitchFamily="34" charset="0"/>
-                <a:ea typeface="Malgun Gothic" pitchFamily="34" charset="-122"/>
-                <a:cs typeface="Malgun Gothic" pitchFamily="34" charset="-120"/>
-              </a:rPr>
-              <a:t>. name은 </a:t>
-            </a:r>
-            <a:pPr indent="0" marL="0">
-              <a:lnSpc>
-                <a:spcPct val="104000"/>
-              </a:lnSpc>
-              <a:buNone/>
-            </a:pPr>
-            <a:r>
-              <a:rPr lang="en-US" sz="1300" b="1" dirty="0">
-                <a:solidFill>
-                  <a:srgbClr val="2A2723"/>
-                </a:solidFill>
-                <a:latin typeface="Malgun Gothic" pitchFamily="34" charset="0"/>
-                <a:ea typeface="Malgun Gothic" pitchFamily="34" charset="-122"/>
-                <a:cs typeface="Malgun Gothic" pitchFamily="34" charset="-120"/>
-              </a:rPr>
-              <a:t>1~64자, 소문자 영문·숫자·하이픈</a:t>
-            </a:r>
-            <a:pPr indent="0" marL="0">
-              <a:lnSpc>
-                <a:spcPct val="104000"/>
-              </a:lnSpc>
-              <a:buNone/>
-            </a:pPr>
-            <a:r>
-              <a:rPr lang="en-US" sz="1300" dirty="0">
-                <a:solidFill>
-                  <a:srgbClr val="6B6357"/>
-                </a:solidFill>
-                <a:latin typeface="Malgun Gothic" pitchFamily="34" charset="0"/>
-                <a:ea typeface="Malgun Gothic" pitchFamily="34" charset="-122"/>
-                <a:cs typeface="Malgun Gothic" pitchFamily="34" charset="-120"/>
-              </a:rPr>
-              <a:t>(앞뒤 하이픈과 연속 하이픈 금지, </a:t>
-            </a:r>
-            <a:pPr indent="0" marL="0">
-              <a:lnSpc>
-                <a:spcPct val="104000"/>
-              </a:lnSpc>
-              <a:buNone/>
-            </a:pPr>
-            <a:r>
-              <a:rPr lang="en-US" sz="1300" b="1" dirty="0">
-                <a:solidFill>
-                  <a:srgbClr val="3F6B5F"/>
-                </a:solidFill>
-                <a:latin typeface="Malgun Gothic" pitchFamily="34" charset="0"/>
-                <a:ea typeface="Malgun Gothic" pitchFamily="34" charset="-122"/>
-                <a:cs typeface="Malgun Gothic" pitchFamily="34" charset="-120"/>
-              </a:rPr>
-              <a:t>Skill 폴더명과 일치</a:t>
-            </a:r>
-            <a:pPr indent="0" marL="0">
-              <a:lnSpc>
-                <a:spcPct val="104000"/>
-              </a:lnSpc>
-              <a:buNone/>
-            </a:pPr>
-            <a:r>
-              <a:rPr lang="en-US" sz="1300" dirty="0">
-                <a:solidFill>
-                  <a:srgbClr val="6B6357"/>
-                </a:solidFill>
-                <a:latin typeface="Malgun Gothic" pitchFamily="34" charset="0"/>
-                <a:ea typeface="Malgun Gothic" pitchFamily="34" charset="-122"/>
-                <a:cs typeface="Malgun Gothic" pitchFamily="34" charset="-120"/>
-              </a:rPr>
-              <a:t>), description은 </a:t>
-            </a:r>
-            <a:pPr indent="0" marL="0">
-              <a:lnSpc>
-                <a:spcPct val="104000"/>
-              </a:lnSpc>
-              <a:buNone/>
-            </a:pPr>
-            <a:r>
-              <a:rPr lang="en-US" sz="1300" b="1" dirty="0">
-                <a:solidFill>
-                  <a:srgbClr val="2A2723"/>
-                </a:solidFill>
-                <a:latin typeface="Malgun Gothic" pitchFamily="34" charset="0"/>
-                <a:ea typeface="Malgun Gothic" pitchFamily="34" charset="-122"/>
-                <a:cs typeface="Malgun Gothic" pitchFamily="34" charset="-120"/>
-              </a:rPr>
-              <a:t>1~1024자</a:t>
-            </a:r>
-            <a:endParaRPr lang="en-US" sz="1300" dirty="0"/>
-          </a:p>
-        </p:txBody>
-      </p:sp>
     </p:spTree>
   </p:cSld>
   <p:clrMapOvr>
